--- a/modules/week03/slides-03.pptx
+++ b/modules/week03/slides-03.pptx
@@ -6,50 +6,51 @@
     <p:sldMasterId id="2147483673" r:id="rId2"/>
   </p:sldMasterIdLst>
   <p:notesMasterIdLst>
-    <p:notesMasterId r:id="rId13"/>
+    <p:notesMasterId r:id="rId14"/>
   </p:notesMasterIdLst>
   <p:sldIdLst>
-    <p:sldId id="304" r:id="rId3"/>
-    <p:sldId id="305" r:id="rId4"/>
-    <p:sldId id="256" r:id="rId5"/>
-    <p:sldId id="257" r:id="rId6"/>
-    <p:sldId id="262" r:id="rId7"/>
-    <p:sldId id="264" r:id="rId8"/>
-    <p:sldId id="261" r:id="rId9"/>
-    <p:sldId id="299" r:id="rId10"/>
+    <p:sldId id="256" r:id="rId3"/>
+    <p:sldId id="257" r:id="rId4"/>
+    <p:sldId id="262" r:id="rId5"/>
+    <p:sldId id="311" r:id="rId6"/>
+    <p:sldId id="310" r:id="rId7"/>
+    <p:sldId id="305" r:id="rId8"/>
+    <p:sldId id="264" r:id="rId9"/>
+    <p:sldId id="307" r:id="rId10"/>
     <p:sldId id="300" r:id="rId11"/>
-    <p:sldId id="303" r:id="rId12"/>
+    <p:sldId id="309" r:id="rId12"/>
+    <p:sldId id="308" r:id="rId13"/>
   </p:sldIdLst>
   <p:sldSz cx="9144000" cy="5143500" type="screen16x9"/>
   <p:notesSz cx="6858000" cy="9144000"/>
   <p:embeddedFontLst>
     <p:embeddedFont>
       <p:font typeface="Avenir" panose="02000503020000020003" pitchFamily="2" charset="0"/>
-      <p:regular r:id="rId14"/>
-      <p:italic r:id="rId15"/>
+      <p:regular r:id="rId15"/>
+      <p:italic r:id="rId16"/>
     </p:embeddedFont>
     <p:embeddedFont>
       <p:font typeface="Avenir Book" panose="02000503020000020003" pitchFamily="2" charset="0"/>
-      <p:regular r:id="rId16"/>
-      <p:italic r:id="rId17"/>
+      <p:regular r:id="rId17"/>
+      <p:italic r:id="rId18"/>
     </p:embeddedFont>
     <p:embeddedFont>
       <p:font typeface="Century Gothic" panose="020B0502020202020204" pitchFamily="34" charset="0"/>
-      <p:regular r:id="rId18"/>
-      <p:bold r:id="rId19"/>
-      <p:italic r:id="rId20"/>
-      <p:boldItalic r:id="rId21"/>
+      <p:regular r:id="rId19"/>
+      <p:bold r:id="rId20"/>
+      <p:italic r:id="rId21"/>
+      <p:boldItalic r:id="rId22"/>
     </p:embeddedFont>
     <p:embeddedFont>
       <p:font typeface="Lobster" pitchFamily="2" charset="77"/>
-      <p:regular r:id="rId22"/>
+      <p:regular r:id="rId23"/>
     </p:embeddedFont>
     <p:embeddedFont>
       <p:font typeface="Nunito Sans" pitchFamily="2" charset="77"/>
-      <p:regular r:id="rId23"/>
-      <p:bold r:id="rId24"/>
-      <p:italic r:id="rId25"/>
-      <p:boldItalic r:id="rId26"/>
+      <p:regular r:id="rId24"/>
+      <p:bold r:id="rId25"/>
+      <p:italic r:id="rId26"/>
+      <p:boldItalic r:id="rId27"/>
     </p:embeddedFont>
   </p:embeddedFontLst>
   <p:defaultTextStyle>
@@ -742,174 +743,6 @@
 </file>
 
 <file path=ppt/notesSlides/notesSlide1.xml><?xml version="1.0" encoding="utf-8"?>
-<p:notes xmlns:a="http://schemas.openxmlformats.org/drawingml/2006/main" xmlns:r="http://schemas.openxmlformats.org/officeDocument/2006/relationships" xmlns:p="http://schemas.openxmlformats.org/presentationml/2006/main">
-  <p:cSld>
-    <p:spTree>
-      <p:nvGrpSpPr>
-        <p:cNvPr id="1" name="">
-          <a:extLst>
-            <a:ext uri="{FF2B5EF4-FFF2-40B4-BE49-F238E27FC236}">
-              <a16:creationId xmlns:a16="http://schemas.microsoft.com/office/drawing/2014/main" id="{7B7CEFF2-DF02-6A78-B1F3-322EA62E2F7D}"/>
-            </a:ext>
-          </a:extLst>
-        </p:cNvPr>
-        <p:cNvGrpSpPr/>
-        <p:nvPr/>
-      </p:nvGrpSpPr>
-      <p:grpSpPr>
-        <a:xfrm>
-          <a:off x="0" y="0"/>
-          <a:ext cx="0" cy="0"/>
-          <a:chOff x="0" y="0"/>
-          <a:chExt cx="0" cy="0"/>
-        </a:xfrm>
-      </p:grpSpPr>
-      <p:sp>
-        <p:nvSpPr>
-          <p:cNvPr id="2" name="Slide Image Placeholder 1">
-            <a:extLst>
-              <a:ext uri="{FF2B5EF4-FFF2-40B4-BE49-F238E27FC236}">
-                <a16:creationId xmlns:a16="http://schemas.microsoft.com/office/drawing/2014/main" id="{E0C66973-BD04-0C65-38CA-68C20D98D0C0}"/>
-              </a:ext>
-            </a:extLst>
-          </p:cNvPr>
-          <p:cNvSpPr>
-            <a:spLocks noGrp="1" noRot="1" noChangeAspect="1"/>
-          </p:cNvSpPr>
-          <p:nvPr>
-            <p:ph type="sldImg"/>
-          </p:nvPr>
-        </p:nvSpPr>
-        <p:spPr>
-          <a:xfrm>
-            <a:off x="381000" y="685800"/>
-            <a:ext cx="6096000" cy="3429000"/>
-          </a:xfrm>
-        </p:spPr>
-      </p:sp>
-      <p:sp>
-        <p:nvSpPr>
-          <p:cNvPr id="3" name="Notes Placeholder 2">
-            <a:extLst>
-              <a:ext uri="{FF2B5EF4-FFF2-40B4-BE49-F238E27FC236}">
-                <a16:creationId xmlns:a16="http://schemas.microsoft.com/office/drawing/2014/main" id="{5220FEEE-1353-0E04-537D-594ACC81CE43}"/>
-              </a:ext>
-            </a:extLst>
-          </p:cNvPr>
-          <p:cNvSpPr>
-            <a:spLocks noGrp="1"/>
-          </p:cNvSpPr>
-          <p:nvPr>
-            <p:ph type="body" idx="1"/>
-          </p:nvPr>
-        </p:nvSpPr>
-        <p:spPr/>
-        <p:txBody>
-          <a:bodyPr/>
-          <a:lstStyle/>
-          <a:p>
-            <a:endParaRPr lang="en-US" dirty="0"/>
-          </a:p>
-        </p:txBody>
-      </p:sp>
-    </p:spTree>
-    <p:extLst>
-      <p:ext uri="{BB962C8B-B14F-4D97-AF65-F5344CB8AC3E}">
-        <p14:creationId xmlns:p14="http://schemas.microsoft.com/office/powerpoint/2010/main" val="1356037975"/>
-      </p:ext>
-    </p:extLst>
-  </p:cSld>
-  <p:clrMapOvr>
-    <a:masterClrMapping/>
-  </p:clrMapOvr>
-</p:notes>
-</file>
-
-<file path=ppt/notesSlides/notesSlide2.xml><?xml version="1.0" encoding="utf-8"?>
-<p:notes xmlns:a="http://schemas.openxmlformats.org/drawingml/2006/main" xmlns:r="http://schemas.openxmlformats.org/officeDocument/2006/relationships" xmlns:p="http://schemas.openxmlformats.org/presentationml/2006/main">
-  <p:cSld>
-    <p:spTree>
-      <p:nvGrpSpPr>
-        <p:cNvPr id="1" name="">
-          <a:extLst>
-            <a:ext uri="{FF2B5EF4-FFF2-40B4-BE49-F238E27FC236}">
-              <a16:creationId xmlns:a16="http://schemas.microsoft.com/office/drawing/2014/main" id="{75AF5EA4-2496-7987-2F20-3B9F20673AA0}"/>
-            </a:ext>
-          </a:extLst>
-        </p:cNvPr>
-        <p:cNvGrpSpPr/>
-        <p:nvPr/>
-      </p:nvGrpSpPr>
-      <p:grpSpPr>
-        <a:xfrm>
-          <a:off x="0" y="0"/>
-          <a:ext cx="0" cy="0"/>
-          <a:chOff x="0" y="0"/>
-          <a:chExt cx="0" cy="0"/>
-        </a:xfrm>
-      </p:grpSpPr>
-      <p:sp>
-        <p:nvSpPr>
-          <p:cNvPr id="2" name="Slide Image Placeholder 1">
-            <a:extLst>
-              <a:ext uri="{FF2B5EF4-FFF2-40B4-BE49-F238E27FC236}">
-                <a16:creationId xmlns:a16="http://schemas.microsoft.com/office/drawing/2014/main" id="{32A08A88-368B-0080-5AD9-E6885896FF7D}"/>
-              </a:ext>
-            </a:extLst>
-          </p:cNvPr>
-          <p:cNvSpPr>
-            <a:spLocks noGrp="1" noRot="1" noChangeAspect="1"/>
-          </p:cNvSpPr>
-          <p:nvPr>
-            <p:ph type="sldImg"/>
-          </p:nvPr>
-        </p:nvSpPr>
-        <p:spPr>
-          <a:xfrm>
-            <a:off x="381000" y="685800"/>
-            <a:ext cx="6096000" cy="3429000"/>
-          </a:xfrm>
-        </p:spPr>
-      </p:sp>
-      <p:sp>
-        <p:nvSpPr>
-          <p:cNvPr id="3" name="Notes Placeholder 2">
-            <a:extLst>
-              <a:ext uri="{FF2B5EF4-FFF2-40B4-BE49-F238E27FC236}">
-                <a16:creationId xmlns:a16="http://schemas.microsoft.com/office/drawing/2014/main" id="{BACE8FDF-8264-01BC-5D27-384F79016B02}"/>
-              </a:ext>
-            </a:extLst>
-          </p:cNvPr>
-          <p:cNvSpPr>
-            <a:spLocks noGrp="1"/>
-          </p:cNvSpPr>
-          <p:nvPr>
-            <p:ph type="body" idx="1"/>
-          </p:nvPr>
-        </p:nvSpPr>
-        <p:spPr/>
-        <p:txBody>
-          <a:bodyPr/>
-          <a:lstStyle/>
-          <a:p>
-            <a:endParaRPr lang="en-US" dirty="0"/>
-          </a:p>
-        </p:txBody>
-      </p:sp>
-    </p:spTree>
-    <p:extLst>
-      <p:ext uri="{BB962C8B-B14F-4D97-AF65-F5344CB8AC3E}">
-        <p14:creationId xmlns:p14="http://schemas.microsoft.com/office/powerpoint/2010/main" val="3679654659"/>
-      </p:ext>
-    </p:extLst>
-  </p:cSld>
-  <p:clrMapOvr>
-    <a:masterClrMapping/>
-  </p:clrMapOvr>
-</p:notes>
-</file>
-
-<file path=ppt/notesSlides/notesSlide3.xml><?xml version="1.0" encoding="utf-8"?>
 <p:notes xmlns:a="http://schemas.openxmlformats.org/drawingml/2006/main" xmlns:r="http://schemas.openxmlformats.org/officeDocument/2006/relationships" xmlns:p="http://schemas.openxmlformats.org/presentationml/2006/main" showMasterSp="0" showMasterPhAnim="0">
   <p:cSld>
     <p:spTree>
@@ -1012,7 +845,175 @@
 </p:notes>
 </file>
 
-<file path=ppt/notesSlides/notesSlide4.xml><?xml version="1.0" encoding="utf-8"?>
+<file path=ppt/notesSlides/notesSlide10.xml><?xml version="1.0" encoding="utf-8"?>
+<p:notes xmlns:a="http://schemas.openxmlformats.org/drawingml/2006/main" xmlns:r="http://schemas.openxmlformats.org/officeDocument/2006/relationships" xmlns:p="http://schemas.openxmlformats.org/presentationml/2006/main">
+  <p:cSld>
+    <p:spTree>
+      <p:nvGrpSpPr>
+        <p:cNvPr id="1" name="">
+          <a:extLst>
+            <a:ext uri="{FF2B5EF4-FFF2-40B4-BE49-F238E27FC236}">
+              <a16:creationId xmlns:a16="http://schemas.microsoft.com/office/drawing/2014/main" id="{E4ED1A1A-553F-FA47-6DFB-87876727F80B}"/>
+            </a:ext>
+          </a:extLst>
+        </p:cNvPr>
+        <p:cNvGrpSpPr/>
+        <p:nvPr/>
+      </p:nvGrpSpPr>
+      <p:grpSpPr>
+        <a:xfrm>
+          <a:off x="0" y="0"/>
+          <a:ext cx="0" cy="0"/>
+          <a:chOff x="0" y="0"/>
+          <a:chExt cx="0" cy="0"/>
+        </a:xfrm>
+      </p:grpSpPr>
+      <p:sp>
+        <p:nvSpPr>
+          <p:cNvPr id="2" name="Slide Image Placeholder 1">
+            <a:extLst>
+              <a:ext uri="{FF2B5EF4-FFF2-40B4-BE49-F238E27FC236}">
+                <a16:creationId xmlns:a16="http://schemas.microsoft.com/office/drawing/2014/main" id="{0A64458F-17AF-ED4B-E940-B03F200A3537}"/>
+              </a:ext>
+            </a:extLst>
+          </p:cNvPr>
+          <p:cNvSpPr>
+            <a:spLocks noGrp="1" noRot="1" noChangeAspect="1"/>
+          </p:cNvSpPr>
+          <p:nvPr>
+            <p:ph type="sldImg"/>
+          </p:nvPr>
+        </p:nvSpPr>
+        <p:spPr>
+          <a:xfrm>
+            <a:off x="381000" y="685800"/>
+            <a:ext cx="6096000" cy="3429000"/>
+          </a:xfrm>
+        </p:spPr>
+      </p:sp>
+      <p:sp>
+        <p:nvSpPr>
+          <p:cNvPr id="3" name="Notes Placeholder 2">
+            <a:extLst>
+              <a:ext uri="{FF2B5EF4-FFF2-40B4-BE49-F238E27FC236}">
+                <a16:creationId xmlns:a16="http://schemas.microsoft.com/office/drawing/2014/main" id="{EDAB6291-FD61-0FD8-2DF1-BB5F751C51FF}"/>
+              </a:ext>
+            </a:extLst>
+          </p:cNvPr>
+          <p:cNvSpPr>
+            <a:spLocks noGrp="1"/>
+          </p:cNvSpPr>
+          <p:nvPr>
+            <p:ph type="body" idx="1"/>
+          </p:nvPr>
+        </p:nvSpPr>
+        <p:spPr/>
+        <p:txBody>
+          <a:bodyPr/>
+          <a:lstStyle/>
+          <a:p>
+            <a:endParaRPr lang="en-US" dirty="0"/>
+          </a:p>
+        </p:txBody>
+      </p:sp>
+    </p:spTree>
+    <p:extLst>
+      <p:ext uri="{BB962C8B-B14F-4D97-AF65-F5344CB8AC3E}">
+        <p14:creationId xmlns:p14="http://schemas.microsoft.com/office/powerpoint/2010/main" val="2789388156"/>
+      </p:ext>
+    </p:extLst>
+  </p:cSld>
+  <p:clrMapOvr>
+    <a:masterClrMapping/>
+  </p:clrMapOvr>
+</p:notes>
+</file>
+
+<file path=ppt/notesSlides/notesSlide11.xml><?xml version="1.0" encoding="utf-8"?>
+<p:notes xmlns:a="http://schemas.openxmlformats.org/drawingml/2006/main" xmlns:r="http://schemas.openxmlformats.org/officeDocument/2006/relationships" xmlns:p="http://schemas.openxmlformats.org/presentationml/2006/main">
+  <p:cSld>
+    <p:spTree>
+      <p:nvGrpSpPr>
+        <p:cNvPr id="1" name="">
+          <a:extLst>
+            <a:ext uri="{FF2B5EF4-FFF2-40B4-BE49-F238E27FC236}">
+              <a16:creationId xmlns:a16="http://schemas.microsoft.com/office/drawing/2014/main" id="{0AFD55DA-78ED-299F-E0AC-4158204014E5}"/>
+            </a:ext>
+          </a:extLst>
+        </p:cNvPr>
+        <p:cNvGrpSpPr/>
+        <p:nvPr/>
+      </p:nvGrpSpPr>
+      <p:grpSpPr>
+        <a:xfrm>
+          <a:off x="0" y="0"/>
+          <a:ext cx="0" cy="0"/>
+          <a:chOff x="0" y="0"/>
+          <a:chExt cx="0" cy="0"/>
+        </a:xfrm>
+      </p:grpSpPr>
+      <p:sp>
+        <p:nvSpPr>
+          <p:cNvPr id="2" name="Slide Image Placeholder 1">
+            <a:extLst>
+              <a:ext uri="{FF2B5EF4-FFF2-40B4-BE49-F238E27FC236}">
+                <a16:creationId xmlns:a16="http://schemas.microsoft.com/office/drawing/2014/main" id="{58D4B17E-776A-599C-9CC6-A90DC0955DB9}"/>
+              </a:ext>
+            </a:extLst>
+          </p:cNvPr>
+          <p:cNvSpPr>
+            <a:spLocks noGrp="1" noRot="1" noChangeAspect="1"/>
+          </p:cNvSpPr>
+          <p:nvPr>
+            <p:ph type="sldImg"/>
+          </p:nvPr>
+        </p:nvSpPr>
+        <p:spPr>
+          <a:xfrm>
+            <a:off x="381000" y="685800"/>
+            <a:ext cx="6096000" cy="3429000"/>
+          </a:xfrm>
+        </p:spPr>
+      </p:sp>
+      <p:sp>
+        <p:nvSpPr>
+          <p:cNvPr id="3" name="Notes Placeholder 2">
+            <a:extLst>
+              <a:ext uri="{FF2B5EF4-FFF2-40B4-BE49-F238E27FC236}">
+                <a16:creationId xmlns:a16="http://schemas.microsoft.com/office/drawing/2014/main" id="{FC26E958-5699-81AD-6E60-667AD1178B12}"/>
+              </a:ext>
+            </a:extLst>
+          </p:cNvPr>
+          <p:cNvSpPr>
+            <a:spLocks noGrp="1"/>
+          </p:cNvSpPr>
+          <p:nvPr>
+            <p:ph type="body" idx="1"/>
+          </p:nvPr>
+        </p:nvSpPr>
+        <p:spPr/>
+        <p:txBody>
+          <a:bodyPr/>
+          <a:lstStyle/>
+          <a:p>
+            <a:endParaRPr lang="en-US" dirty="0"/>
+          </a:p>
+        </p:txBody>
+      </p:sp>
+    </p:spTree>
+    <p:extLst>
+      <p:ext uri="{BB962C8B-B14F-4D97-AF65-F5344CB8AC3E}">
+        <p14:creationId xmlns:p14="http://schemas.microsoft.com/office/powerpoint/2010/main" val="3878351482"/>
+      </p:ext>
+    </p:extLst>
+  </p:cSld>
+  <p:clrMapOvr>
+    <a:masterClrMapping/>
+  </p:clrMapOvr>
+</p:notes>
+</file>
+
+<file path=ppt/notesSlides/notesSlide2.xml><?xml version="1.0" encoding="utf-8"?>
 <p:notes xmlns:a="http://schemas.openxmlformats.org/drawingml/2006/main" xmlns:r="http://schemas.openxmlformats.org/officeDocument/2006/relationships" xmlns:p="http://schemas.openxmlformats.org/presentationml/2006/main" showMasterSp="0" showMasterPhAnim="0">
   <p:cSld>
     <p:spTree>
@@ -1115,7 +1116,7 @@
 </p:notes>
 </file>
 
-<file path=ppt/notesSlides/notesSlide5.xml><?xml version="1.0" encoding="utf-8"?>
+<file path=ppt/notesSlides/notesSlide3.xml><?xml version="1.0" encoding="utf-8"?>
 <p:notes xmlns:a="http://schemas.openxmlformats.org/drawingml/2006/main" xmlns:r="http://schemas.openxmlformats.org/officeDocument/2006/relationships" xmlns:p="http://schemas.openxmlformats.org/presentationml/2006/main">
   <p:cSld>
     <p:spTree>
@@ -1184,12 +1185,18 @@
 </p:notes>
 </file>
 
-<file path=ppt/notesSlides/notesSlide6.xml><?xml version="1.0" encoding="utf-8"?>
-<p:notes xmlns:a="http://schemas.openxmlformats.org/drawingml/2006/main" xmlns:r="http://schemas.openxmlformats.org/officeDocument/2006/relationships" xmlns:p="http://schemas.openxmlformats.org/presentationml/2006/main">
+<file path=ppt/notesSlides/notesSlide4.xml><?xml version="1.0" encoding="utf-8"?>
+<p:notes xmlns:a="http://schemas.openxmlformats.org/drawingml/2006/main" xmlns:r="http://schemas.openxmlformats.org/officeDocument/2006/relationships" xmlns:p="http://schemas.openxmlformats.org/presentationml/2006/main" showMasterSp="0" showMasterPhAnim="0">
   <p:cSld>
     <p:spTree>
       <p:nvGrpSpPr>
-        <p:cNvPr id="1" name=""/>
+        <p:cNvPr id="1" name="Shape 142">
+          <a:extLst>
+            <a:ext uri="{FF2B5EF4-FFF2-40B4-BE49-F238E27FC236}">
+              <a16:creationId xmlns:a16="http://schemas.microsoft.com/office/drawing/2014/main" id="{ABB833BC-E8C9-974F-B589-D124340938A6}"/>
+            </a:ext>
+          </a:extLst>
+        </p:cNvPr>
         <p:cNvGrpSpPr/>
         <p:nvPr/>
       </p:nvGrpSpPr>
@@ -1203,7 +1210,301 @@
       </p:grpSpPr>
       <p:sp>
         <p:nvSpPr>
-          <p:cNvPr id="2" name="Slide Image Placeholder 1"/>
+          <p:cNvPr id="143" name="Google Shape;143;g2231e351ad2_0_244:notes">
+            <a:extLst>
+              <a:ext uri="{FF2B5EF4-FFF2-40B4-BE49-F238E27FC236}">
+                <a16:creationId xmlns:a16="http://schemas.microsoft.com/office/drawing/2014/main" id="{007FD177-CA10-C8D7-EAF0-D26FA05EB09D}"/>
+              </a:ext>
+            </a:extLst>
+          </p:cNvPr>
+          <p:cNvSpPr>
+            <a:spLocks noGrp="1" noRot="1" noChangeAspect="1"/>
+          </p:cNvSpPr>
+          <p:nvPr>
+            <p:ph type="sldImg" idx="2"/>
+          </p:nvPr>
+        </p:nvSpPr>
+        <p:spPr>
+          <a:xfrm>
+            <a:off x="381000" y="685800"/>
+            <a:ext cx="6096000" cy="3429000"/>
+          </a:xfrm>
+          <a:custGeom>
+            <a:avLst/>
+            <a:gdLst/>
+            <a:ahLst/>
+            <a:cxnLst/>
+            <a:rect l="l" t="t" r="r" b="b"/>
+            <a:pathLst>
+              <a:path w="120000" h="120000" extrusionOk="0">
+                <a:moveTo>
+                  <a:pt x="0" y="0"/>
+                </a:moveTo>
+                <a:lnTo>
+                  <a:pt x="120000" y="0"/>
+                </a:lnTo>
+                <a:lnTo>
+                  <a:pt x="120000" y="120000"/>
+                </a:lnTo>
+                <a:lnTo>
+                  <a:pt x="0" y="120000"/>
+                </a:lnTo>
+                <a:close/>
+              </a:path>
+            </a:pathLst>
+          </a:custGeom>
+        </p:spPr>
+      </p:sp>
+      <p:sp>
+        <p:nvSpPr>
+          <p:cNvPr id="144" name="Google Shape;144;g2231e351ad2_0_244:notes">
+            <a:extLst>
+              <a:ext uri="{FF2B5EF4-FFF2-40B4-BE49-F238E27FC236}">
+                <a16:creationId xmlns:a16="http://schemas.microsoft.com/office/drawing/2014/main" id="{46C39F17-1519-16E5-06EE-76992FA8C225}"/>
+              </a:ext>
+            </a:extLst>
+          </p:cNvPr>
+          <p:cNvSpPr txBox="1">
+            <a:spLocks noGrp="1"/>
+          </p:cNvSpPr>
+          <p:nvPr>
+            <p:ph type="body" idx="1"/>
+          </p:nvPr>
+        </p:nvSpPr>
+        <p:spPr>
+          <a:xfrm>
+            <a:off x="685800" y="4343400"/>
+            <a:ext cx="5486400" cy="4114800"/>
+          </a:xfrm>
+          <a:prstGeom prst="rect">
+            <a:avLst/>
+          </a:prstGeom>
+        </p:spPr>
+        <p:txBody>
+          <a:bodyPr spcFirstLastPara="1" wrap="square" lIns="91425" tIns="91425" rIns="91425" bIns="91425" anchor="t" anchorCtr="0">
+            <a:noAutofit/>
+          </a:bodyPr>
+          <a:lstStyle/>
+          <a:p>
+            <a:pPr marL="171450" lvl="0" indent="-171450" algn="l" rtl="0">
+              <a:spcBef>
+                <a:spcPts val="0"/>
+              </a:spcBef>
+              <a:spcAft>
+                <a:spcPts val="0"/>
+              </a:spcAft>
+            </a:pPr>
+            <a:r>
+              <a:rPr lang="en-US" dirty="0"/>
+              <a:t>We often organize data hierarchically: filesystems, XML, HTML, JSON, …</a:t>
+            </a:r>
+          </a:p>
+          <a:p>
+            <a:pPr marL="171450" lvl="0" indent="-171450" algn="l" rtl="0">
+              <a:spcBef>
+                <a:spcPts val="0"/>
+              </a:spcBef>
+              <a:spcAft>
+                <a:spcPts val="0"/>
+              </a:spcAft>
+            </a:pPr>
+            <a:r>
+              <a:rPr lang="en-US" dirty="0"/>
+              <a:t>Relational: group all entities of given type together.  Expensive (though as will be seen, indexes assuage that a lot), but allows for arbitrary relationships</a:t>
+            </a:r>
+            <a:endParaRPr dirty="0"/>
+          </a:p>
+        </p:txBody>
+      </p:sp>
+    </p:spTree>
+    <p:extLst>
+      <p:ext uri="{BB962C8B-B14F-4D97-AF65-F5344CB8AC3E}">
+        <p14:creationId xmlns:p14="http://schemas.microsoft.com/office/powerpoint/2010/main" val="2081081582"/>
+      </p:ext>
+    </p:extLst>
+  </p:cSld>
+  <p:clrMapOvr>
+    <a:masterClrMapping/>
+  </p:clrMapOvr>
+</p:notes>
+</file>
+
+<file path=ppt/notesSlides/notesSlide5.xml><?xml version="1.0" encoding="utf-8"?>
+<p:notes xmlns:a="http://schemas.openxmlformats.org/drawingml/2006/main" xmlns:r="http://schemas.openxmlformats.org/officeDocument/2006/relationships" xmlns:p="http://schemas.openxmlformats.org/presentationml/2006/main" showMasterSp="0" showMasterPhAnim="0">
+  <p:cSld>
+    <p:spTree>
+      <p:nvGrpSpPr>
+        <p:cNvPr id="1" name="Shape 142">
+          <a:extLst>
+            <a:ext uri="{FF2B5EF4-FFF2-40B4-BE49-F238E27FC236}">
+              <a16:creationId xmlns:a16="http://schemas.microsoft.com/office/drawing/2014/main" id="{EB6513C9-182D-BE09-6436-1CAD118075D3}"/>
+            </a:ext>
+          </a:extLst>
+        </p:cNvPr>
+        <p:cNvGrpSpPr/>
+        <p:nvPr/>
+      </p:nvGrpSpPr>
+      <p:grpSpPr>
+        <a:xfrm>
+          <a:off x="0" y="0"/>
+          <a:ext cx="0" cy="0"/>
+          <a:chOff x="0" y="0"/>
+          <a:chExt cx="0" cy="0"/>
+        </a:xfrm>
+      </p:grpSpPr>
+      <p:sp>
+        <p:nvSpPr>
+          <p:cNvPr id="143" name="Google Shape;143;g2231e351ad2_0_244:notes">
+            <a:extLst>
+              <a:ext uri="{FF2B5EF4-FFF2-40B4-BE49-F238E27FC236}">
+                <a16:creationId xmlns:a16="http://schemas.microsoft.com/office/drawing/2014/main" id="{B5EC3B4B-9B7E-10F1-1563-2372402EB6BC}"/>
+              </a:ext>
+            </a:extLst>
+          </p:cNvPr>
+          <p:cNvSpPr>
+            <a:spLocks noGrp="1" noRot="1" noChangeAspect="1"/>
+          </p:cNvSpPr>
+          <p:nvPr>
+            <p:ph type="sldImg" idx="2"/>
+          </p:nvPr>
+        </p:nvSpPr>
+        <p:spPr>
+          <a:xfrm>
+            <a:off x="381000" y="685800"/>
+            <a:ext cx="6096000" cy="3429000"/>
+          </a:xfrm>
+          <a:custGeom>
+            <a:avLst/>
+            <a:gdLst/>
+            <a:ahLst/>
+            <a:cxnLst/>
+            <a:rect l="l" t="t" r="r" b="b"/>
+            <a:pathLst>
+              <a:path w="120000" h="120000" extrusionOk="0">
+                <a:moveTo>
+                  <a:pt x="0" y="0"/>
+                </a:moveTo>
+                <a:lnTo>
+                  <a:pt x="120000" y="0"/>
+                </a:lnTo>
+                <a:lnTo>
+                  <a:pt x="120000" y="120000"/>
+                </a:lnTo>
+                <a:lnTo>
+                  <a:pt x="0" y="120000"/>
+                </a:lnTo>
+                <a:close/>
+              </a:path>
+            </a:pathLst>
+          </a:custGeom>
+        </p:spPr>
+      </p:sp>
+      <p:sp>
+        <p:nvSpPr>
+          <p:cNvPr id="144" name="Google Shape;144;g2231e351ad2_0_244:notes">
+            <a:extLst>
+              <a:ext uri="{FF2B5EF4-FFF2-40B4-BE49-F238E27FC236}">
+                <a16:creationId xmlns:a16="http://schemas.microsoft.com/office/drawing/2014/main" id="{932C1E9F-FBFE-EF4C-B8F4-5860A401AB6C}"/>
+              </a:ext>
+            </a:extLst>
+          </p:cNvPr>
+          <p:cNvSpPr txBox="1">
+            <a:spLocks noGrp="1"/>
+          </p:cNvSpPr>
+          <p:nvPr>
+            <p:ph type="body" idx="1"/>
+          </p:nvPr>
+        </p:nvSpPr>
+        <p:spPr>
+          <a:xfrm>
+            <a:off x="685800" y="4343400"/>
+            <a:ext cx="5486400" cy="4114800"/>
+          </a:xfrm>
+          <a:prstGeom prst="rect">
+            <a:avLst/>
+          </a:prstGeom>
+        </p:spPr>
+        <p:txBody>
+          <a:bodyPr spcFirstLastPara="1" wrap="square" lIns="91425" tIns="91425" rIns="91425" bIns="91425" anchor="t" anchorCtr="0">
+            <a:noAutofit/>
+          </a:bodyPr>
+          <a:lstStyle/>
+          <a:p>
+            <a:pPr marL="171450" lvl="0" indent="-171450" algn="l" rtl="0">
+              <a:spcBef>
+                <a:spcPts val="0"/>
+              </a:spcBef>
+              <a:spcAft>
+                <a:spcPts val="0"/>
+              </a:spcAft>
+            </a:pPr>
+            <a:r>
+              <a:rPr lang="en-US" dirty="0"/>
+              <a:t>Transactional: might split off infrequently-used attributes to limit amount of I/O required</a:t>
+            </a:r>
+          </a:p>
+          <a:p>
+            <a:pPr marL="171450" lvl="0" indent="-171450" algn="l" rtl="0">
+              <a:spcBef>
+                <a:spcPts val="0"/>
+              </a:spcBef>
+              <a:spcAft>
+                <a:spcPts val="0"/>
+              </a:spcAft>
+            </a:pPr>
+            <a:r>
+              <a:rPr lang="en-US" dirty="0"/>
+              <a:t>Analytical: might grab desired attributes of species (scientific name, endemic, etc.) and just fold them into main observation table for convenience</a:t>
+            </a:r>
+            <a:endParaRPr dirty="0"/>
+          </a:p>
+        </p:txBody>
+      </p:sp>
+    </p:spTree>
+    <p:extLst>
+      <p:ext uri="{BB962C8B-B14F-4D97-AF65-F5344CB8AC3E}">
+        <p14:creationId xmlns:p14="http://schemas.microsoft.com/office/powerpoint/2010/main" val="2598358471"/>
+      </p:ext>
+    </p:extLst>
+  </p:cSld>
+  <p:clrMapOvr>
+    <a:masterClrMapping/>
+  </p:clrMapOvr>
+</p:notes>
+</file>
+
+<file path=ppt/notesSlides/notesSlide6.xml><?xml version="1.0" encoding="utf-8"?>
+<p:notes xmlns:a="http://schemas.openxmlformats.org/drawingml/2006/main" xmlns:r="http://schemas.openxmlformats.org/officeDocument/2006/relationships" xmlns:p="http://schemas.openxmlformats.org/presentationml/2006/main">
+  <p:cSld>
+    <p:spTree>
+      <p:nvGrpSpPr>
+        <p:cNvPr id="1" name="">
+          <a:extLst>
+            <a:ext uri="{FF2B5EF4-FFF2-40B4-BE49-F238E27FC236}">
+              <a16:creationId xmlns:a16="http://schemas.microsoft.com/office/drawing/2014/main" id="{75AF5EA4-2496-7987-2F20-3B9F20673AA0}"/>
+            </a:ext>
+          </a:extLst>
+        </p:cNvPr>
+        <p:cNvGrpSpPr/>
+        <p:nvPr/>
+      </p:nvGrpSpPr>
+      <p:grpSpPr>
+        <a:xfrm>
+          <a:off x="0" y="0"/>
+          <a:ext cx="0" cy="0"/>
+          <a:chOff x="0" y="0"/>
+          <a:chExt cx="0" cy="0"/>
+        </a:xfrm>
+      </p:grpSpPr>
+      <p:sp>
+        <p:nvSpPr>
+          <p:cNvPr id="2" name="Slide Image Placeholder 1">
+            <a:extLst>
+              <a:ext uri="{FF2B5EF4-FFF2-40B4-BE49-F238E27FC236}">
+                <a16:creationId xmlns:a16="http://schemas.microsoft.com/office/drawing/2014/main" id="{32A08A88-368B-0080-5AD9-E6885896FF7D}"/>
+              </a:ext>
+            </a:extLst>
+          </p:cNvPr>
           <p:cNvSpPr>
             <a:spLocks noGrp="1" noRot="1" noChangeAspect="1"/>
           </p:cNvSpPr>
@@ -1220,7 +1521,13 @@
       </p:sp>
       <p:sp>
         <p:nvSpPr>
-          <p:cNvPr id="3" name="Notes Placeholder 2"/>
+          <p:cNvPr id="3" name="Notes Placeholder 2">
+            <a:extLst>
+              <a:ext uri="{FF2B5EF4-FFF2-40B4-BE49-F238E27FC236}">
+                <a16:creationId xmlns:a16="http://schemas.microsoft.com/office/drawing/2014/main" id="{BACE8FDF-8264-01BC-5D27-384F79016B02}"/>
+              </a:ext>
+            </a:extLst>
+          </p:cNvPr>
           <p:cNvSpPr>
             <a:spLocks noGrp="1"/>
           </p:cNvSpPr>
@@ -1235,7 +1542,13 @@
           <a:p>
             <a:r>
               <a:rPr lang="en-US" dirty="0"/>
-              <a:t>R joins are very similar to SQL joins, why is R procedural and SQL declarative?  Read on…</a:t>
+              <a:t>Pro: more efficient if that is a frequently needed quantity. Recall that all students will be in same table, so filtering/counting may be expensive.</a:t>
+            </a:r>
+          </a:p>
+          <a:p>
+            <a:r>
+              <a:rPr lang="en-US" dirty="0"/>
+              <a:t>Con: must be (re)computed, must remember to (re)compute it</a:t>
             </a:r>
           </a:p>
         </p:txBody>
@@ -1243,7 +1556,7 @@
     </p:spTree>
     <p:extLst>
       <p:ext uri="{BB962C8B-B14F-4D97-AF65-F5344CB8AC3E}">
-        <p14:creationId xmlns:p14="http://schemas.microsoft.com/office/powerpoint/2010/main" val="2795821018"/>
+        <p14:creationId xmlns:p14="http://schemas.microsoft.com/office/powerpoint/2010/main" val="3679654659"/>
       </p:ext>
     </p:extLst>
   </p:cSld>
@@ -1302,35 +1615,14 @@
           <a:bodyPr/>
           <a:lstStyle/>
           <a:p>
-            <a:r>
-              <a:rPr lang="en-US" dirty="0"/>
-              <a:t>Server is an engine that is always running, anticipating multiple queries simultaneously</a:t>
-            </a:r>
-          </a:p>
-          <a:p>
-            <a:r>
-              <a:rPr lang="en-US" dirty="0"/>
-              <a:t>Tremendous amount of variability in how queries are processed; asynchronous processing</a:t>
-            </a:r>
-          </a:p>
-          <a:p>
-            <a:r>
-              <a:rPr lang="en-US" dirty="0"/>
-              <a:t>This explains way rows are not just conceptually unordered, but might be returned in different order on every query</a:t>
-            </a:r>
-          </a:p>
-          <a:p>
-            <a:r>
-              <a:rPr lang="en-US" dirty="0"/>
-              <a:t>Explains why SQL is considered declarative: RDBMS decides how to implement</a:t>
-            </a:r>
+            <a:endParaRPr lang="en-US" dirty="0"/>
           </a:p>
         </p:txBody>
       </p:sp>
     </p:spTree>
     <p:extLst>
       <p:ext uri="{BB962C8B-B14F-4D97-AF65-F5344CB8AC3E}">
-        <p14:creationId xmlns:p14="http://schemas.microsoft.com/office/powerpoint/2010/main" val="391050117"/>
+        <p14:creationId xmlns:p14="http://schemas.microsoft.com/office/powerpoint/2010/main" val="2795821018"/>
       </p:ext>
     </p:extLst>
   </p:cSld>
@@ -1341,6 +1633,90 @@
 </file>
 
 <file path=ppt/notesSlides/notesSlide8.xml><?xml version="1.0" encoding="utf-8"?>
+<p:notes xmlns:a="http://schemas.openxmlformats.org/drawingml/2006/main" xmlns:r="http://schemas.openxmlformats.org/officeDocument/2006/relationships" xmlns:p="http://schemas.openxmlformats.org/presentationml/2006/main">
+  <p:cSld>
+    <p:spTree>
+      <p:nvGrpSpPr>
+        <p:cNvPr id="1" name="">
+          <a:extLst>
+            <a:ext uri="{FF2B5EF4-FFF2-40B4-BE49-F238E27FC236}">
+              <a16:creationId xmlns:a16="http://schemas.microsoft.com/office/drawing/2014/main" id="{990C8E07-5CA6-5231-6ECA-8E731CF98FCA}"/>
+            </a:ext>
+          </a:extLst>
+        </p:cNvPr>
+        <p:cNvGrpSpPr/>
+        <p:nvPr/>
+      </p:nvGrpSpPr>
+      <p:grpSpPr>
+        <a:xfrm>
+          <a:off x="0" y="0"/>
+          <a:ext cx="0" cy="0"/>
+          <a:chOff x="0" y="0"/>
+          <a:chExt cx="0" cy="0"/>
+        </a:xfrm>
+      </p:grpSpPr>
+      <p:sp>
+        <p:nvSpPr>
+          <p:cNvPr id="2" name="Slide Image Placeholder 1">
+            <a:extLst>
+              <a:ext uri="{FF2B5EF4-FFF2-40B4-BE49-F238E27FC236}">
+                <a16:creationId xmlns:a16="http://schemas.microsoft.com/office/drawing/2014/main" id="{02C448CB-839C-901F-298C-16CAF5FD5619}"/>
+              </a:ext>
+            </a:extLst>
+          </p:cNvPr>
+          <p:cNvSpPr>
+            <a:spLocks noGrp="1" noRot="1" noChangeAspect="1"/>
+          </p:cNvSpPr>
+          <p:nvPr>
+            <p:ph type="sldImg"/>
+          </p:nvPr>
+        </p:nvSpPr>
+        <p:spPr>
+          <a:xfrm>
+            <a:off x="381000" y="685800"/>
+            <a:ext cx="6096000" cy="3429000"/>
+          </a:xfrm>
+        </p:spPr>
+      </p:sp>
+      <p:sp>
+        <p:nvSpPr>
+          <p:cNvPr id="3" name="Notes Placeholder 2">
+            <a:extLst>
+              <a:ext uri="{FF2B5EF4-FFF2-40B4-BE49-F238E27FC236}">
+                <a16:creationId xmlns:a16="http://schemas.microsoft.com/office/drawing/2014/main" id="{5355A799-0266-1F05-3CB1-D60150DC0A89}"/>
+              </a:ext>
+            </a:extLst>
+          </p:cNvPr>
+          <p:cNvSpPr>
+            <a:spLocks noGrp="1"/>
+          </p:cNvSpPr>
+          <p:nvPr>
+            <p:ph type="body" idx="1"/>
+          </p:nvPr>
+        </p:nvSpPr>
+        <p:spPr/>
+        <p:txBody>
+          <a:bodyPr/>
+          <a:lstStyle/>
+          <a:p>
+            <a:endParaRPr lang="en-US" dirty="0"/>
+          </a:p>
+        </p:txBody>
+      </p:sp>
+    </p:spTree>
+    <p:extLst>
+      <p:ext uri="{BB962C8B-B14F-4D97-AF65-F5344CB8AC3E}">
+        <p14:creationId xmlns:p14="http://schemas.microsoft.com/office/powerpoint/2010/main" val="1382108641"/>
+      </p:ext>
+    </p:extLst>
+  </p:cSld>
+  <p:clrMapOvr>
+    <a:masterClrMapping/>
+  </p:clrMapOvr>
+</p:notes>
+</file>
+
+<file path=ppt/notesSlides/notesSlide9.xml><?xml version="1.0" encoding="utf-8"?>
 <p:notes xmlns:a="http://schemas.openxmlformats.org/drawingml/2006/main" xmlns:r="http://schemas.openxmlformats.org/officeDocument/2006/relationships" xmlns:p="http://schemas.openxmlformats.org/presentationml/2006/main">
   <p:cSld>
     <p:spTree>
@@ -1389,23 +1765,14 @@
           <a:bodyPr/>
           <a:lstStyle/>
           <a:p>
-            <a:r>
-              <a:rPr lang="en-US" dirty="0"/>
-              <a:t>In real life, you are more likely to collaborate using a client/server database.</a:t>
-            </a:r>
-          </a:p>
-          <a:p>
-            <a:r>
-              <a:rPr lang="en-US" dirty="0"/>
-              <a:t>Ergo, this course is geared to giving you that experience.</a:t>
-            </a:r>
+            <a:endParaRPr lang="en-US" dirty="0"/>
           </a:p>
         </p:txBody>
       </p:sp>
     </p:spTree>
     <p:extLst>
       <p:ext uri="{BB962C8B-B14F-4D97-AF65-F5344CB8AC3E}">
-        <p14:creationId xmlns:p14="http://schemas.microsoft.com/office/powerpoint/2010/main" val="4167947567"/>
+        <p14:creationId xmlns:p14="http://schemas.microsoft.com/office/powerpoint/2010/main" val="3555369877"/>
       </p:ext>
     </p:extLst>
   </p:cSld>
@@ -1805,502 +2172,6 @@
 </file>
 
 <file path=ppt/slideLayouts/slideLayout10.xml><?xml version="1.0" encoding="utf-8"?>
-<p:sldLayout xmlns:a="http://schemas.openxmlformats.org/drawingml/2006/main" xmlns:r="http://schemas.openxmlformats.org/officeDocument/2006/relationships" xmlns:p="http://schemas.openxmlformats.org/presentationml/2006/main" matchingName="Title and two columns" type="twoColTx">
-  <p:cSld name="Title and two columns">
-    <p:spTree>
-      <p:nvGrpSpPr>
-        <p:cNvPr id="1" name="Shape 20"/>
-        <p:cNvGrpSpPr/>
-        <p:nvPr/>
-      </p:nvGrpSpPr>
-      <p:grpSpPr>
-        <a:xfrm>
-          <a:off x="0" y="0"/>
-          <a:ext cx="0" cy="0"/>
-          <a:chOff x="0" y="0"/>
-          <a:chExt cx="0" cy="0"/>
-        </a:xfrm>
-      </p:grpSpPr>
-      <p:sp>
-        <p:nvSpPr>
-          <p:cNvPr id="21" name="Google Shape;21;p5"/>
-          <p:cNvSpPr txBox="1">
-            <a:spLocks noGrp="1"/>
-          </p:cNvSpPr>
-          <p:nvPr>
-            <p:ph type="title"/>
-          </p:nvPr>
-        </p:nvSpPr>
-        <p:spPr>
-          <a:xfrm>
-            <a:off x="311700" y="445025"/>
-            <a:ext cx="8520600" cy="572700"/>
-          </a:xfrm>
-          <a:prstGeom prst="rect">
-            <a:avLst/>
-          </a:prstGeom>
-        </p:spPr>
-        <p:txBody>
-          <a:bodyPr spcFirstLastPara="1" wrap="square" lIns="91425" tIns="91425" rIns="91425" bIns="91425" anchor="t" anchorCtr="0">
-            <a:normAutofit/>
-          </a:bodyPr>
-          <a:lstStyle>
-            <a:lvl1pPr lvl="0">
-              <a:spcBef>
-                <a:spcPts val="0"/>
-              </a:spcBef>
-              <a:spcAft>
-                <a:spcPts val="0"/>
-              </a:spcAft>
-              <a:buSzPts val="2800"/>
-              <a:buNone/>
-              <a:defRPr/>
-            </a:lvl1pPr>
-            <a:lvl2pPr lvl="1">
-              <a:spcBef>
-                <a:spcPts val="0"/>
-              </a:spcBef>
-              <a:spcAft>
-                <a:spcPts val="0"/>
-              </a:spcAft>
-              <a:buSzPts val="2800"/>
-              <a:buNone/>
-              <a:defRPr/>
-            </a:lvl2pPr>
-            <a:lvl3pPr lvl="2">
-              <a:spcBef>
-                <a:spcPts val="0"/>
-              </a:spcBef>
-              <a:spcAft>
-                <a:spcPts val="0"/>
-              </a:spcAft>
-              <a:buSzPts val="2800"/>
-              <a:buNone/>
-              <a:defRPr/>
-            </a:lvl3pPr>
-            <a:lvl4pPr lvl="3">
-              <a:spcBef>
-                <a:spcPts val="0"/>
-              </a:spcBef>
-              <a:spcAft>
-                <a:spcPts val="0"/>
-              </a:spcAft>
-              <a:buSzPts val="2800"/>
-              <a:buNone/>
-              <a:defRPr/>
-            </a:lvl4pPr>
-            <a:lvl5pPr lvl="4">
-              <a:spcBef>
-                <a:spcPts val="0"/>
-              </a:spcBef>
-              <a:spcAft>
-                <a:spcPts val="0"/>
-              </a:spcAft>
-              <a:buSzPts val="2800"/>
-              <a:buNone/>
-              <a:defRPr/>
-            </a:lvl5pPr>
-            <a:lvl6pPr lvl="5">
-              <a:spcBef>
-                <a:spcPts val="0"/>
-              </a:spcBef>
-              <a:spcAft>
-                <a:spcPts val="0"/>
-              </a:spcAft>
-              <a:buSzPts val="2800"/>
-              <a:buNone/>
-              <a:defRPr/>
-            </a:lvl6pPr>
-            <a:lvl7pPr lvl="6">
-              <a:spcBef>
-                <a:spcPts val="0"/>
-              </a:spcBef>
-              <a:spcAft>
-                <a:spcPts val="0"/>
-              </a:spcAft>
-              <a:buSzPts val="2800"/>
-              <a:buNone/>
-              <a:defRPr/>
-            </a:lvl7pPr>
-            <a:lvl8pPr lvl="7">
-              <a:spcBef>
-                <a:spcPts val="0"/>
-              </a:spcBef>
-              <a:spcAft>
-                <a:spcPts val="0"/>
-              </a:spcAft>
-              <a:buSzPts val="2800"/>
-              <a:buNone/>
-              <a:defRPr/>
-            </a:lvl8pPr>
-            <a:lvl9pPr lvl="8">
-              <a:spcBef>
-                <a:spcPts val="0"/>
-              </a:spcBef>
-              <a:spcAft>
-                <a:spcPts val="0"/>
-              </a:spcAft>
-              <a:buSzPts val="2800"/>
-              <a:buNone/>
-              <a:defRPr/>
-            </a:lvl9pPr>
-          </a:lstStyle>
-          <a:p>
-            <a:endParaRPr/>
-          </a:p>
-        </p:txBody>
-      </p:sp>
-      <p:sp>
-        <p:nvSpPr>
-          <p:cNvPr id="22" name="Google Shape;22;p5"/>
-          <p:cNvSpPr txBox="1">
-            <a:spLocks noGrp="1"/>
-          </p:cNvSpPr>
-          <p:nvPr>
-            <p:ph type="body" idx="1"/>
-          </p:nvPr>
-        </p:nvSpPr>
-        <p:spPr>
-          <a:xfrm>
-            <a:off x="311700" y="1152475"/>
-            <a:ext cx="3999900" cy="3416400"/>
-          </a:xfrm>
-          <a:prstGeom prst="rect">
-            <a:avLst/>
-          </a:prstGeom>
-        </p:spPr>
-        <p:txBody>
-          <a:bodyPr spcFirstLastPara="1" wrap="square" lIns="91425" tIns="91425" rIns="91425" bIns="91425" anchor="t" anchorCtr="0">
-            <a:normAutofit/>
-          </a:bodyPr>
-          <a:lstStyle>
-            <a:lvl1pPr marL="457200" lvl="0" indent="-317500">
-              <a:spcBef>
-                <a:spcPts val="0"/>
-              </a:spcBef>
-              <a:spcAft>
-                <a:spcPts val="0"/>
-              </a:spcAft>
-              <a:buSzPts val="1400"/>
-              <a:buChar char="●"/>
-              <a:defRPr sz="1400"/>
-            </a:lvl1pPr>
-            <a:lvl2pPr marL="914400" lvl="1" indent="-304800">
-              <a:spcBef>
-                <a:spcPts val="0"/>
-              </a:spcBef>
-              <a:spcAft>
-                <a:spcPts val="0"/>
-              </a:spcAft>
-              <a:buSzPts val="1200"/>
-              <a:buChar char="○"/>
-              <a:defRPr sz="1200"/>
-            </a:lvl2pPr>
-            <a:lvl3pPr marL="1371600" lvl="2" indent="-304800">
-              <a:spcBef>
-                <a:spcPts val="0"/>
-              </a:spcBef>
-              <a:spcAft>
-                <a:spcPts val="0"/>
-              </a:spcAft>
-              <a:buSzPts val="1200"/>
-              <a:buChar char="■"/>
-              <a:defRPr sz="1200"/>
-            </a:lvl3pPr>
-            <a:lvl4pPr marL="1828800" lvl="3" indent="-304800">
-              <a:spcBef>
-                <a:spcPts val="0"/>
-              </a:spcBef>
-              <a:spcAft>
-                <a:spcPts val="0"/>
-              </a:spcAft>
-              <a:buSzPts val="1200"/>
-              <a:buChar char="●"/>
-              <a:defRPr sz="1200"/>
-            </a:lvl4pPr>
-            <a:lvl5pPr marL="2286000" lvl="4" indent="-304800">
-              <a:spcBef>
-                <a:spcPts val="0"/>
-              </a:spcBef>
-              <a:spcAft>
-                <a:spcPts val="0"/>
-              </a:spcAft>
-              <a:buSzPts val="1200"/>
-              <a:buChar char="○"/>
-              <a:defRPr sz="1200"/>
-            </a:lvl5pPr>
-            <a:lvl6pPr marL="2743200" lvl="5" indent="-304800">
-              <a:spcBef>
-                <a:spcPts val="0"/>
-              </a:spcBef>
-              <a:spcAft>
-                <a:spcPts val="0"/>
-              </a:spcAft>
-              <a:buSzPts val="1200"/>
-              <a:buChar char="■"/>
-              <a:defRPr sz="1200"/>
-            </a:lvl6pPr>
-            <a:lvl7pPr marL="3200400" lvl="6" indent="-304800">
-              <a:spcBef>
-                <a:spcPts val="0"/>
-              </a:spcBef>
-              <a:spcAft>
-                <a:spcPts val="0"/>
-              </a:spcAft>
-              <a:buSzPts val="1200"/>
-              <a:buChar char="●"/>
-              <a:defRPr sz="1200"/>
-            </a:lvl7pPr>
-            <a:lvl8pPr marL="3657600" lvl="7" indent="-304800">
-              <a:spcBef>
-                <a:spcPts val="0"/>
-              </a:spcBef>
-              <a:spcAft>
-                <a:spcPts val="0"/>
-              </a:spcAft>
-              <a:buSzPts val="1200"/>
-              <a:buChar char="○"/>
-              <a:defRPr sz="1200"/>
-            </a:lvl8pPr>
-            <a:lvl9pPr marL="4114800" lvl="8" indent="-304800">
-              <a:spcBef>
-                <a:spcPts val="0"/>
-              </a:spcBef>
-              <a:spcAft>
-                <a:spcPts val="0"/>
-              </a:spcAft>
-              <a:buSzPts val="1200"/>
-              <a:buChar char="■"/>
-              <a:defRPr sz="1200"/>
-            </a:lvl9pPr>
-          </a:lstStyle>
-          <a:p>
-            <a:endParaRPr/>
-          </a:p>
-        </p:txBody>
-      </p:sp>
-      <p:sp>
-        <p:nvSpPr>
-          <p:cNvPr id="23" name="Google Shape;23;p5"/>
-          <p:cNvSpPr txBox="1">
-            <a:spLocks noGrp="1"/>
-          </p:cNvSpPr>
-          <p:nvPr>
-            <p:ph type="body" idx="2"/>
-          </p:nvPr>
-        </p:nvSpPr>
-        <p:spPr>
-          <a:xfrm>
-            <a:off x="4832400" y="1152475"/>
-            <a:ext cx="3999900" cy="3416400"/>
-          </a:xfrm>
-          <a:prstGeom prst="rect">
-            <a:avLst/>
-          </a:prstGeom>
-        </p:spPr>
-        <p:txBody>
-          <a:bodyPr spcFirstLastPara="1" wrap="square" lIns="91425" tIns="91425" rIns="91425" bIns="91425" anchor="t" anchorCtr="0">
-            <a:normAutofit/>
-          </a:bodyPr>
-          <a:lstStyle>
-            <a:lvl1pPr marL="457200" lvl="0" indent="-317500">
-              <a:spcBef>
-                <a:spcPts val="0"/>
-              </a:spcBef>
-              <a:spcAft>
-                <a:spcPts val="0"/>
-              </a:spcAft>
-              <a:buSzPts val="1400"/>
-              <a:buChar char="●"/>
-              <a:defRPr sz="1400"/>
-            </a:lvl1pPr>
-            <a:lvl2pPr marL="914400" lvl="1" indent="-304800">
-              <a:spcBef>
-                <a:spcPts val="0"/>
-              </a:spcBef>
-              <a:spcAft>
-                <a:spcPts val="0"/>
-              </a:spcAft>
-              <a:buSzPts val="1200"/>
-              <a:buChar char="○"/>
-              <a:defRPr sz="1200"/>
-            </a:lvl2pPr>
-            <a:lvl3pPr marL="1371600" lvl="2" indent="-304800">
-              <a:spcBef>
-                <a:spcPts val="0"/>
-              </a:spcBef>
-              <a:spcAft>
-                <a:spcPts val="0"/>
-              </a:spcAft>
-              <a:buSzPts val="1200"/>
-              <a:buChar char="■"/>
-              <a:defRPr sz="1200"/>
-            </a:lvl3pPr>
-            <a:lvl4pPr marL="1828800" lvl="3" indent="-304800">
-              <a:spcBef>
-                <a:spcPts val="0"/>
-              </a:spcBef>
-              <a:spcAft>
-                <a:spcPts val="0"/>
-              </a:spcAft>
-              <a:buSzPts val="1200"/>
-              <a:buChar char="●"/>
-              <a:defRPr sz="1200"/>
-            </a:lvl4pPr>
-            <a:lvl5pPr marL="2286000" lvl="4" indent="-304800">
-              <a:spcBef>
-                <a:spcPts val="0"/>
-              </a:spcBef>
-              <a:spcAft>
-                <a:spcPts val="0"/>
-              </a:spcAft>
-              <a:buSzPts val="1200"/>
-              <a:buChar char="○"/>
-              <a:defRPr sz="1200"/>
-            </a:lvl5pPr>
-            <a:lvl6pPr marL="2743200" lvl="5" indent="-304800">
-              <a:spcBef>
-                <a:spcPts val="0"/>
-              </a:spcBef>
-              <a:spcAft>
-                <a:spcPts val="0"/>
-              </a:spcAft>
-              <a:buSzPts val="1200"/>
-              <a:buChar char="■"/>
-              <a:defRPr sz="1200"/>
-            </a:lvl6pPr>
-            <a:lvl7pPr marL="3200400" lvl="6" indent="-304800">
-              <a:spcBef>
-                <a:spcPts val="0"/>
-              </a:spcBef>
-              <a:spcAft>
-                <a:spcPts val="0"/>
-              </a:spcAft>
-              <a:buSzPts val="1200"/>
-              <a:buChar char="●"/>
-              <a:defRPr sz="1200"/>
-            </a:lvl7pPr>
-            <a:lvl8pPr marL="3657600" lvl="7" indent="-304800">
-              <a:spcBef>
-                <a:spcPts val="0"/>
-              </a:spcBef>
-              <a:spcAft>
-                <a:spcPts val="0"/>
-              </a:spcAft>
-              <a:buSzPts val="1200"/>
-              <a:buChar char="○"/>
-              <a:defRPr sz="1200"/>
-            </a:lvl8pPr>
-            <a:lvl9pPr marL="4114800" lvl="8" indent="-304800">
-              <a:spcBef>
-                <a:spcPts val="0"/>
-              </a:spcBef>
-              <a:spcAft>
-                <a:spcPts val="0"/>
-              </a:spcAft>
-              <a:buSzPts val="1200"/>
-              <a:buChar char="■"/>
-              <a:defRPr sz="1200"/>
-            </a:lvl9pPr>
-          </a:lstStyle>
-          <a:p>
-            <a:endParaRPr/>
-          </a:p>
-        </p:txBody>
-      </p:sp>
-      <p:sp>
-        <p:nvSpPr>
-          <p:cNvPr id="24" name="Google Shape;24;p5"/>
-          <p:cNvSpPr txBox="1">
-            <a:spLocks noGrp="1"/>
-          </p:cNvSpPr>
-          <p:nvPr>
-            <p:ph type="sldNum" idx="12"/>
-          </p:nvPr>
-        </p:nvSpPr>
-        <p:spPr>
-          <a:xfrm>
-            <a:off x="8472458" y="4663217"/>
-            <a:ext cx="548700" cy="393600"/>
-          </a:xfrm>
-          <a:prstGeom prst="rect">
-            <a:avLst/>
-          </a:prstGeom>
-        </p:spPr>
-        <p:txBody>
-          <a:bodyPr spcFirstLastPara="1" wrap="square" lIns="91425" tIns="91425" rIns="91425" bIns="91425" anchor="ctr" anchorCtr="0">
-            <a:normAutofit/>
-          </a:bodyPr>
-          <a:lstStyle>
-            <a:lvl1pPr lvl="0">
-              <a:buNone/>
-              <a:defRPr/>
-            </a:lvl1pPr>
-            <a:lvl2pPr lvl="1">
-              <a:buNone/>
-              <a:defRPr/>
-            </a:lvl2pPr>
-            <a:lvl3pPr lvl="2">
-              <a:buNone/>
-              <a:defRPr/>
-            </a:lvl3pPr>
-            <a:lvl4pPr lvl="3">
-              <a:buNone/>
-              <a:defRPr/>
-            </a:lvl4pPr>
-            <a:lvl5pPr lvl="4">
-              <a:buNone/>
-              <a:defRPr/>
-            </a:lvl5pPr>
-            <a:lvl6pPr lvl="5">
-              <a:buNone/>
-              <a:defRPr/>
-            </a:lvl6pPr>
-            <a:lvl7pPr lvl="6">
-              <a:buNone/>
-              <a:defRPr/>
-            </a:lvl7pPr>
-            <a:lvl8pPr lvl="7">
-              <a:buNone/>
-              <a:defRPr/>
-            </a:lvl8pPr>
-            <a:lvl9pPr lvl="8">
-              <a:buNone/>
-              <a:defRPr/>
-            </a:lvl9pPr>
-          </a:lstStyle>
-          <a:p>
-            <a:pPr marL="0" lvl="0" indent="0" algn="r" rtl="0">
-              <a:spcBef>
-                <a:spcPts val="0"/>
-              </a:spcBef>
-              <a:spcAft>
-                <a:spcPts val="0"/>
-              </a:spcAft>
-              <a:buNone/>
-            </a:pPr>
-            <a:fld id="{00000000-1234-1234-1234-123412341234}" type="slidenum">
-              <a:rPr lang="en"/>
-              <a:t>‹#›</a:t>
-            </a:fld>
-            <a:endParaRPr/>
-          </a:p>
-        </p:txBody>
-      </p:sp>
-    </p:spTree>
-    <p:extLst>
-      <p:ext uri="{BB962C8B-B14F-4D97-AF65-F5344CB8AC3E}">
-        <p14:creationId xmlns:p14="http://schemas.microsoft.com/office/powerpoint/2010/main" val="3326022070"/>
-      </p:ext>
-    </p:extLst>
-  </p:cSld>
-  <p:clrMapOvr>
-    <a:masterClrMapping/>
-  </p:clrMapOvr>
-</p:sldLayout>
-</file>
-
-<file path=ppt/slideLayouts/slideLayout11.xml><?xml version="1.0" encoding="utf-8"?>
 <p:sldLayout xmlns:a="http://schemas.openxmlformats.org/drawingml/2006/main" xmlns:r="http://schemas.openxmlformats.org/officeDocument/2006/relationships" xmlns:p="http://schemas.openxmlformats.org/presentationml/2006/main" matchingName="Title Slide">
   <p:cSld name="Title Slide">
     <p:bg>
@@ -2840,465 +2711,7 @@
 </p:sldLayout>
 </file>
 
-<file path=ppt/slideLayouts/slideLayout12.xml><?xml version="1.0" encoding="utf-8"?>
-<p:sldLayout xmlns:a="http://schemas.openxmlformats.org/drawingml/2006/main" xmlns:r="http://schemas.openxmlformats.org/officeDocument/2006/relationships" xmlns:p="http://schemas.openxmlformats.org/presentationml/2006/main" matchingName="1 list" type="obj">
-  <p:cSld name="OBJECT">
-    <p:spTree>
-      <p:nvGrpSpPr>
-        <p:cNvPr id="1" name="Shape 58"/>
-        <p:cNvGrpSpPr/>
-        <p:nvPr/>
-      </p:nvGrpSpPr>
-      <p:grpSpPr>
-        <a:xfrm>
-          <a:off x="0" y="0"/>
-          <a:ext cx="0" cy="0"/>
-          <a:chOff x="0" y="0"/>
-          <a:chExt cx="0" cy="0"/>
-        </a:xfrm>
-      </p:grpSpPr>
-      <p:sp>
-        <p:nvSpPr>
-          <p:cNvPr id="59" name="Google Shape;59;p15"/>
-          <p:cNvSpPr txBox="1">
-            <a:spLocks noGrp="1"/>
-          </p:cNvSpPr>
-          <p:nvPr>
-            <p:ph type="title"/>
-          </p:nvPr>
-        </p:nvSpPr>
-        <p:spPr>
-          <a:xfrm>
-            <a:off x="394853" y="273844"/>
-            <a:ext cx="8354400" cy="445800"/>
-          </a:xfrm>
-          <a:prstGeom prst="rect">
-            <a:avLst/>
-          </a:prstGeom>
-          <a:noFill/>
-          <a:ln>
-            <a:noFill/>
-          </a:ln>
-        </p:spPr>
-        <p:txBody>
-          <a:bodyPr spcFirstLastPara="1" wrap="square" lIns="68575" tIns="34275" rIns="68575" bIns="34275" anchor="t" anchorCtr="0">
-            <a:noAutofit/>
-          </a:bodyPr>
-          <a:lstStyle>
-            <a:lvl1pPr marR="0" lvl="0" algn="l" rtl="0">
-              <a:lnSpc>
-                <a:spcPct val="90000"/>
-              </a:lnSpc>
-              <a:spcBef>
-                <a:spcPts val="0"/>
-              </a:spcBef>
-              <a:spcAft>
-                <a:spcPts val="0"/>
-              </a:spcAft>
-              <a:buClr>
-                <a:schemeClr val="dk2"/>
-              </a:buClr>
-              <a:buSzPts val="2700"/>
-              <a:buFont typeface="Century Gothic"/>
-              <a:buNone/>
-              <a:defRPr sz="2700" b="1" i="0" u="none" strike="noStrike" cap="none">
-                <a:solidFill>
-                  <a:schemeClr val="dk2"/>
-                </a:solidFill>
-                <a:latin typeface="Century Gothic"/>
-                <a:ea typeface="Century Gothic"/>
-                <a:cs typeface="Century Gothic"/>
-                <a:sym typeface="Century Gothic"/>
-              </a:defRPr>
-            </a:lvl1pPr>
-            <a:lvl2pPr lvl="1" rtl="0">
-              <a:spcBef>
-                <a:spcPts val="0"/>
-              </a:spcBef>
-              <a:spcAft>
-                <a:spcPts val="0"/>
-              </a:spcAft>
-              <a:buSzPts val="1100"/>
-              <a:buNone/>
-              <a:defRPr sz="1400"/>
-            </a:lvl2pPr>
-            <a:lvl3pPr lvl="2" rtl="0">
-              <a:spcBef>
-                <a:spcPts val="0"/>
-              </a:spcBef>
-              <a:spcAft>
-                <a:spcPts val="0"/>
-              </a:spcAft>
-              <a:buSzPts val="1100"/>
-              <a:buNone/>
-              <a:defRPr sz="1400"/>
-            </a:lvl3pPr>
-            <a:lvl4pPr lvl="3" rtl="0">
-              <a:spcBef>
-                <a:spcPts val="0"/>
-              </a:spcBef>
-              <a:spcAft>
-                <a:spcPts val="0"/>
-              </a:spcAft>
-              <a:buSzPts val="1100"/>
-              <a:buNone/>
-              <a:defRPr sz="1400"/>
-            </a:lvl4pPr>
-            <a:lvl5pPr lvl="4" rtl="0">
-              <a:spcBef>
-                <a:spcPts val="0"/>
-              </a:spcBef>
-              <a:spcAft>
-                <a:spcPts val="0"/>
-              </a:spcAft>
-              <a:buSzPts val="1100"/>
-              <a:buNone/>
-              <a:defRPr sz="1400"/>
-            </a:lvl5pPr>
-            <a:lvl6pPr lvl="5" rtl="0">
-              <a:spcBef>
-                <a:spcPts val="0"/>
-              </a:spcBef>
-              <a:spcAft>
-                <a:spcPts val="0"/>
-              </a:spcAft>
-              <a:buSzPts val="1100"/>
-              <a:buNone/>
-              <a:defRPr sz="1400"/>
-            </a:lvl6pPr>
-            <a:lvl7pPr lvl="6" rtl="0">
-              <a:spcBef>
-                <a:spcPts val="0"/>
-              </a:spcBef>
-              <a:spcAft>
-                <a:spcPts val="0"/>
-              </a:spcAft>
-              <a:buSzPts val="1100"/>
-              <a:buNone/>
-              <a:defRPr sz="1400"/>
-            </a:lvl7pPr>
-            <a:lvl8pPr lvl="7" rtl="0">
-              <a:spcBef>
-                <a:spcPts val="0"/>
-              </a:spcBef>
-              <a:spcAft>
-                <a:spcPts val="0"/>
-              </a:spcAft>
-              <a:buSzPts val="1100"/>
-              <a:buNone/>
-              <a:defRPr sz="1400"/>
-            </a:lvl8pPr>
-            <a:lvl9pPr lvl="8" rtl="0">
-              <a:spcBef>
-                <a:spcPts val="0"/>
-              </a:spcBef>
-              <a:spcAft>
-                <a:spcPts val="0"/>
-              </a:spcAft>
-              <a:buSzPts val="1100"/>
-              <a:buNone/>
-              <a:defRPr sz="1400"/>
-            </a:lvl9pPr>
-          </a:lstStyle>
-          <a:p>
-            <a:endParaRPr/>
-          </a:p>
-        </p:txBody>
-      </p:sp>
-      <p:sp>
-        <p:nvSpPr>
-          <p:cNvPr id="60" name="Google Shape;60;p15"/>
-          <p:cNvSpPr txBox="1">
-            <a:spLocks noGrp="1"/>
-          </p:cNvSpPr>
-          <p:nvPr>
-            <p:ph type="body" idx="1"/>
-          </p:nvPr>
-        </p:nvSpPr>
-        <p:spPr>
-          <a:xfrm>
-            <a:off x="531050" y="1023175"/>
-            <a:ext cx="7161000" cy="3202500"/>
-          </a:xfrm>
-          <a:prstGeom prst="rect">
-            <a:avLst/>
-          </a:prstGeom>
-          <a:noFill/>
-          <a:ln>
-            <a:noFill/>
-          </a:ln>
-        </p:spPr>
-        <p:txBody>
-          <a:bodyPr spcFirstLastPara="1" wrap="square" lIns="91425" tIns="91425" rIns="91425" bIns="91425" anchor="t" anchorCtr="0">
-            <a:noAutofit/>
-          </a:bodyPr>
-          <a:lstStyle>
-            <a:lvl1pPr marL="457200" lvl="0" indent="-361950" rtl="0">
-              <a:lnSpc>
-                <a:spcPct val="100000"/>
-              </a:lnSpc>
-              <a:spcBef>
-                <a:spcPts val="0"/>
-              </a:spcBef>
-              <a:spcAft>
-                <a:spcPts val="0"/>
-              </a:spcAft>
-              <a:buClr>
-                <a:srgbClr val="04859B"/>
-              </a:buClr>
-              <a:buSzPts val="2100"/>
-              <a:buFont typeface="Century Gothic"/>
-              <a:buChar char="●"/>
-              <a:defRPr sz="2100">
-                <a:latin typeface="Century Gothic"/>
-                <a:ea typeface="Century Gothic"/>
-                <a:cs typeface="Century Gothic"/>
-                <a:sym typeface="Century Gothic"/>
-              </a:defRPr>
-            </a:lvl1pPr>
-            <a:lvl2pPr marL="914400" lvl="1" indent="-342900" rtl="0">
-              <a:lnSpc>
-                <a:spcPct val="100000"/>
-              </a:lnSpc>
-              <a:spcBef>
-                <a:spcPts val="0"/>
-              </a:spcBef>
-              <a:spcAft>
-                <a:spcPts val="0"/>
-              </a:spcAft>
-              <a:buClr>
-                <a:srgbClr val="04859B"/>
-              </a:buClr>
-              <a:buSzPts val="1800"/>
-              <a:buFont typeface="Century Gothic"/>
-              <a:buChar char="●"/>
-              <a:defRPr sz="1800">
-                <a:latin typeface="Century Gothic"/>
-                <a:ea typeface="Century Gothic"/>
-                <a:cs typeface="Century Gothic"/>
-                <a:sym typeface="Century Gothic"/>
-              </a:defRPr>
-            </a:lvl2pPr>
-            <a:lvl3pPr marL="1371600" lvl="2" indent="-330200" rtl="0">
-              <a:lnSpc>
-                <a:spcPct val="100000"/>
-              </a:lnSpc>
-              <a:spcBef>
-                <a:spcPts val="0"/>
-              </a:spcBef>
-              <a:spcAft>
-                <a:spcPts val="0"/>
-              </a:spcAft>
-              <a:buClr>
-                <a:srgbClr val="04859B"/>
-              </a:buClr>
-              <a:buSzPts val="1600"/>
-              <a:buFont typeface="Century Gothic"/>
-              <a:buChar char="●"/>
-              <a:defRPr sz="1600">
-                <a:latin typeface="Century Gothic"/>
-                <a:ea typeface="Century Gothic"/>
-                <a:cs typeface="Century Gothic"/>
-                <a:sym typeface="Century Gothic"/>
-              </a:defRPr>
-            </a:lvl3pPr>
-            <a:lvl4pPr marL="1828800" lvl="3" indent="-317500" rtl="0">
-              <a:lnSpc>
-                <a:spcPct val="100000"/>
-              </a:lnSpc>
-              <a:spcBef>
-                <a:spcPts val="0"/>
-              </a:spcBef>
-              <a:spcAft>
-                <a:spcPts val="0"/>
-              </a:spcAft>
-              <a:buClr>
-                <a:srgbClr val="04859B"/>
-              </a:buClr>
-              <a:buSzPts val="1400"/>
-              <a:buFont typeface="Century Gothic"/>
-              <a:buChar char="●"/>
-              <a:defRPr>
-                <a:latin typeface="Century Gothic"/>
-                <a:ea typeface="Century Gothic"/>
-                <a:cs typeface="Century Gothic"/>
-                <a:sym typeface="Century Gothic"/>
-              </a:defRPr>
-            </a:lvl4pPr>
-            <a:lvl5pPr marL="2286000" lvl="4" indent="-304800" rtl="0">
-              <a:lnSpc>
-                <a:spcPct val="100000"/>
-              </a:lnSpc>
-              <a:spcBef>
-                <a:spcPts val="0"/>
-              </a:spcBef>
-              <a:spcAft>
-                <a:spcPts val="0"/>
-              </a:spcAft>
-              <a:buClr>
-                <a:srgbClr val="04859B"/>
-              </a:buClr>
-              <a:buSzPts val="1200"/>
-              <a:buFont typeface="Century Gothic"/>
-              <a:buChar char="●"/>
-              <a:defRPr sz="1200">
-                <a:latin typeface="Century Gothic"/>
-                <a:ea typeface="Century Gothic"/>
-                <a:cs typeface="Century Gothic"/>
-                <a:sym typeface="Century Gothic"/>
-              </a:defRPr>
-            </a:lvl5pPr>
-            <a:lvl6pPr marL="2743200" lvl="5" indent="-292100" rtl="0">
-              <a:lnSpc>
-                <a:spcPct val="100000"/>
-              </a:lnSpc>
-              <a:spcBef>
-                <a:spcPts val="0"/>
-              </a:spcBef>
-              <a:spcAft>
-                <a:spcPts val="0"/>
-              </a:spcAft>
-              <a:buClr>
-                <a:srgbClr val="04859B"/>
-              </a:buClr>
-              <a:buSzPts val="1000"/>
-              <a:buFont typeface="Century Gothic"/>
-              <a:buChar char="●"/>
-              <a:defRPr sz="1000">
-                <a:latin typeface="Century Gothic"/>
-                <a:ea typeface="Century Gothic"/>
-                <a:cs typeface="Century Gothic"/>
-                <a:sym typeface="Century Gothic"/>
-              </a:defRPr>
-            </a:lvl6pPr>
-            <a:lvl7pPr marL="3200400" lvl="6" indent="-285750" rtl="0">
-              <a:lnSpc>
-                <a:spcPct val="100000"/>
-              </a:lnSpc>
-              <a:spcBef>
-                <a:spcPts val="0"/>
-              </a:spcBef>
-              <a:spcAft>
-                <a:spcPts val="0"/>
-              </a:spcAft>
-              <a:buClr>
-                <a:srgbClr val="04859B"/>
-              </a:buClr>
-              <a:buSzPts val="900"/>
-              <a:buFont typeface="Century Gothic"/>
-              <a:buChar char="●"/>
-              <a:defRPr sz="900">
-                <a:latin typeface="Century Gothic"/>
-                <a:ea typeface="Century Gothic"/>
-                <a:cs typeface="Century Gothic"/>
-                <a:sym typeface="Century Gothic"/>
-              </a:defRPr>
-            </a:lvl7pPr>
-            <a:lvl8pPr marL="3657600" lvl="7" indent="-285750" rtl="0">
-              <a:lnSpc>
-                <a:spcPct val="100000"/>
-              </a:lnSpc>
-              <a:spcBef>
-                <a:spcPts val="0"/>
-              </a:spcBef>
-              <a:spcAft>
-                <a:spcPts val="0"/>
-              </a:spcAft>
-              <a:buClr>
-                <a:srgbClr val="04859B"/>
-              </a:buClr>
-              <a:buSzPts val="900"/>
-              <a:buFont typeface="Century Gothic"/>
-              <a:buChar char="●"/>
-              <a:defRPr sz="900">
-                <a:latin typeface="Century Gothic"/>
-                <a:ea typeface="Century Gothic"/>
-                <a:cs typeface="Century Gothic"/>
-                <a:sym typeface="Century Gothic"/>
-              </a:defRPr>
-            </a:lvl8pPr>
-            <a:lvl9pPr marL="4114800" lvl="8" indent="-285750" rtl="0">
-              <a:lnSpc>
-                <a:spcPct val="100000"/>
-              </a:lnSpc>
-              <a:spcBef>
-                <a:spcPts val="0"/>
-              </a:spcBef>
-              <a:spcAft>
-                <a:spcPts val="0"/>
-              </a:spcAft>
-              <a:buClr>
-                <a:srgbClr val="04859B"/>
-              </a:buClr>
-              <a:buSzPts val="900"/>
-              <a:buFont typeface="Century Gothic"/>
-              <a:buChar char="●"/>
-              <a:defRPr sz="900">
-                <a:latin typeface="Century Gothic"/>
-                <a:ea typeface="Century Gothic"/>
-                <a:cs typeface="Century Gothic"/>
-                <a:sym typeface="Century Gothic"/>
-              </a:defRPr>
-            </a:lvl9pPr>
-          </a:lstStyle>
-          <a:p>
-            <a:endParaRPr/>
-          </a:p>
-        </p:txBody>
-      </p:sp>
-      <p:pic>
-        <p:nvPicPr>
-          <p:cNvPr id="61" name="Google Shape;61;p15"/>
-          <p:cNvPicPr preferRelativeResize="0"/>
-          <p:nvPr/>
-        </p:nvPicPr>
-        <p:blipFill>
-          <a:blip r:embed="rId2">
-            <a:alphaModFix/>
-          </a:blip>
-          <a:stretch>
-            <a:fillRect/>
-          </a:stretch>
-        </p:blipFill>
-        <p:spPr>
-          <a:xfrm>
-            <a:off x="8289600" y="174551"/>
-            <a:ext cx="631175" cy="1424525"/>
-          </a:xfrm>
-          <a:prstGeom prst="rect">
-            <a:avLst/>
-          </a:prstGeom>
-          <a:noFill/>
-          <a:ln>
-            <a:noFill/>
-          </a:ln>
-        </p:spPr>
-      </p:pic>
-    </p:spTree>
-  </p:cSld>
-  <p:clrMapOvr>
-    <a:masterClrMapping/>
-  </p:clrMapOvr>
-  <p:extLst>
-    <p:ext uri="{DCECCB84-F9BA-43D5-87BE-67443E8EF086}">
-      <p15:sldGuideLst xmlns:p15="http://schemas.microsoft.com/office/powerpoint/2012/main">
-        <p15:guide id="1" orient="horz" pos="1620">
-          <p15:clr>
-            <a:srgbClr val="FBAE40"/>
-          </p15:clr>
-        </p15:guide>
-        <p15:guide id="2" pos="180">
-          <p15:clr>
-            <a:srgbClr val="FBAE40"/>
-          </p15:clr>
-        </p15:guide>
-      </p15:sldGuideLst>
-    </p:ext>
-  </p:extLst>
-</p:sldLayout>
-</file>
-
-<file path=ppt/slideLayouts/slideLayout13.xml><?xml version="1.0" encoding="utf-8"?>
+<file path=ppt/slideLayouts/slideLayout11.xml><?xml version="1.0" encoding="utf-8"?>
 <p:sldLayout xmlns:a="http://schemas.openxmlformats.org/drawingml/2006/main" xmlns:r="http://schemas.openxmlformats.org/officeDocument/2006/relationships" xmlns:p="http://schemas.openxmlformats.org/presentationml/2006/main" matchingName="Two Column" type="twoObj">
   <p:cSld name="TWO_OBJECTS">
     <p:spTree>
@@ -3983,34 +3396,6 @@
           </a:p>
         </p:txBody>
       </p:sp>
-      <p:pic>
-        <p:nvPicPr>
-          <p:cNvPr id="67" name="Google Shape;67;p16"/>
-          <p:cNvPicPr preferRelativeResize="0"/>
-          <p:nvPr/>
-        </p:nvPicPr>
-        <p:blipFill>
-          <a:blip r:embed="rId2">
-            <a:alphaModFix/>
-          </a:blip>
-          <a:stretch>
-            <a:fillRect/>
-          </a:stretch>
-        </p:blipFill>
-        <p:spPr>
-          <a:xfrm>
-            <a:off x="8289600" y="174551"/>
-            <a:ext cx="631175" cy="1424525"/>
-          </a:xfrm>
-          <a:prstGeom prst="rect">
-            <a:avLst/>
-          </a:prstGeom>
-          <a:noFill/>
-          <a:ln>
-            <a:noFill/>
-          </a:ln>
-        </p:spPr>
-      </p:pic>
     </p:spTree>
   </p:cSld>
   <p:clrMapOvr>
@@ -4019,7 +3404,7 @@
 </p:sldLayout>
 </file>
 
-<file path=ppt/slideLayouts/slideLayout14.xml><?xml version="1.0" encoding="utf-8"?>
+<file path=ppt/slideLayouts/slideLayout12.xml><?xml version="1.0" encoding="utf-8"?>
 <p:sldLayout xmlns:a="http://schemas.openxmlformats.org/drawingml/2006/main" xmlns:r="http://schemas.openxmlformats.org/officeDocument/2006/relationships" xmlns:p="http://schemas.openxmlformats.org/presentationml/2006/main" matchingName="Content + horizontal image">
   <p:cSld name="Two Content Blocks + Picture">
     <p:spTree>
@@ -4668,7 +4053,7 @@
 </p:sldLayout>
 </file>
 
-<file path=ppt/slideLayouts/slideLayout15.xml><?xml version="1.0" encoding="utf-8"?>
+<file path=ppt/slideLayouts/slideLayout13.xml><?xml version="1.0" encoding="utf-8"?>
 <p:sldLayout xmlns:a="http://schemas.openxmlformats.org/drawingml/2006/main" xmlns:r="http://schemas.openxmlformats.org/officeDocument/2006/relationships" xmlns:p="http://schemas.openxmlformats.org/presentationml/2006/main" matchingName="Two Row list + image">
   <p:cSld name="Two Content Blocks + Picture_2">
     <p:spTree>
@@ -5274,7 +4659,7 @@
 </p:sldLayout>
 </file>
 
-<file path=ppt/slideLayouts/slideLayout16.xml><?xml version="1.0" encoding="utf-8"?>
+<file path=ppt/slideLayouts/slideLayout14.xml><?xml version="1.0" encoding="utf-8"?>
 <p:sldLayout xmlns:a="http://schemas.openxmlformats.org/drawingml/2006/main" xmlns:r="http://schemas.openxmlformats.org/officeDocument/2006/relationships" xmlns:p="http://schemas.openxmlformats.org/presentationml/2006/main" matchingName="4 list">
   <p:cSld name="Two Content Blocks + Picture_2_1">
     <p:spTree>
@@ -7095,7 +6480,7 @@
 </p:sldLayout>
 </file>
 
-<file path=ppt/slideLayouts/slideLayout17.xml><?xml version="1.0" encoding="utf-8"?>
+<file path=ppt/slideLayouts/slideLayout15.xml><?xml version="1.0" encoding="utf-8"?>
 <p:sldLayout xmlns:a="http://schemas.openxmlformats.org/drawingml/2006/main" xmlns:r="http://schemas.openxmlformats.org/officeDocument/2006/relationships" xmlns:p="http://schemas.openxmlformats.org/presentationml/2006/main" matchingName="2 list">
   <p:cSld name="Two Content Blocks + Picture_2_1_1">
     <p:spTree>
@@ -8144,7 +7529,7 @@
 </p:sldLayout>
 </file>
 
-<file path=ppt/slideLayouts/slideLayout18.xml><?xml version="1.0" encoding="utf-8"?>
+<file path=ppt/slideLayouts/slideLayout16.xml><?xml version="1.0" encoding="utf-8"?>
 <p:sldLayout xmlns:a="http://schemas.openxmlformats.org/drawingml/2006/main" xmlns:r="http://schemas.openxmlformats.org/officeDocument/2006/relationships" xmlns:p="http://schemas.openxmlformats.org/presentationml/2006/main" matchingName="Section Header Navy" type="secHead">
   <p:cSld name="SECTION_HEADER">
     <p:bg>
@@ -8576,7 +7961,7 @@
 </p:sldLayout>
 </file>
 
-<file path=ppt/slideLayouts/slideLayout19.xml><?xml version="1.0" encoding="utf-8"?>
+<file path=ppt/slideLayouts/slideLayout17.xml><?xml version="1.0" encoding="utf-8"?>
 <p:sldLayout xmlns:a="http://schemas.openxmlformats.org/drawingml/2006/main" xmlns:r="http://schemas.openxmlformats.org/officeDocument/2006/relationships" xmlns:p="http://schemas.openxmlformats.org/presentationml/2006/main" matchingName="Section Header Moss">
   <p:cSld name="Section Header Moss">
     <p:bg>
@@ -8960,6 +8345,838 @@
       <p:pic>
         <p:nvPicPr>
           <p:cNvPr id="109" name="Google Shape;109;p22"/>
+          <p:cNvPicPr preferRelativeResize="0"/>
+          <p:nvPr/>
+        </p:nvPicPr>
+        <p:blipFill rotWithShape="1">
+          <a:blip r:embed="rId3">
+            <a:alphaModFix/>
+          </a:blip>
+          <a:srcRect/>
+          <a:stretch/>
+        </p:blipFill>
+        <p:spPr>
+          <a:xfrm>
+            <a:off x="7050024" y="4841748"/>
+            <a:ext cx="1932469" cy="143764"/>
+          </a:xfrm>
+          <a:prstGeom prst="rect">
+            <a:avLst/>
+          </a:prstGeom>
+          <a:noFill/>
+          <a:ln>
+            <a:noFill/>
+          </a:ln>
+        </p:spPr>
+      </p:pic>
+    </p:spTree>
+  </p:cSld>
+  <p:clrMapOvr>
+    <a:masterClrMapping/>
+  </p:clrMapOvr>
+</p:sldLayout>
+</file>
+
+<file path=ppt/slideLayouts/slideLayout18.xml><?xml version="1.0" encoding="utf-8"?>
+<p:sldLayout xmlns:a="http://schemas.openxmlformats.org/drawingml/2006/main" xmlns:r="http://schemas.openxmlformats.org/officeDocument/2006/relationships" xmlns:p="http://schemas.openxmlformats.org/presentationml/2006/main" matchingName="Section Header Sea Green">
+  <p:cSld name="Section Header Sea Green">
+    <p:bg>
+      <p:bgPr>
+        <a:solidFill>
+          <a:schemeClr val="accent3"/>
+        </a:solidFill>
+        <a:effectLst/>
+      </p:bgPr>
+    </p:bg>
+    <p:spTree>
+      <p:nvGrpSpPr>
+        <p:cNvPr id="1" name="Shape 110"/>
+        <p:cNvGrpSpPr/>
+        <p:nvPr/>
+      </p:nvGrpSpPr>
+      <p:grpSpPr>
+        <a:xfrm>
+          <a:off x="0" y="0"/>
+          <a:ext cx="0" cy="0"/>
+          <a:chOff x="0" y="0"/>
+          <a:chExt cx="0" cy="0"/>
+        </a:xfrm>
+      </p:grpSpPr>
+      <p:sp>
+        <p:nvSpPr>
+          <p:cNvPr id="111" name="Google Shape;111;p23"/>
+          <p:cNvSpPr/>
+          <p:nvPr/>
+        </p:nvSpPr>
+        <p:spPr>
+          <a:xfrm>
+            <a:off x="0" y="4218710"/>
+            <a:ext cx="9144000" cy="924900"/>
+          </a:xfrm>
+          <a:prstGeom prst="rect">
+            <a:avLst/>
+          </a:prstGeom>
+          <a:solidFill>
+            <a:schemeClr val="accent3"/>
+          </a:solidFill>
+          <a:ln>
+            <a:noFill/>
+          </a:ln>
+        </p:spPr>
+        <p:txBody>
+          <a:bodyPr spcFirstLastPara="1" wrap="square" lIns="68575" tIns="34275" rIns="68575" bIns="34275" anchor="ctr" anchorCtr="0">
+            <a:noAutofit/>
+          </a:bodyPr>
+          <a:lstStyle/>
+          <a:p>
+            <a:pPr marL="0" marR="0" lvl="0" indent="0" algn="ctr" rtl="0">
+              <a:spcBef>
+                <a:spcPts val="0"/>
+              </a:spcBef>
+              <a:spcAft>
+                <a:spcPts val="0"/>
+              </a:spcAft>
+              <a:buNone/>
+            </a:pPr>
+            <a:endParaRPr sz="1000">
+              <a:solidFill>
+                <a:schemeClr val="lt1"/>
+              </a:solidFill>
+              <a:latin typeface="Calibri"/>
+              <a:ea typeface="Calibri"/>
+              <a:cs typeface="Calibri"/>
+              <a:sym typeface="Calibri"/>
+            </a:endParaRPr>
+          </a:p>
+        </p:txBody>
+      </p:sp>
+      <p:sp>
+        <p:nvSpPr>
+          <p:cNvPr id="112" name="Google Shape;112;p23"/>
+          <p:cNvSpPr txBox="1">
+            <a:spLocks noGrp="1"/>
+          </p:cNvSpPr>
+          <p:nvPr>
+            <p:ph type="title"/>
+          </p:nvPr>
+        </p:nvSpPr>
+        <p:spPr>
+          <a:xfrm>
+            <a:off x="623888" y="3070518"/>
+            <a:ext cx="7886700" cy="865800"/>
+          </a:xfrm>
+          <a:prstGeom prst="rect">
+            <a:avLst/>
+          </a:prstGeom>
+          <a:noFill/>
+          <a:ln>
+            <a:noFill/>
+          </a:ln>
+        </p:spPr>
+        <p:txBody>
+          <a:bodyPr spcFirstLastPara="1" wrap="square" lIns="68575" tIns="34275" rIns="68575" bIns="34275" anchor="b" anchorCtr="0">
+            <a:noAutofit/>
+          </a:bodyPr>
+          <a:lstStyle>
+            <a:lvl1pPr marR="0" lvl="0" algn="l" rtl="0">
+              <a:lnSpc>
+                <a:spcPct val="90000"/>
+              </a:lnSpc>
+              <a:spcBef>
+                <a:spcPts val="0"/>
+              </a:spcBef>
+              <a:spcAft>
+                <a:spcPts val="0"/>
+              </a:spcAft>
+              <a:buClr>
+                <a:schemeClr val="lt1"/>
+              </a:buClr>
+              <a:buSzPts val="2700"/>
+              <a:buFont typeface="Century Gothic"/>
+              <a:buNone/>
+              <a:defRPr sz="2700" b="1" i="0" u="none" strike="noStrike" cap="none">
+                <a:solidFill>
+                  <a:schemeClr val="lt1"/>
+                </a:solidFill>
+                <a:latin typeface="Century Gothic"/>
+                <a:ea typeface="Century Gothic"/>
+                <a:cs typeface="Century Gothic"/>
+                <a:sym typeface="Century Gothic"/>
+              </a:defRPr>
+            </a:lvl1pPr>
+            <a:lvl2pPr lvl="1" rtl="0">
+              <a:spcBef>
+                <a:spcPts val="0"/>
+              </a:spcBef>
+              <a:spcAft>
+                <a:spcPts val="0"/>
+              </a:spcAft>
+              <a:buSzPts val="1100"/>
+              <a:buNone/>
+              <a:defRPr sz="1400"/>
+            </a:lvl2pPr>
+            <a:lvl3pPr lvl="2" rtl="0">
+              <a:spcBef>
+                <a:spcPts val="0"/>
+              </a:spcBef>
+              <a:spcAft>
+                <a:spcPts val="0"/>
+              </a:spcAft>
+              <a:buSzPts val="1100"/>
+              <a:buNone/>
+              <a:defRPr sz="1400"/>
+            </a:lvl3pPr>
+            <a:lvl4pPr lvl="3" rtl="0">
+              <a:spcBef>
+                <a:spcPts val="0"/>
+              </a:spcBef>
+              <a:spcAft>
+                <a:spcPts val="0"/>
+              </a:spcAft>
+              <a:buSzPts val="1100"/>
+              <a:buNone/>
+              <a:defRPr sz="1400"/>
+            </a:lvl4pPr>
+            <a:lvl5pPr lvl="4" rtl="0">
+              <a:spcBef>
+                <a:spcPts val="0"/>
+              </a:spcBef>
+              <a:spcAft>
+                <a:spcPts val="0"/>
+              </a:spcAft>
+              <a:buSzPts val="1100"/>
+              <a:buNone/>
+              <a:defRPr sz="1400"/>
+            </a:lvl5pPr>
+            <a:lvl6pPr lvl="5" rtl="0">
+              <a:spcBef>
+                <a:spcPts val="0"/>
+              </a:spcBef>
+              <a:spcAft>
+                <a:spcPts val="0"/>
+              </a:spcAft>
+              <a:buSzPts val="1100"/>
+              <a:buNone/>
+              <a:defRPr sz="1400"/>
+            </a:lvl6pPr>
+            <a:lvl7pPr lvl="6" rtl="0">
+              <a:spcBef>
+                <a:spcPts val="0"/>
+              </a:spcBef>
+              <a:spcAft>
+                <a:spcPts val="0"/>
+              </a:spcAft>
+              <a:buSzPts val="1100"/>
+              <a:buNone/>
+              <a:defRPr sz="1400"/>
+            </a:lvl7pPr>
+            <a:lvl8pPr lvl="7" rtl="0">
+              <a:spcBef>
+                <a:spcPts val="0"/>
+              </a:spcBef>
+              <a:spcAft>
+                <a:spcPts val="0"/>
+              </a:spcAft>
+              <a:buSzPts val="1100"/>
+              <a:buNone/>
+              <a:defRPr sz="1400"/>
+            </a:lvl8pPr>
+            <a:lvl9pPr lvl="8" rtl="0">
+              <a:spcBef>
+                <a:spcPts val="0"/>
+              </a:spcBef>
+              <a:spcAft>
+                <a:spcPts val="0"/>
+              </a:spcAft>
+              <a:buSzPts val="1100"/>
+              <a:buNone/>
+              <a:defRPr sz="1400"/>
+            </a:lvl9pPr>
+          </a:lstStyle>
+          <a:p>
+            <a:endParaRPr/>
+          </a:p>
+        </p:txBody>
+      </p:sp>
+      <p:sp>
+        <p:nvSpPr>
+          <p:cNvPr id="113" name="Google Shape;113;p23"/>
+          <p:cNvSpPr txBox="1">
+            <a:spLocks noGrp="1"/>
+          </p:cNvSpPr>
+          <p:nvPr>
+            <p:ph type="subTitle" idx="1"/>
+          </p:nvPr>
+        </p:nvSpPr>
+        <p:spPr>
+          <a:xfrm>
+            <a:off x="653175" y="3900000"/>
+            <a:ext cx="4675800" cy="430200"/>
+          </a:xfrm>
+          <a:prstGeom prst="rect">
+            <a:avLst/>
+          </a:prstGeom>
+          <a:noFill/>
+          <a:ln>
+            <a:noFill/>
+          </a:ln>
+        </p:spPr>
+        <p:txBody>
+          <a:bodyPr spcFirstLastPara="1" wrap="square" lIns="91425" tIns="91425" rIns="91425" bIns="91425" anchor="t" anchorCtr="0">
+            <a:noAutofit/>
+          </a:bodyPr>
+          <a:lstStyle>
+            <a:lvl1pPr lvl="0" rtl="0">
+              <a:spcBef>
+                <a:spcPts val="0"/>
+              </a:spcBef>
+              <a:spcAft>
+                <a:spcPts val="0"/>
+              </a:spcAft>
+              <a:buNone/>
+              <a:defRPr sz="1900">
+                <a:solidFill>
+                  <a:srgbClr val="FFFFFF"/>
+                </a:solidFill>
+                <a:latin typeface="Century Gothic"/>
+                <a:ea typeface="Century Gothic"/>
+                <a:cs typeface="Century Gothic"/>
+                <a:sym typeface="Century Gothic"/>
+              </a:defRPr>
+            </a:lvl1pPr>
+            <a:lvl2pPr lvl="1" rtl="0">
+              <a:spcBef>
+                <a:spcPts val="0"/>
+              </a:spcBef>
+              <a:spcAft>
+                <a:spcPts val="0"/>
+              </a:spcAft>
+              <a:buNone/>
+              <a:defRPr/>
+            </a:lvl2pPr>
+            <a:lvl3pPr lvl="2" rtl="0">
+              <a:spcBef>
+                <a:spcPts val="0"/>
+              </a:spcBef>
+              <a:spcAft>
+                <a:spcPts val="0"/>
+              </a:spcAft>
+              <a:buNone/>
+              <a:defRPr/>
+            </a:lvl3pPr>
+            <a:lvl4pPr lvl="3" rtl="0">
+              <a:spcBef>
+                <a:spcPts val="0"/>
+              </a:spcBef>
+              <a:spcAft>
+                <a:spcPts val="0"/>
+              </a:spcAft>
+              <a:buNone/>
+              <a:defRPr/>
+            </a:lvl4pPr>
+            <a:lvl5pPr lvl="4" rtl="0">
+              <a:spcBef>
+                <a:spcPts val="0"/>
+              </a:spcBef>
+              <a:spcAft>
+                <a:spcPts val="0"/>
+              </a:spcAft>
+              <a:buNone/>
+              <a:defRPr/>
+            </a:lvl5pPr>
+            <a:lvl6pPr lvl="5" rtl="0">
+              <a:spcBef>
+                <a:spcPts val="0"/>
+              </a:spcBef>
+              <a:spcAft>
+                <a:spcPts val="0"/>
+              </a:spcAft>
+              <a:buNone/>
+              <a:defRPr/>
+            </a:lvl6pPr>
+            <a:lvl7pPr lvl="6" rtl="0">
+              <a:spcBef>
+                <a:spcPts val="0"/>
+              </a:spcBef>
+              <a:spcAft>
+                <a:spcPts val="0"/>
+              </a:spcAft>
+              <a:buNone/>
+              <a:defRPr/>
+            </a:lvl7pPr>
+            <a:lvl8pPr lvl="7" rtl="0">
+              <a:spcBef>
+                <a:spcPts val="0"/>
+              </a:spcBef>
+              <a:spcAft>
+                <a:spcPts val="0"/>
+              </a:spcAft>
+              <a:buNone/>
+              <a:defRPr/>
+            </a:lvl8pPr>
+            <a:lvl9pPr lvl="8" rtl="0">
+              <a:spcBef>
+                <a:spcPts val="0"/>
+              </a:spcBef>
+              <a:spcAft>
+                <a:spcPts val="0"/>
+              </a:spcAft>
+              <a:buNone/>
+              <a:defRPr/>
+            </a:lvl9pPr>
+          </a:lstStyle>
+          <a:p>
+            <a:endParaRPr/>
+          </a:p>
+        </p:txBody>
+      </p:sp>
+      <p:pic>
+        <p:nvPicPr>
+          <p:cNvPr id="114" name="Google Shape;114;p23"/>
+          <p:cNvPicPr preferRelativeResize="0"/>
+          <p:nvPr/>
+        </p:nvPicPr>
+        <p:blipFill>
+          <a:blip r:embed="rId2">
+            <a:alphaModFix/>
+          </a:blip>
+          <a:stretch>
+            <a:fillRect/>
+          </a:stretch>
+        </p:blipFill>
+        <p:spPr>
+          <a:xfrm>
+            <a:off x="8289600" y="160446"/>
+            <a:ext cx="631175" cy="1414154"/>
+          </a:xfrm>
+          <a:prstGeom prst="rect">
+            <a:avLst/>
+          </a:prstGeom>
+          <a:noFill/>
+          <a:ln>
+            <a:noFill/>
+          </a:ln>
+        </p:spPr>
+      </p:pic>
+      <p:pic>
+        <p:nvPicPr>
+          <p:cNvPr id="115" name="Google Shape;115;p23"/>
+          <p:cNvPicPr preferRelativeResize="0"/>
+          <p:nvPr/>
+        </p:nvPicPr>
+        <p:blipFill rotWithShape="1">
+          <a:blip r:embed="rId3">
+            <a:alphaModFix/>
+          </a:blip>
+          <a:srcRect/>
+          <a:stretch/>
+        </p:blipFill>
+        <p:spPr>
+          <a:xfrm>
+            <a:off x="7050024" y="4841748"/>
+            <a:ext cx="1932469" cy="143764"/>
+          </a:xfrm>
+          <a:prstGeom prst="rect">
+            <a:avLst/>
+          </a:prstGeom>
+          <a:noFill/>
+          <a:ln>
+            <a:noFill/>
+          </a:ln>
+        </p:spPr>
+      </p:pic>
+    </p:spTree>
+  </p:cSld>
+  <p:clrMapOvr>
+    <a:masterClrMapping/>
+  </p:clrMapOvr>
+</p:sldLayout>
+</file>
+
+<file path=ppt/slideLayouts/slideLayout19.xml><?xml version="1.0" encoding="utf-8"?>
+<p:sldLayout xmlns:a="http://schemas.openxmlformats.org/drawingml/2006/main" xmlns:r="http://schemas.openxmlformats.org/officeDocument/2006/relationships" xmlns:p="http://schemas.openxmlformats.org/presentationml/2006/main" matchingName="Section Header Coral">
+  <p:cSld name="Section Header Coral">
+    <p:bg>
+      <p:bgPr>
+        <a:solidFill>
+          <a:schemeClr val="accent4"/>
+        </a:solidFill>
+        <a:effectLst/>
+      </p:bgPr>
+    </p:bg>
+    <p:spTree>
+      <p:nvGrpSpPr>
+        <p:cNvPr id="1" name="Shape 116"/>
+        <p:cNvGrpSpPr/>
+        <p:nvPr/>
+      </p:nvGrpSpPr>
+      <p:grpSpPr>
+        <a:xfrm>
+          <a:off x="0" y="0"/>
+          <a:ext cx="0" cy="0"/>
+          <a:chOff x="0" y="0"/>
+          <a:chExt cx="0" cy="0"/>
+        </a:xfrm>
+      </p:grpSpPr>
+      <p:sp>
+        <p:nvSpPr>
+          <p:cNvPr id="117" name="Google Shape;117;p24"/>
+          <p:cNvSpPr/>
+          <p:nvPr/>
+        </p:nvSpPr>
+        <p:spPr>
+          <a:xfrm>
+            <a:off x="0" y="4218710"/>
+            <a:ext cx="9144000" cy="924900"/>
+          </a:xfrm>
+          <a:prstGeom prst="rect">
+            <a:avLst/>
+          </a:prstGeom>
+          <a:solidFill>
+            <a:schemeClr val="accent4"/>
+          </a:solidFill>
+          <a:ln>
+            <a:noFill/>
+          </a:ln>
+        </p:spPr>
+        <p:txBody>
+          <a:bodyPr spcFirstLastPara="1" wrap="square" lIns="68575" tIns="34275" rIns="68575" bIns="34275" anchor="ctr" anchorCtr="0">
+            <a:noAutofit/>
+          </a:bodyPr>
+          <a:lstStyle/>
+          <a:p>
+            <a:pPr marL="0" marR="0" lvl="0" indent="0" algn="ctr" rtl="0">
+              <a:spcBef>
+                <a:spcPts val="0"/>
+              </a:spcBef>
+              <a:spcAft>
+                <a:spcPts val="0"/>
+              </a:spcAft>
+              <a:buNone/>
+            </a:pPr>
+            <a:endParaRPr sz="1000">
+              <a:solidFill>
+                <a:schemeClr val="lt1"/>
+              </a:solidFill>
+              <a:latin typeface="Calibri"/>
+              <a:ea typeface="Calibri"/>
+              <a:cs typeface="Calibri"/>
+              <a:sym typeface="Calibri"/>
+            </a:endParaRPr>
+          </a:p>
+        </p:txBody>
+      </p:sp>
+      <p:sp>
+        <p:nvSpPr>
+          <p:cNvPr id="118" name="Google Shape;118;p24"/>
+          <p:cNvSpPr txBox="1">
+            <a:spLocks noGrp="1"/>
+          </p:cNvSpPr>
+          <p:nvPr>
+            <p:ph type="title"/>
+          </p:nvPr>
+        </p:nvSpPr>
+        <p:spPr>
+          <a:xfrm>
+            <a:off x="623888" y="3070518"/>
+            <a:ext cx="7886700" cy="865800"/>
+          </a:xfrm>
+          <a:prstGeom prst="rect">
+            <a:avLst/>
+          </a:prstGeom>
+          <a:noFill/>
+          <a:ln>
+            <a:noFill/>
+          </a:ln>
+        </p:spPr>
+        <p:txBody>
+          <a:bodyPr spcFirstLastPara="1" wrap="square" lIns="68575" tIns="34275" rIns="68575" bIns="34275" anchor="b" anchorCtr="0">
+            <a:noAutofit/>
+          </a:bodyPr>
+          <a:lstStyle>
+            <a:lvl1pPr marR="0" lvl="0" algn="l" rtl="0">
+              <a:lnSpc>
+                <a:spcPct val="90000"/>
+              </a:lnSpc>
+              <a:spcBef>
+                <a:spcPts val="0"/>
+              </a:spcBef>
+              <a:spcAft>
+                <a:spcPts val="0"/>
+              </a:spcAft>
+              <a:buClr>
+                <a:schemeClr val="lt1"/>
+              </a:buClr>
+              <a:buSzPts val="2700"/>
+              <a:buFont typeface="Century Gothic"/>
+              <a:buNone/>
+              <a:defRPr sz="2700" b="1" i="0" u="none" strike="noStrike" cap="none">
+                <a:solidFill>
+                  <a:schemeClr val="lt1"/>
+                </a:solidFill>
+                <a:latin typeface="Century Gothic"/>
+                <a:ea typeface="Century Gothic"/>
+                <a:cs typeface="Century Gothic"/>
+                <a:sym typeface="Century Gothic"/>
+              </a:defRPr>
+            </a:lvl1pPr>
+            <a:lvl2pPr lvl="1" rtl="0">
+              <a:spcBef>
+                <a:spcPts val="0"/>
+              </a:spcBef>
+              <a:spcAft>
+                <a:spcPts val="0"/>
+              </a:spcAft>
+              <a:buSzPts val="1100"/>
+              <a:buNone/>
+              <a:defRPr sz="1400"/>
+            </a:lvl2pPr>
+            <a:lvl3pPr lvl="2" rtl="0">
+              <a:spcBef>
+                <a:spcPts val="0"/>
+              </a:spcBef>
+              <a:spcAft>
+                <a:spcPts val="0"/>
+              </a:spcAft>
+              <a:buSzPts val="1100"/>
+              <a:buNone/>
+              <a:defRPr sz="1400"/>
+            </a:lvl3pPr>
+            <a:lvl4pPr lvl="3" rtl="0">
+              <a:spcBef>
+                <a:spcPts val="0"/>
+              </a:spcBef>
+              <a:spcAft>
+                <a:spcPts val="0"/>
+              </a:spcAft>
+              <a:buSzPts val="1100"/>
+              <a:buNone/>
+              <a:defRPr sz="1400"/>
+            </a:lvl4pPr>
+            <a:lvl5pPr lvl="4" rtl="0">
+              <a:spcBef>
+                <a:spcPts val="0"/>
+              </a:spcBef>
+              <a:spcAft>
+                <a:spcPts val="0"/>
+              </a:spcAft>
+              <a:buSzPts val="1100"/>
+              <a:buNone/>
+              <a:defRPr sz="1400"/>
+            </a:lvl5pPr>
+            <a:lvl6pPr lvl="5" rtl="0">
+              <a:spcBef>
+                <a:spcPts val="0"/>
+              </a:spcBef>
+              <a:spcAft>
+                <a:spcPts val="0"/>
+              </a:spcAft>
+              <a:buSzPts val="1100"/>
+              <a:buNone/>
+              <a:defRPr sz="1400"/>
+            </a:lvl6pPr>
+            <a:lvl7pPr lvl="6" rtl="0">
+              <a:spcBef>
+                <a:spcPts val="0"/>
+              </a:spcBef>
+              <a:spcAft>
+                <a:spcPts val="0"/>
+              </a:spcAft>
+              <a:buSzPts val="1100"/>
+              <a:buNone/>
+              <a:defRPr sz="1400"/>
+            </a:lvl7pPr>
+            <a:lvl8pPr lvl="7" rtl="0">
+              <a:spcBef>
+                <a:spcPts val="0"/>
+              </a:spcBef>
+              <a:spcAft>
+                <a:spcPts val="0"/>
+              </a:spcAft>
+              <a:buSzPts val="1100"/>
+              <a:buNone/>
+              <a:defRPr sz="1400"/>
+            </a:lvl8pPr>
+            <a:lvl9pPr lvl="8" rtl="0">
+              <a:spcBef>
+                <a:spcPts val="0"/>
+              </a:spcBef>
+              <a:spcAft>
+                <a:spcPts val="0"/>
+              </a:spcAft>
+              <a:buSzPts val="1100"/>
+              <a:buNone/>
+              <a:defRPr sz="1400"/>
+            </a:lvl9pPr>
+          </a:lstStyle>
+          <a:p>
+            <a:endParaRPr/>
+          </a:p>
+        </p:txBody>
+      </p:sp>
+      <p:sp>
+        <p:nvSpPr>
+          <p:cNvPr id="119" name="Google Shape;119;p24"/>
+          <p:cNvSpPr txBox="1">
+            <a:spLocks noGrp="1"/>
+          </p:cNvSpPr>
+          <p:nvPr>
+            <p:ph type="subTitle" idx="1"/>
+          </p:nvPr>
+        </p:nvSpPr>
+        <p:spPr>
+          <a:xfrm>
+            <a:off x="653175" y="3900000"/>
+            <a:ext cx="4675800" cy="430200"/>
+          </a:xfrm>
+          <a:prstGeom prst="rect">
+            <a:avLst/>
+          </a:prstGeom>
+          <a:noFill/>
+          <a:ln>
+            <a:noFill/>
+          </a:ln>
+        </p:spPr>
+        <p:txBody>
+          <a:bodyPr spcFirstLastPara="1" wrap="square" lIns="91425" tIns="91425" rIns="91425" bIns="91425" anchor="t" anchorCtr="0">
+            <a:noAutofit/>
+          </a:bodyPr>
+          <a:lstStyle>
+            <a:lvl1pPr lvl="0" rtl="0">
+              <a:spcBef>
+                <a:spcPts val="0"/>
+              </a:spcBef>
+              <a:spcAft>
+                <a:spcPts val="0"/>
+              </a:spcAft>
+              <a:buNone/>
+              <a:defRPr sz="1900">
+                <a:solidFill>
+                  <a:srgbClr val="FFFFFF"/>
+                </a:solidFill>
+                <a:latin typeface="Century Gothic"/>
+                <a:ea typeface="Century Gothic"/>
+                <a:cs typeface="Century Gothic"/>
+                <a:sym typeface="Century Gothic"/>
+              </a:defRPr>
+            </a:lvl1pPr>
+            <a:lvl2pPr lvl="1" rtl="0">
+              <a:spcBef>
+                <a:spcPts val="0"/>
+              </a:spcBef>
+              <a:spcAft>
+                <a:spcPts val="0"/>
+              </a:spcAft>
+              <a:buNone/>
+              <a:defRPr/>
+            </a:lvl2pPr>
+            <a:lvl3pPr lvl="2" rtl="0">
+              <a:spcBef>
+                <a:spcPts val="0"/>
+              </a:spcBef>
+              <a:spcAft>
+                <a:spcPts val="0"/>
+              </a:spcAft>
+              <a:buNone/>
+              <a:defRPr/>
+            </a:lvl3pPr>
+            <a:lvl4pPr lvl="3" rtl="0">
+              <a:spcBef>
+                <a:spcPts val="0"/>
+              </a:spcBef>
+              <a:spcAft>
+                <a:spcPts val="0"/>
+              </a:spcAft>
+              <a:buNone/>
+              <a:defRPr/>
+            </a:lvl4pPr>
+            <a:lvl5pPr lvl="4" rtl="0">
+              <a:spcBef>
+                <a:spcPts val="0"/>
+              </a:spcBef>
+              <a:spcAft>
+                <a:spcPts val="0"/>
+              </a:spcAft>
+              <a:buNone/>
+              <a:defRPr/>
+            </a:lvl5pPr>
+            <a:lvl6pPr lvl="5" rtl="0">
+              <a:spcBef>
+                <a:spcPts val="0"/>
+              </a:spcBef>
+              <a:spcAft>
+                <a:spcPts val="0"/>
+              </a:spcAft>
+              <a:buNone/>
+              <a:defRPr/>
+            </a:lvl6pPr>
+            <a:lvl7pPr lvl="6" rtl="0">
+              <a:spcBef>
+                <a:spcPts val="0"/>
+              </a:spcBef>
+              <a:spcAft>
+                <a:spcPts val="0"/>
+              </a:spcAft>
+              <a:buNone/>
+              <a:defRPr/>
+            </a:lvl7pPr>
+            <a:lvl8pPr lvl="7" rtl="0">
+              <a:spcBef>
+                <a:spcPts val="0"/>
+              </a:spcBef>
+              <a:spcAft>
+                <a:spcPts val="0"/>
+              </a:spcAft>
+              <a:buNone/>
+              <a:defRPr/>
+            </a:lvl8pPr>
+            <a:lvl9pPr lvl="8" rtl="0">
+              <a:spcBef>
+                <a:spcPts val="0"/>
+              </a:spcBef>
+              <a:spcAft>
+                <a:spcPts val="0"/>
+              </a:spcAft>
+              <a:buNone/>
+              <a:defRPr/>
+            </a:lvl9pPr>
+          </a:lstStyle>
+          <a:p>
+            <a:endParaRPr/>
+          </a:p>
+        </p:txBody>
+      </p:sp>
+      <p:pic>
+        <p:nvPicPr>
+          <p:cNvPr id="120" name="Google Shape;120;p24"/>
+          <p:cNvPicPr preferRelativeResize="0"/>
+          <p:nvPr/>
+        </p:nvPicPr>
+        <p:blipFill>
+          <a:blip r:embed="rId2">
+            <a:alphaModFix/>
+          </a:blip>
+          <a:stretch>
+            <a:fillRect/>
+          </a:stretch>
+        </p:blipFill>
+        <p:spPr>
+          <a:xfrm>
+            <a:off x="8289600" y="160446"/>
+            <a:ext cx="631175" cy="1414154"/>
+          </a:xfrm>
+          <a:prstGeom prst="rect">
+            <a:avLst/>
+          </a:prstGeom>
+          <a:noFill/>
+          <a:ln>
+            <a:noFill/>
+          </a:ln>
+        </p:spPr>
+      </p:pic>
+      <p:pic>
+        <p:nvPicPr>
+          <p:cNvPr id="121" name="Google Shape;121;p24"/>
           <p:cNvPicPr preferRelativeResize="0"/>
           <p:nvPr/>
         </p:nvPicPr>
@@ -9226,838 +9443,6 @@
 </file>
 
 <file path=ppt/slideLayouts/slideLayout20.xml><?xml version="1.0" encoding="utf-8"?>
-<p:sldLayout xmlns:a="http://schemas.openxmlformats.org/drawingml/2006/main" xmlns:r="http://schemas.openxmlformats.org/officeDocument/2006/relationships" xmlns:p="http://schemas.openxmlformats.org/presentationml/2006/main" matchingName="Section Header Sea Green">
-  <p:cSld name="Section Header Sea Green">
-    <p:bg>
-      <p:bgPr>
-        <a:solidFill>
-          <a:schemeClr val="accent3"/>
-        </a:solidFill>
-        <a:effectLst/>
-      </p:bgPr>
-    </p:bg>
-    <p:spTree>
-      <p:nvGrpSpPr>
-        <p:cNvPr id="1" name="Shape 110"/>
-        <p:cNvGrpSpPr/>
-        <p:nvPr/>
-      </p:nvGrpSpPr>
-      <p:grpSpPr>
-        <a:xfrm>
-          <a:off x="0" y="0"/>
-          <a:ext cx="0" cy="0"/>
-          <a:chOff x="0" y="0"/>
-          <a:chExt cx="0" cy="0"/>
-        </a:xfrm>
-      </p:grpSpPr>
-      <p:sp>
-        <p:nvSpPr>
-          <p:cNvPr id="111" name="Google Shape;111;p23"/>
-          <p:cNvSpPr/>
-          <p:nvPr/>
-        </p:nvSpPr>
-        <p:spPr>
-          <a:xfrm>
-            <a:off x="0" y="4218710"/>
-            <a:ext cx="9144000" cy="924900"/>
-          </a:xfrm>
-          <a:prstGeom prst="rect">
-            <a:avLst/>
-          </a:prstGeom>
-          <a:solidFill>
-            <a:schemeClr val="accent3"/>
-          </a:solidFill>
-          <a:ln>
-            <a:noFill/>
-          </a:ln>
-        </p:spPr>
-        <p:txBody>
-          <a:bodyPr spcFirstLastPara="1" wrap="square" lIns="68575" tIns="34275" rIns="68575" bIns="34275" anchor="ctr" anchorCtr="0">
-            <a:noAutofit/>
-          </a:bodyPr>
-          <a:lstStyle/>
-          <a:p>
-            <a:pPr marL="0" marR="0" lvl="0" indent="0" algn="ctr" rtl="0">
-              <a:spcBef>
-                <a:spcPts val="0"/>
-              </a:spcBef>
-              <a:spcAft>
-                <a:spcPts val="0"/>
-              </a:spcAft>
-              <a:buNone/>
-            </a:pPr>
-            <a:endParaRPr sz="1000">
-              <a:solidFill>
-                <a:schemeClr val="lt1"/>
-              </a:solidFill>
-              <a:latin typeface="Calibri"/>
-              <a:ea typeface="Calibri"/>
-              <a:cs typeface="Calibri"/>
-              <a:sym typeface="Calibri"/>
-            </a:endParaRPr>
-          </a:p>
-        </p:txBody>
-      </p:sp>
-      <p:sp>
-        <p:nvSpPr>
-          <p:cNvPr id="112" name="Google Shape;112;p23"/>
-          <p:cNvSpPr txBox="1">
-            <a:spLocks noGrp="1"/>
-          </p:cNvSpPr>
-          <p:nvPr>
-            <p:ph type="title"/>
-          </p:nvPr>
-        </p:nvSpPr>
-        <p:spPr>
-          <a:xfrm>
-            <a:off x="623888" y="3070518"/>
-            <a:ext cx="7886700" cy="865800"/>
-          </a:xfrm>
-          <a:prstGeom prst="rect">
-            <a:avLst/>
-          </a:prstGeom>
-          <a:noFill/>
-          <a:ln>
-            <a:noFill/>
-          </a:ln>
-        </p:spPr>
-        <p:txBody>
-          <a:bodyPr spcFirstLastPara="1" wrap="square" lIns="68575" tIns="34275" rIns="68575" bIns="34275" anchor="b" anchorCtr="0">
-            <a:noAutofit/>
-          </a:bodyPr>
-          <a:lstStyle>
-            <a:lvl1pPr marR="0" lvl="0" algn="l" rtl="0">
-              <a:lnSpc>
-                <a:spcPct val="90000"/>
-              </a:lnSpc>
-              <a:spcBef>
-                <a:spcPts val="0"/>
-              </a:spcBef>
-              <a:spcAft>
-                <a:spcPts val="0"/>
-              </a:spcAft>
-              <a:buClr>
-                <a:schemeClr val="lt1"/>
-              </a:buClr>
-              <a:buSzPts val="2700"/>
-              <a:buFont typeface="Century Gothic"/>
-              <a:buNone/>
-              <a:defRPr sz="2700" b="1" i="0" u="none" strike="noStrike" cap="none">
-                <a:solidFill>
-                  <a:schemeClr val="lt1"/>
-                </a:solidFill>
-                <a:latin typeface="Century Gothic"/>
-                <a:ea typeface="Century Gothic"/>
-                <a:cs typeface="Century Gothic"/>
-                <a:sym typeface="Century Gothic"/>
-              </a:defRPr>
-            </a:lvl1pPr>
-            <a:lvl2pPr lvl="1" rtl="0">
-              <a:spcBef>
-                <a:spcPts val="0"/>
-              </a:spcBef>
-              <a:spcAft>
-                <a:spcPts val="0"/>
-              </a:spcAft>
-              <a:buSzPts val="1100"/>
-              <a:buNone/>
-              <a:defRPr sz="1400"/>
-            </a:lvl2pPr>
-            <a:lvl3pPr lvl="2" rtl="0">
-              <a:spcBef>
-                <a:spcPts val="0"/>
-              </a:spcBef>
-              <a:spcAft>
-                <a:spcPts val="0"/>
-              </a:spcAft>
-              <a:buSzPts val="1100"/>
-              <a:buNone/>
-              <a:defRPr sz="1400"/>
-            </a:lvl3pPr>
-            <a:lvl4pPr lvl="3" rtl="0">
-              <a:spcBef>
-                <a:spcPts val="0"/>
-              </a:spcBef>
-              <a:spcAft>
-                <a:spcPts val="0"/>
-              </a:spcAft>
-              <a:buSzPts val="1100"/>
-              <a:buNone/>
-              <a:defRPr sz="1400"/>
-            </a:lvl4pPr>
-            <a:lvl5pPr lvl="4" rtl="0">
-              <a:spcBef>
-                <a:spcPts val="0"/>
-              </a:spcBef>
-              <a:spcAft>
-                <a:spcPts val="0"/>
-              </a:spcAft>
-              <a:buSzPts val="1100"/>
-              <a:buNone/>
-              <a:defRPr sz="1400"/>
-            </a:lvl5pPr>
-            <a:lvl6pPr lvl="5" rtl="0">
-              <a:spcBef>
-                <a:spcPts val="0"/>
-              </a:spcBef>
-              <a:spcAft>
-                <a:spcPts val="0"/>
-              </a:spcAft>
-              <a:buSzPts val="1100"/>
-              <a:buNone/>
-              <a:defRPr sz="1400"/>
-            </a:lvl6pPr>
-            <a:lvl7pPr lvl="6" rtl="0">
-              <a:spcBef>
-                <a:spcPts val="0"/>
-              </a:spcBef>
-              <a:spcAft>
-                <a:spcPts val="0"/>
-              </a:spcAft>
-              <a:buSzPts val="1100"/>
-              <a:buNone/>
-              <a:defRPr sz="1400"/>
-            </a:lvl7pPr>
-            <a:lvl8pPr lvl="7" rtl="0">
-              <a:spcBef>
-                <a:spcPts val="0"/>
-              </a:spcBef>
-              <a:spcAft>
-                <a:spcPts val="0"/>
-              </a:spcAft>
-              <a:buSzPts val="1100"/>
-              <a:buNone/>
-              <a:defRPr sz="1400"/>
-            </a:lvl8pPr>
-            <a:lvl9pPr lvl="8" rtl="0">
-              <a:spcBef>
-                <a:spcPts val="0"/>
-              </a:spcBef>
-              <a:spcAft>
-                <a:spcPts val="0"/>
-              </a:spcAft>
-              <a:buSzPts val="1100"/>
-              <a:buNone/>
-              <a:defRPr sz="1400"/>
-            </a:lvl9pPr>
-          </a:lstStyle>
-          <a:p>
-            <a:endParaRPr/>
-          </a:p>
-        </p:txBody>
-      </p:sp>
-      <p:sp>
-        <p:nvSpPr>
-          <p:cNvPr id="113" name="Google Shape;113;p23"/>
-          <p:cNvSpPr txBox="1">
-            <a:spLocks noGrp="1"/>
-          </p:cNvSpPr>
-          <p:nvPr>
-            <p:ph type="subTitle" idx="1"/>
-          </p:nvPr>
-        </p:nvSpPr>
-        <p:spPr>
-          <a:xfrm>
-            <a:off x="653175" y="3900000"/>
-            <a:ext cx="4675800" cy="430200"/>
-          </a:xfrm>
-          <a:prstGeom prst="rect">
-            <a:avLst/>
-          </a:prstGeom>
-          <a:noFill/>
-          <a:ln>
-            <a:noFill/>
-          </a:ln>
-        </p:spPr>
-        <p:txBody>
-          <a:bodyPr spcFirstLastPara="1" wrap="square" lIns="91425" tIns="91425" rIns="91425" bIns="91425" anchor="t" anchorCtr="0">
-            <a:noAutofit/>
-          </a:bodyPr>
-          <a:lstStyle>
-            <a:lvl1pPr lvl="0" rtl="0">
-              <a:spcBef>
-                <a:spcPts val="0"/>
-              </a:spcBef>
-              <a:spcAft>
-                <a:spcPts val="0"/>
-              </a:spcAft>
-              <a:buNone/>
-              <a:defRPr sz="1900">
-                <a:solidFill>
-                  <a:srgbClr val="FFFFFF"/>
-                </a:solidFill>
-                <a:latin typeface="Century Gothic"/>
-                <a:ea typeface="Century Gothic"/>
-                <a:cs typeface="Century Gothic"/>
-                <a:sym typeface="Century Gothic"/>
-              </a:defRPr>
-            </a:lvl1pPr>
-            <a:lvl2pPr lvl="1" rtl="0">
-              <a:spcBef>
-                <a:spcPts val="0"/>
-              </a:spcBef>
-              <a:spcAft>
-                <a:spcPts val="0"/>
-              </a:spcAft>
-              <a:buNone/>
-              <a:defRPr/>
-            </a:lvl2pPr>
-            <a:lvl3pPr lvl="2" rtl="0">
-              <a:spcBef>
-                <a:spcPts val="0"/>
-              </a:spcBef>
-              <a:spcAft>
-                <a:spcPts val="0"/>
-              </a:spcAft>
-              <a:buNone/>
-              <a:defRPr/>
-            </a:lvl3pPr>
-            <a:lvl4pPr lvl="3" rtl="0">
-              <a:spcBef>
-                <a:spcPts val="0"/>
-              </a:spcBef>
-              <a:spcAft>
-                <a:spcPts val="0"/>
-              </a:spcAft>
-              <a:buNone/>
-              <a:defRPr/>
-            </a:lvl4pPr>
-            <a:lvl5pPr lvl="4" rtl="0">
-              <a:spcBef>
-                <a:spcPts val="0"/>
-              </a:spcBef>
-              <a:spcAft>
-                <a:spcPts val="0"/>
-              </a:spcAft>
-              <a:buNone/>
-              <a:defRPr/>
-            </a:lvl5pPr>
-            <a:lvl6pPr lvl="5" rtl="0">
-              <a:spcBef>
-                <a:spcPts val="0"/>
-              </a:spcBef>
-              <a:spcAft>
-                <a:spcPts val="0"/>
-              </a:spcAft>
-              <a:buNone/>
-              <a:defRPr/>
-            </a:lvl6pPr>
-            <a:lvl7pPr lvl="6" rtl="0">
-              <a:spcBef>
-                <a:spcPts val="0"/>
-              </a:spcBef>
-              <a:spcAft>
-                <a:spcPts val="0"/>
-              </a:spcAft>
-              <a:buNone/>
-              <a:defRPr/>
-            </a:lvl7pPr>
-            <a:lvl8pPr lvl="7" rtl="0">
-              <a:spcBef>
-                <a:spcPts val="0"/>
-              </a:spcBef>
-              <a:spcAft>
-                <a:spcPts val="0"/>
-              </a:spcAft>
-              <a:buNone/>
-              <a:defRPr/>
-            </a:lvl8pPr>
-            <a:lvl9pPr lvl="8" rtl="0">
-              <a:spcBef>
-                <a:spcPts val="0"/>
-              </a:spcBef>
-              <a:spcAft>
-                <a:spcPts val="0"/>
-              </a:spcAft>
-              <a:buNone/>
-              <a:defRPr/>
-            </a:lvl9pPr>
-          </a:lstStyle>
-          <a:p>
-            <a:endParaRPr/>
-          </a:p>
-        </p:txBody>
-      </p:sp>
-      <p:pic>
-        <p:nvPicPr>
-          <p:cNvPr id="114" name="Google Shape;114;p23"/>
-          <p:cNvPicPr preferRelativeResize="0"/>
-          <p:nvPr/>
-        </p:nvPicPr>
-        <p:blipFill>
-          <a:blip r:embed="rId2">
-            <a:alphaModFix/>
-          </a:blip>
-          <a:stretch>
-            <a:fillRect/>
-          </a:stretch>
-        </p:blipFill>
-        <p:spPr>
-          <a:xfrm>
-            <a:off x="8289600" y="160446"/>
-            <a:ext cx="631175" cy="1414154"/>
-          </a:xfrm>
-          <a:prstGeom prst="rect">
-            <a:avLst/>
-          </a:prstGeom>
-          <a:noFill/>
-          <a:ln>
-            <a:noFill/>
-          </a:ln>
-        </p:spPr>
-      </p:pic>
-      <p:pic>
-        <p:nvPicPr>
-          <p:cNvPr id="115" name="Google Shape;115;p23"/>
-          <p:cNvPicPr preferRelativeResize="0"/>
-          <p:nvPr/>
-        </p:nvPicPr>
-        <p:blipFill rotWithShape="1">
-          <a:blip r:embed="rId3">
-            <a:alphaModFix/>
-          </a:blip>
-          <a:srcRect/>
-          <a:stretch/>
-        </p:blipFill>
-        <p:spPr>
-          <a:xfrm>
-            <a:off x="7050024" y="4841748"/>
-            <a:ext cx="1932469" cy="143764"/>
-          </a:xfrm>
-          <a:prstGeom prst="rect">
-            <a:avLst/>
-          </a:prstGeom>
-          <a:noFill/>
-          <a:ln>
-            <a:noFill/>
-          </a:ln>
-        </p:spPr>
-      </p:pic>
-    </p:spTree>
-  </p:cSld>
-  <p:clrMapOvr>
-    <a:masterClrMapping/>
-  </p:clrMapOvr>
-</p:sldLayout>
-</file>
-
-<file path=ppt/slideLayouts/slideLayout21.xml><?xml version="1.0" encoding="utf-8"?>
-<p:sldLayout xmlns:a="http://schemas.openxmlformats.org/drawingml/2006/main" xmlns:r="http://schemas.openxmlformats.org/officeDocument/2006/relationships" xmlns:p="http://schemas.openxmlformats.org/presentationml/2006/main" matchingName="Section Header Coral">
-  <p:cSld name="Section Header Coral">
-    <p:bg>
-      <p:bgPr>
-        <a:solidFill>
-          <a:schemeClr val="accent4"/>
-        </a:solidFill>
-        <a:effectLst/>
-      </p:bgPr>
-    </p:bg>
-    <p:spTree>
-      <p:nvGrpSpPr>
-        <p:cNvPr id="1" name="Shape 116"/>
-        <p:cNvGrpSpPr/>
-        <p:nvPr/>
-      </p:nvGrpSpPr>
-      <p:grpSpPr>
-        <a:xfrm>
-          <a:off x="0" y="0"/>
-          <a:ext cx="0" cy="0"/>
-          <a:chOff x="0" y="0"/>
-          <a:chExt cx="0" cy="0"/>
-        </a:xfrm>
-      </p:grpSpPr>
-      <p:sp>
-        <p:nvSpPr>
-          <p:cNvPr id="117" name="Google Shape;117;p24"/>
-          <p:cNvSpPr/>
-          <p:nvPr/>
-        </p:nvSpPr>
-        <p:spPr>
-          <a:xfrm>
-            <a:off x="0" y="4218710"/>
-            <a:ext cx="9144000" cy="924900"/>
-          </a:xfrm>
-          <a:prstGeom prst="rect">
-            <a:avLst/>
-          </a:prstGeom>
-          <a:solidFill>
-            <a:schemeClr val="accent4"/>
-          </a:solidFill>
-          <a:ln>
-            <a:noFill/>
-          </a:ln>
-        </p:spPr>
-        <p:txBody>
-          <a:bodyPr spcFirstLastPara="1" wrap="square" lIns="68575" tIns="34275" rIns="68575" bIns="34275" anchor="ctr" anchorCtr="0">
-            <a:noAutofit/>
-          </a:bodyPr>
-          <a:lstStyle/>
-          <a:p>
-            <a:pPr marL="0" marR="0" lvl="0" indent="0" algn="ctr" rtl="0">
-              <a:spcBef>
-                <a:spcPts val="0"/>
-              </a:spcBef>
-              <a:spcAft>
-                <a:spcPts val="0"/>
-              </a:spcAft>
-              <a:buNone/>
-            </a:pPr>
-            <a:endParaRPr sz="1000">
-              <a:solidFill>
-                <a:schemeClr val="lt1"/>
-              </a:solidFill>
-              <a:latin typeface="Calibri"/>
-              <a:ea typeface="Calibri"/>
-              <a:cs typeface="Calibri"/>
-              <a:sym typeface="Calibri"/>
-            </a:endParaRPr>
-          </a:p>
-        </p:txBody>
-      </p:sp>
-      <p:sp>
-        <p:nvSpPr>
-          <p:cNvPr id="118" name="Google Shape;118;p24"/>
-          <p:cNvSpPr txBox="1">
-            <a:spLocks noGrp="1"/>
-          </p:cNvSpPr>
-          <p:nvPr>
-            <p:ph type="title"/>
-          </p:nvPr>
-        </p:nvSpPr>
-        <p:spPr>
-          <a:xfrm>
-            <a:off x="623888" y="3070518"/>
-            <a:ext cx="7886700" cy="865800"/>
-          </a:xfrm>
-          <a:prstGeom prst="rect">
-            <a:avLst/>
-          </a:prstGeom>
-          <a:noFill/>
-          <a:ln>
-            <a:noFill/>
-          </a:ln>
-        </p:spPr>
-        <p:txBody>
-          <a:bodyPr spcFirstLastPara="1" wrap="square" lIns="68575" tIns="34275" rIns="68575" bIns="34275" anchor="b" anchorCtr="0">
-            <a:noAutofit/>
-          </a:bodyPr>
-          <a:lstStyle>
-            <a:lvl1pPr marR="0" lvl="0" algn="l" rtl="0">
-              <a:lnSpc>
-                <a:spcPct val="90000"/>
-              </a:lnSpc>
-              <a:spcBef>
-                <a:spcPts val="0"/>
-              </a:spcBef>
-              <a:spcAft>
-                <a:spcPts val="0"/>
-              </a:spcAft>
-              <a:buClr>
-                <a:schemeClr val="lt1"/>
-              </a:buClr>
-              <a:buSzPts val="2700"/>
-              <a:buFont typeface="Century Gothic"/>
-              <a:buNone/>
-              <a:defRPr sz="2700" b="1" i="0" u="none" strike="noStrike" cap="none">
-                <a:solidFill>
-                  <a:schemeClr val="lt1"/>
-                </a:solidFill>
-                <a:latin typeface="Century Gothic"/>
-                <a:ea typeface="Century Gothic"/>
-                <a:cs typeface="Century Gothic"/>
-                <a:sym typeface="Century Gothic"/>
-              </a:defRPr>
-            </a:lvl1pPr>
-            <a:lvl2pPr lvl="1" rtl="0">
-              <a:spcBef>
-                <a:spcPts val="0"/>
-              </a:spcBef>
-              <a:spcAft>
-                <a:spcPts val="0"/>
-              </a:spcAft>
-              <a:buSzPts val="1100"/>
-              <a:buNone/>
-              <a:defRPr sz="1400"/>
-            </a:lvl2pPr>
-            <a:lvl3pPr lvl="2" rtl="0">
-              <a:spcBef>
-                <a:spcPts val="0"/>
-              </a:spcBef>
-              <a:spcAft>
-                <a:spcPts val="0"/>
-              </a:spcAft>
-              <a:buSzPts val="1100"/>
-              <a:buNone/>
-              <a:defRPr sz="1400"/>
-            </a:lvl3pPr>
-            <a:lvl4pPr lvl="3" rtl="0">
-              <a:spcBef>
-                <a:spcPts val="0"/>
-              </a:spcBef>
-              <a:spcAft>
-                <a:spcPts val="0"/>
-              </a:spcAft>
-              <a:buSzPts val="1100"/>
-              <a:buNone/>
-              <a:defRPr sz="1400"/>
-            </a:lvl4pPr>
-            <a:lvl5pPr lvl="4" rtl="0">
-              <a:spcBef>
-                <a:spcPts val="0"/>
-              </a:spcBef>
-              <a:spcAft>
-                <a:spcPts val="0"/>
-              </a:spcAft>
-              <a:buSzPts val="1100"/>
-              <a:buNone/>
-              <a:defRPr sz="1400"/>
-            </a:lvl5pPr>
-            <a:lvl6pPr lvl="5" rtl="0">
-              <a:spcBef>
-                <a:spcPts val="0"/>
-              </a:spcBef>
-              <a:spcAft>
-                <a:spcPts val="0"/>
-              </a:spcAft>
-              <a:buSzPts val="1100"/>
-              <a:buNone/>
-              <a:defRPr sz="1400"/>
-            </a:lvl6pPr>
-            <a:lvl7pPr lvl="6" rtl="0">
-              <a:spcBef>
-                <a:spcPts val="0"/>
-              </a:spcBef>
-              <a:spcAft>
-                <a:spcPts val="0"/>
-              </a:spcAft>
-              <a:buSzPts val="1100"/>
-              <a:buNone/>
-              <a:defRPr sz="1400"/>
-            </a:lvl7pPr>
-            <a:lvl8pPr lvl="7" rtl="0">
-              <a:spcBef>
-                <a:spcPts val="0"/>
-              </a:spcBef>
-              <a:spcAft>
-                <a:spcPts val="0"/>
-              </a:spcAft>
-              <a:buSzPts val="1100"/>
-              <a:buNone/>
-              <a:defRPr sz="1400"/>
-            </a:lvl8pPr>
-            <a:lvl9pPr lvl="8" rtl="0">
-              <a:spcBef>
-                <a:spcPts val="0"/>
-              </a:spcBef>
-              <a:spcAft>
-                <a:spcPts val="0"/>
-              </a:spcAft>
-              <a:buSzPts val="1100"/>
-              <a:buNone/>
-              <a:defRPr sz="1400"/>
-            </a:lvl9pPr>
-          </a:lstStyle>
-          <a:p>
-            <a:endParaRPr/>
-          </a:p>
-        </p:txBody>
-      </p:sp>
-      <p:sp>
-        <p:nvSpPr>
-          <p:cNvPr id="119" name="Google Shape;119;p24"/>
-          <p:cNvSpPr txBox="1">
-            <a:spLocks noGrp="1"/>
-          </p:cNvSpPr>
-          <p:nvPr>
-            <p:ph type="subTitle" idx="1"/>
-          </p:nvPr>
-        </p:nvSpPr>
-        <p:spPr>
-          <a:xfrm>
-            <a:off x="653175" y="3900000"/>
-            <a:ext cx="4675800" cy="430200"/>
-          </a:xfrm>
-          <a:prstGeom prst="rect">
-            <a:avLst/>
-          </a:prstGeom>
-          <a:noFill/>
-          <a:ln>
-            <a:noFill/>
-          </a:ln>
-        </p:spPr>
-        <p:txBody>
-          <a:bodyPr spcFirstLastPara="1" wrap="square" lIns="91425" tIns="91425" rIns="91425" bIns="91425" anchor="t" anchorCtr="0">
-            <a:noAutofit/>
-          </a:bodyPr>
-          <a:lstStyle>
-            <a:lvl1pPr lvl="0" rtl="0">
-              <a:spcBef>
-                <a:spcPts val="0"/>
-              </a:spcBef>
-              <a:spcAft>
-                <a:spcPts val="0"/>
-              </a:spcAft>
-              <a:buNone/>
-              <a:defRPr sz="1900">
-                <a:solidFill>
-                  <a:srgbClr val="FFFFFF"/>
-                </a:solidFill>
-                <a:latin typeface="Century Gothic"/>
-                <a:ea typeface="Century Gothic"/>
-                <a:cs typeface="Century Gothic"/>
-                <a:sym typeface="Century Gothic"/>
-              </a:defRPr>
-            </a:lvl1pPr>
-            <a:lvl2pPr lvl="1" rtl="0">
-              <a:spcBef>
-                <a:spcPts val="0"/>
-              </a:spcBef>
-              <a:spcAft>
-                <a:spcPts val="0"/>
-              </a:spcAft>
-              <a:buNone/>
-              <a:defRPr/>
-            </a:lvl2pPr>
-            <a:lvl3pPr lvl="2" rtl="0">
-              <a:spcBef>
-                <a:spcPts val="0"/>
-              </a:spcBef>
-              <a:spcAft>
-                <a:spcPts val="0"/>
-              </a:spcAft>
-              <a:buNone/>
-              <a:defRPr/>
-            </a:lvl3pPr>
-            <a:lvl4pPr lvl="3" rtl="0">
-              <a:spcBef>
-                <a:spcPts val="0"/>
-              </a:spcBef>
-              <a:spcAft>
-                <a:spcPts val="0"/>
-              </a:spcAft>
-              <a:buNone/>
-              <a:defRPr/>
-            </a:lvl4pPr>
-            <a:lvl5pPr lvl="4" rtl="0">
-              <a:spcBef>
-                <a:spcPts val="0"/>
-              </a:spcBef>
-              <a:spcAft>
-                <a:spcPts val="0"/>
-              </a:spcAft>
-              <a:buNone/>
-              <a:defRPr/>
-            </a:lvl5pPr>
-            <a:lvl6pPr lvl="5" rtl="0">
-              <a:spcBef>
-                <a:spcPts val="0"/>
-              </a:spcBef>
-              <a:spcAft>
-                <a:spcPts val="0"/>
-              </a:spcAft>
-              <a:buNone/>
-              <a:defRPr/>
-            </a:lvl6pPr>
-            <a:lvl7pPr lvl="6" rtl="0">
-              <a:spcBef>
-                <a:spcPts val="0"/>
-              </a:spcBef>
-              <a:spcAft>
-                <a:spcPts val="0"/>
-              </a:spcAft>
-              <a:buNone/>
-              <a:defRPr/>
-            </a:lvl7pPr>
-            <a:lvl8pPr lvl="7" rtl="0">
-              <a:spcBef>
-                <a:spcPts val="0"/>
-              </a:spcBef>
-              <a:spcAft>
-                <a:spcPts val="0"/>
-              </a:spcAft>
-              <a:buNone/>
-              <a:defRPr/>
-            </a:lvl8pPr>
-            <a:lvl9pPr lvl="8" rtl="0">
-              <a:spcBef>
-                <a:spcPts val="0"/>
-              </a:spcBef>
-              <a:spcAft>
-                <a:spcPts val="0"/>
-              </a:spcAft>
-              <a:buNone/>
-              <a:defRPr/>
-            </a:lvl9pPr>
-          </a:lstStyle>
-          <a:p>
-            <a:endParaRPr/>
-          </a:p>
-        </p:txBody>
-      </p:sp>
-      <p:pic>
-        <p:nvPicPr>
-          <p:cNvPr id="120" name="Google Shape;120;p24"/>
-          <p:cNvPicPr preferRelativeResize="0"/>
-          <p:nvPr/>
-        </p:nvPicPr>
-        <p:blipFill>
-          <a:blip r:embed="rId2">
-            <a:alphaModFix/>
-          </a:blip>
-          <a:stretch>
-            <a:fillRect/>
-          </a:stretch>
-        </p:blipFill>
-        <p:spPr>
-          <a:xfrm>
-            <a:off x="8289600" y="160446"/>
-            <a:ext cx="631175" cy="1414154"/>
-          </a:xfrm>
-          <a:prstGeom prst="rect">
-            <a:avLst/>
-          </a:prstGeom>
-          <a:noFill/>
-          <a:ln>
-            <a:noFill/>
-          </a:ln>
-        </p:spPr>
-      </p:pic>
-      <p:pic>
-        <p:nvPicPr>
-          <p:cNvPr id="121" name="Google Shape;121;p24"/>
-          <p:cNvPicPr preferRelativeResize="0"/>
-          <p:nvPr/>
-        </p:nvPicPr>
-        <p:blipFill rotWithShape="1">
-          <a:blip r:embed="rId3">
-            <a:alphaModFix/>
-          </a:blip>
-          <a:srcRect/>
-          <a:stretch/>
-        </p:blipFill>
-        <p:spPr>
-          <a:xfrm>
-            <a:off x="7050024" y="4841748"/>
-            <a:ext cx="1932469" cy="143764"/>
-          </a:xfrm>
-          <a:prstGeom prst="rect">
-            <a:avLst/>
-          </a:prstGeom>
-          <a:noFill/>
-          <a:ln>
-            <a:noFill/>
-          </a:ln>
-        </p:spPr>
-      </p:pic>
-    </p:spTree>
-  </p:cSld>
-  <p:clrMapOvr>
-    <a:masterClrMapping/>
-  </p:clrMapOvr>
-</p:sldLayout>
-</file>
-
-<file path=ppt/slideLayouts/slideLayout22.xml><?xml version="1.0" encoding="utf-8"?>
 <p:sldLayout xmlns:a="http://schemas.openxmlformats.org/drawingml/2006/main" xmlns:r="http://schemas.openxmlformats.org/officeDocument/2006/relationships" xmlns:p="http://schemas.openxmlformats.org/presentationml/2006/main" matchingName="Section Header Gold">
   <p:cSld name="Section Header Gold">
     <p:bg>
@@ -10555,7 +9940,7 @@
 </p:sldLayout>
 </file>
 
-<file path=ppt/slideLayouts/slideLayout23.xml><?xml version="1.0" encoding="utf-8"?>
+<file path=ppt/slideLayouts/slideLayout21.xml><?xml version="1.0" encoding="utf-8"?>
 <p:sldLayout xmlns:a="http://schemas.openxmlformats.org/drawingml/2006/main" xmlns:r="http://schemas.openxmlformats.org/officeDocument/2006/relationships" xmlns:p="http://schemas.openxmlformats.org/presentationml/2006/main" matchingName="Section Header Aqua 1">
   <p:cSld name="Section Header Aqua_1">
     <p:bg>
@@ -13814,7 +13199,6 @@
     <p:sldLayoutId id="2147483655" r:id="rId7"/>
     <p:sldLayoutId id="2147483656" r:id="rId8"/>
     <p:sldLayoutId id="2147483657" r:id="rId9"/>
-    <p:sldLayoutId id="2147483674" r:id="rId10"/>
   </p:sldLayoutIdLst>
   <p:hf hdr="0" ftr="0" dt="0"/>
   <p:txStyles>
@@ -14689,7 +14073,7 @@
           <p:nvPr/>
         </p:nvPicPr>
         <p:blipFill>
-          <a:blip r:embed="rId15">
+          <a:blip r:embed="rId14">
             <a:alphaModFix/>
           </a:blip>
           <a:stretch>
@@ -14715,18 +14099,17 @@
   <p:clrMap bg1="lt1" tx1="dk1" bg2="dk2" tx2="lt2" accent1="accent1" accent2="accent2" accent3="accent3" accent4="accent4" accent5="accent5" accent6="accent6" hlink="hlink" folHlink="folHlink"/>
   <p:sldLayoutIdLst>
     <p:sldLayoutId id="2147483659" r:id="rId1"/>
-    <p:sldLayoutId id="2147483660" r:id="rId2"/>
-    <p:sldLayoutId id="2147483661" r:id="rId3"/>
-    <p:sldLayoutId id="2147483662" r:id="rId4"/>
-    <p:sldLayoutId id="2147483663" r:id="rId5"/>
-    <p:sldLayoutId id="2147483664" r:id="rId6"/>
-    <p:sldLayoutId id="2147483665" r:id="rId7"/>
-    <p:sldLayoutId id="2147483666" r:id="rId8"/>
-    <p:sldLayoutId id="2147483667" r:id="rId9"/>
-    <p:sldLayoutId id="2147483668" r:id="rId10"/>
-    <p:sldLayoutId id="2147483669" r:id="rId11"/>
-    <p:sldLayoutId id="2147483670" r:id="rId12"/>
-    <p:sldLayoutId id="2147483671" r:id="rId13"/>
+    <p:sldLayoutId id="2147483661" r:id="rId2"/>
+    <p:sldLayoutId id="2147483662" r:id="rId3"/>
+    <p:sldLayoutId id="2147483663" r:id="rId4"/>
+    <p:sldLayoutId id="2147483664" r:id="rId5"/>
+    <p:sldLayoutId id="2147483665" r:id="rId6"/>
+    <p:sldLayoutId id="2147483666" r:id="rId7"/>
+    <p:sldLayoutId id="2147483667" r:id="rId8"/>
+    <p:sldLayoutId id="2147483668" r:id="rId9"/>
+    <p:sldLayoutId id="2147483669" r:id="rId10"/>
+    <p:sldLayoutId id="2147483670" r:id="rId11"/>
+    <p:sldLayoutId id="2147483671" r:id="rId12"/>
   </p:sldLayoutIdLst>
   <p:hf hdr="0" ftr="0" dt="0"/>
   <p:txStyles>
@@ -15426,1192 +14809,6 @@
   <p:cSld>
     <p:spTree>
       <p:nvGrpSpPr>
-        <p:cNvPr id="1" name="">
-          <a:extLst>
-            <a:ext uri="{FF2B5EF4-FFF2-40B4-BE49-F238E27FC236}">
-              <a16:creationId xmlns:a16="http://schemas.microsoft.com/office/drawing/2014/main" id="{AC5509D1-F4F3-3EE5-BEDB-D88422B14743}"/>
-            </a:ext>
-          </a:extLst>
-        </p:cNvPr>
-        <p:cNvGrpSpPr/>
-        <p:nvPr/>
-      </p:nvGrpSpPr>
-      <p:grpSpPr>
-        <a:xfrm>
-          <a:off x="0" y="0"/>
-          <a:ext cx="0" cy="0"/>
-          <a:chOff x="0" y="0"/>
-          <a:chExt cx="0" cy="0"/>
-        </a:xfrm>
-      </p:grpSpPr>
-      <p:sp>
-        <p:nvSpPr>
-          <p:cNvPr id="2" name="Title 1">
-            <a:extLst>
-              <a:ext uri="{FF2B5EF4-FFF2-40B4-BE49-F238E27FC236}">
-                <a16:creationId xmlns:a16="http://schemas.microsoft.com/office/drawing/2014/main" id="{083FC874-D072-F6CC-D993-D8CCE9388350}"/>
-              </a:ext>
-            </a:extLst>
-          </p:cNvPr>
-          <p:cNvSpPr>
-            <a:spLocks noGrp="1"/>
-          </p:cNvSpPr>
-          <p:nvPr>
-            <p:ph type="title"/>
-          </p:nvPr>
-        </p:nvSpPr>
-        <p:spPr/>
-        <p:txBody>
-          <a:bodyPr/>
-          <a:lstStyle/>
-          <a:p>
-            <a:r>
-              <a:rPr lang="en-US" dirty="0"/>
-              <a:t>What is the primary key?</a:t>
-            </a:r>
-          </a:p>
-        </p:txBody>
-      </p:sp>
-      <p:sp>
-        <p:nvSpPr>
-          <p:cNvPr id="3" name="Text Placeholder 2">
-            <a:extLst>
-              <a:ext uri="{FF2B5EF4-FFF2-40B4-BE49-F238E27FC236}">
-                <a16:creationId xmlns:a16="http://schemas.microsoft.com/office/drawing/2014/main" id="{CAA99298-63BF-1B96-E1ED-10FDE7E35B82}"/>
-              </a:ext>
-            </a:extLst>
-          </p:cNvPr>
-          <p:cNvSpPr>
-            <a:spLocks noGrp="1"/>
-          </p:cNvSpPr>
-          <p:nvPr>
-            <p:ph type="body" idx="1"/>
-          </p:nvPr>
-        </p:nvSpPr>
-        <p:spPr/>
-        <p:txBody>
-          <a:bodyPr/>
-          <a:lstStyle/>
-          <a:p>
-            <a:r>
-              <a:rPr lang="en-US" dirty="0"/>
-              <a:t>(</a:t>
-            </a:r>
-            <a:r>
-              <a:rPr lang="en-US" dirty="0" err="1"/>
-              <a:t>student_id</a:t>
-            </a:r>
-            <a:r>
-              <a:rPr lang="en-US" dirty="0"/>
-              <a:t>, </a:t>
-            </a:r>
-            <a:r>
-              <a:rPr lang="en-US" dirty="0" err="1"/>
-              <a:t>wand_id</a:t>
-            </a:r>
-            <a:r>
-              <a:rPr lang="en-US" dirty="0"/>
-              <a:t>)</a:t>
-            </a:r>
-          </a:p>
-          <a:p>
-            <a:r>
-              <a:rPr lang="en-US" dirty="0">
-                <a:latin typeface="Avenir Book" panose="02000503020000020003" pitchFamily="2" charset="0"/>
-              </a:rPr>
-              <a:t>(</a:t>
-            </a:r>
-            <a:r>
-              <a:rPr lang="en-US" dirty="0" err="1">
-                <a:latin typeface="Avenir Book" panose="02000503020000020003" pitchFamily="2" charset="0"/>
-              </a:rPr>
-              <a:t>st</a:t>
-            </a:r>
-            <a:r>
-              <a:rPr lang="en-US" dirty="0" err="1"/>
-              <a:t>udent_id</a:t>
-            </a:r>
-            <a:r>
-              <a:rPr lang="en-US" dirty="0"/>
-              <a:t>, </a:t>
-            </a:r>
-            <a:r>
-              <a:rPr lang="en-US" dirty="0" err="1"/>
-              <a:t>wand_id</a:t>
-            </a:r>
-            <a:r>
-              <a:rPr lang="en-US" dirty="0"/>
-              <a:t>, </a:t>
-            </a:r>
-            <a:r>
-              <a:rPr lang="en-US" dirty="0" err="1"/>
-              <a:t>begin_date</a:t>
-            </a:r>
-            <a:r>
-              <a:rPr lang="en-US" dirty="0"/>
-              <a:t>, </a:t>
-            </a:r>
-            <a:r>
-              <a:rPr lang="en-US" dirty="0" err="1"/>
-              <a:t>end_date</a:t>
-            </a:r>
-            <a:r>
-              <a:rPr lang="en-US" dirty="0"/>
-              <a:t>)</a:t>
-            </a:r>
-          </a:p>
-          <a:p>
-            <a:r>
-              <a:rPr lang="en-US" dirty="0">
-                <a:latin typeface="Avenir Book" panose="02000503020000020003" pitchFamily="2" charset="0"/>
-              </a:rPr>
-              <a:t>There isn’t on</a:t>
-            </a:r>
-            <a:r>
-              <a:rPr lang="en-US" dirty="0"/>
-              <a:t>e</a:t>
-            </a:r>
-            <a:endParaRPr lang="en-US" dirty="0">
-              <a:latin typeface="Avenir Book" panose="02000503020000020003" pitchFamily="2" charset="0"/>
-            </a:endParaRPr>
-          </a:p>
-          <a:p>
-            <a:pPr lvl="1"/>
-            <a:endParaRPr lang="en-US" dirty="0">
-              <a:latin typeface="Avenir Book" panose="02000503020000020003" pitchFamily="2" charset="0"/>
-            </a:endParaRPr>
-          </a:p>
-        </p:txBody>
-      </p:sp>
-      <p:sp>
-        <p:nvSpPr>
-          <p:cNvPr id="4" name="Slide Number Placeholder 3">
-            <a:extLst>
-              <a:ext uri="{FF2B5EF4-FFF2-40B4-BE49-F238E27FC236}">
-                <a16:creationId xmlns:a16="http://schemas.microsoft.com/office/drawing/2014/main" id="{7F00B7B2-96CD-5903-CE85-7DF4C2807B0F}"/>
-              </a:ext>
-            </a:extLst>
-          </p:cNvPr>
-          <p:cNvSpPr>
-            <a:spLocks noGrp="1"/>
-          </p:cNvSpPr>
-          <p:nvPr>
-            <p:ph type="sldNum" idx="12"/>
-          </p:nvPr>
-        </p:nvSpPr>
-        <p:spPr/>
-        <p:txBody>
-          <a:bodyPr/>
-          <a:lstStyle/>
-          <a:p>
-            <a:pPr marL="0" lvl="0" indent="0" algn="r" rtl="0">
-              <a:spcBef>
-                <a:spcPts val="0"/>
-              </a:spcBef>
-              <a:spcAft>
-                <a:spcPts val="0"/>
-              </a:spcAft>
-              <a:buNone/>
-            </a:pPr>
-            <a:fld id="{00000000-1234-1234-1234-123412341234}" type="slidenum">
-              <a:rPr lang="en" smtClean="0"/>
-              <a:t>1</a:t>
-            </a:fld>
-            <a:endParaRPr lang="en" dirty="0"/>
-          </a:p>
-        </p:txBody>
-      </p:sp>
-      <p:graphicFrame>
-        <p:nvGraphicFramePr>
-          <p:cNvPr id="6" name="Table 5">
-            <a:extLst>
-              <a:ext uri="{FF2B5EF4-FFF2-40B4-BE49-F238E27FC236}">
-                <a16:creationId xmlns:a16="http://schemas.microsoft.com/office/drawing/2014/main" id="{434EDD36-0865-52BF-3C7C-6C41235EB9FB}"/>
-              </a:ext>
-            </a:extLst>
-          </p:cNvPr>
-          <p:cNvGraphicFramePr>
-            <a:graphicFrameLocks noGrp="1"/>
-          </p:cNvGraphicFramePr>
-          <p:nvPr>
-            <p:extLst>
-              <p:ext uri="{D42A27DB-BD31-4B8C-83A1-F6EECF244321}">
-                <p14:modId xmlns:p14="http://schemas.microsoft.com/office/powerpoint/2010/main" val="3135815801"/>
-              </p:ext>
-            </p:extLst>
-          </p:nvPr>
-        </p:nvGraphicFramePr>
-        <p:xfrm>
-          <a:off x="4748170" y="2237354"/>
-          <a:ext cx="2894202" cy="2192035"/>
-        </p:xfrm>
-        <a:graphic>
-          <a:graphicData uri="http://schemas.openxmlformats.org/drawingml/2006/table">
-            <a:tbl>
-              <a:tblPr firstRow="1" bandRow="1">
-                <a:tableStyleId>{5C22544A-7EE6-4342-B048-85BDC9FD1C3A}</a:tableStyleId>
-              </a:tblPr>
-              <a:tblGrid>
-                <a:gridCol w="1447101">
-                  <a:extLst>
-                    <a:ext uri="{9D8B030D-6E8A-4147-A177-3AD203B41FA5}">
-                      <a16:colId xmlns:a16="http://schemas.microsoft.com/office/drawing/2014/main" val="3496730573"/>
-                    </a:ext>
-                  </a:extLst>
-                </a:gridCol>
-                <a:gridCol w="1447101">
-                  <a:extLst>
-                    <a:ext uri="{9D8B030D-6E8A-4147-A177-3AD203B41FA5}">
-                      <a16:colId xmlns:a16="http://schemas.microsoft.com/office/drawing/2014/main" val="3590654764"/>
-                    </a:ext>
-                  </a:extLst>
-                </a:gridCol>
-              </a:tblGrid>
-              <a:tr h="438407">
-                <a:tc gridSpan="2">
-                  <a:txBody>
-                    <a:bodyPr/>
-                    <a:lstStyle/>
-                    <a:p>
-                      <a:pPr algn="ctr"/>
-                      <a:r>
-                        <a:rPr lang="en-US" dirty="0" err="1"/>
-                        <a:t>wand_ownership</a:t>
-                      </a:r>
-                      <a:endParaRPr lang="en-US" dirty="0"/>
-                    </a:p>
-                  </a:txBody>
-                  <a:tcPr/>
-                </a:tc>
-                <a:tc hMerge="1">
-                  <a:txBody>
-                    <a:bodyPr/>
-                    <a:lstStyle/>
-                    <a:p>
-                      <a:endParaRPr lang="en-US" dirty="0"/>
-                    </a:p>
-                  </a:txBody>
-                  <a:tcPr/>
-                </a:tc>
-                <a:extLst>
-                  <a:ext uri="{0D108BD9-81ED-4DB2-BD59-A6C34878D82A}">
-                    <a16:rowId xmlns:a16="http://schemas.microsoft.com/office/drawing/2014/main" val="693708830"/>
-                  </a:ext>
-                </a:extLst>
-              </a:tr>
-              <a:tr h="438407">
-                <a:tc>
-                  <a:txBody>
-                    <a:bodyPr/>
-                    <a:lstStyle/>
-                    <a:p>
-                      <a:r>
-                        <a:rPr lang="en-US" dirty="0" err="1"/>
-                        <a:t>student_id</a:t>
-                      </a:r>
-                      <a:endParaRPr lang="en-US" dirty="0"/>
-                    </a:p>
-                  </a:txBody>
-                  <a:tcPr/>
-                </a:tc>
-                <a:tc>
-                  <a:txBody>
-                    <a:bodyPr/>
-                    <a:lstStyle/>
-                    <a:p>
-                      <a:r>
-                        <a:rPr lang="en-US" dirty="0"/>
-                        <a:t>integer FK</a:t>
-                      </a:r>
-                    </a:p>
-                  </a:txBody>
-                  <a:tcPr/>
-                </a:tc>
-                <a:extLst>
-                  <a:ext uri="{0D108BD9-81ED-4DB2-BD59-A6C34878D82A}">
-                    <a16:rowId xmlns:a16="http://schemas.microsoft.com/office/drawing/2014/main" val="3985099677"/>
-                  </a:ext>
-                </a:extLst>
-              </a:tr>
-              <a:tr h="438407">
-                <a:tc>
-                  <a:txBody>
-                    <a:bodyPr/>
-                    <a:lstStyle/>
-                    <a:p>
-                      <a:r>
-                        <a:rPr lang="en-US" dirty="0" err="1"/>
-                        <a:t>wand_id</a:t>
-                      </a:r>
-                      <a:endParaRPr lang="en-US" dirty="0"/>
-                    </a:p>
-                  </a:txBody>
-                  <a:tcPr/>
-                </a:tc>
-                <a:tc>
-                  <a:txBody>
-                    <a:bodyPr/>
-                    <a:lstStyle/>
-                    <a:p>
-                      <a:r>
-                        <a:rPr lang="en-US" dirty="0"/>
-                        <a:t>integer FK</a:t>
-                      </a:r>
-                    </a:p>
-                  </a:txBody>
-                  <a:tcPr/>
-                </a:tc>
-                <a:extLst>
-                  <a:ext uri="{0D108BD9-81ED-4DB2-BD59-A6C34878D82A}">
-                    <a16:rowId xmlns:a16="http://schemas.microsoft.com/office/drawing/2014/main" val="1504382681"/>
-                  </a:ext>
-                </a:extLst>
-              </a:tr>
-              <a:tr h="438407">
-                <a:tc>
-                  <a:txBody>
-                    <a:bodyPr/>
-                    <a:lstStyle/>
-                    <a:p>
-                      <a:r>
-                        <a:rPr lang="en-US" dirty="0" err="1"/>
-                        <a:t>begin_date</a:t>
-                      </a:r>
-                      <a:endParaRPr lang="en-US" dirty="0"/>
-                    </a:p>
-                  </a:txBody>
-                  <a:tcPr/>
-                </a:tc>
-                <a:tc>
-                  <a:txBody>
-                    <a:bodyPr/>
-                    <a:lstStyle/>
-                    <a:p>
-                      <a:r>
-                        <a:rPr lang="en-US" dirty="0"/>
-                        <a:t>date</a:t>
-                      </a:r>
-                    </a:p>
-                  </a:txBody>
-                  <a:tcPr/>
-                </a:tc>
-                <a:extLst>
-                  <a:ext uri="{0D108BD9-81ED-4DB2-BD59-A6C34878D82A}">
-                    <a16:rowId xmlns:a16="http://schemas.microsoft.com/office/drawing/2014/main" val="2810616037"/>
-                  </a:ext>
-                </a:extLst>
-              </a:tr>
-              <a:tr h="438407">
-                <a:tc>
-                  <a:txBody>
-                    <a:bodyPr/>
-                    <a:lstStyle/>
-                    <a:p>
-                      <a:r>
-                        <a:rPr lang="en-US" dirty="0" err="1"/>
-                        <a:t>end_date</a:t>
-                      </a:r>
-                      <a:endParaRPr lang="en-US" dirty="0"/>
-                    </a:p>
-                  </a:txBody>
-                  <a:tcPr/>
-                </a:tc>
-                <a:tc>
-                  <a:txBody>
-                    <a:bodyPr/>
-                    <a:lstStyle/>
-                    <a:p>
-                      <a:r>
-                        <a:rPr lang="en-US" dirty="0"/>
-                        <a:t>date</a:t>
-                      </a:r>
-                    </a:p>
-                  </a:txBody>
-                  <a:tcPr/>
-                </a:tc>
-                <a:extLst>
-                  <a:ext uri="{0D108BD9-81ED-4DB2-BD59-A6C34878D82A}">
-                    <a16:rowId xmlns:a16="http://schemas.microsoft.com/office/drawing/2014/main" val="2227801376"/>
-                  </a:ext>
-                </a:extLst>
-              </a:tr>
-            </a:tbl>
-          </a:graphicData>
-        </a:graphic>
-      </p:graphicFrame>
-    </p:spTree>
-    <p:extLst>
-      <p:ext uri="{BB962C8B-B14F-4D97-AF65-F5344CB8AC3E}">
-        <p14:creationId xmlns:p14="http://schemas.microsoft.com/office/powerpoint/2010/main" val="2719159997"/>
-      </p:ext>
-    </p:extLst>
-  </p:cSld>
-  <p:clrMapOvr>
-    <a:masterClrMapping/>
-  </p:clrMapOvr>
-</p:sld>
-</file>
-
-<file path=ppt/slides/slide10.xml><?xml version="1.0" encoding="utf-8"?>
-<p:sld xmlns:a="http://schemas.openxmlformats.org/drawingml/2006/main" xmlns:r="http://schemas.openxmlformats.org/officeDocument/2006/relationships" xmlns:p="http://schemas.openxmlformats.org/presentationml/2006/main">
-  <p:cSld>
-    <p:spTree>
-      <p:nvGrpSpPr>
-        <p:cNvPr id="1" name=""/>
-        <p:cNvGrpSpPr/>
-        <p:nvPr/>
-      </p:nvGrpSpPr>
-      <p:grpSpPr>
-        <a:xfrm>
-          <a:off x="0" y="0"/>
-          <a:ext cx="0" cy="0"/>
-          <a:chOff x="0" y="0"/>
-          <a:chExt cx="0" cy="0"/>
-        </a:xfrm>
-      </p:grpSpPr>
-      <p:sp>
-        <p:nvSpPr>
-          <p:cNvPr id="2" name="Title 1">
-            <a:extLst>
-              <a:ext uri="{FF2B5EF4-FFF2-40B4-BE49-F238E27FC236}">
-                <a16:creationId xmlns:a16="http://schemas.microsoft.com/office/drawing/2014/main" id="{888C0087-9E81-8473-117D-170BA1B20C82}"/>
-              </a:ext>
-            </a:extLst>
-          </p:cNvPr>
-          <p:cNvSpPr>
-            <a:spLocks noGrp="1"/>
-          </p:cNvSpPr>
-          <p:nvPr>
-            <p:ph type="title"/>
-          </p:nvPr>
-        </p:nvSpPr>
-        <p:spPr/>
-        <p:txBody>
-          <a:bodyPr>
-            <a:noAutofit/>
-          </a:bodyPr>
-          <a:lstStyle/>
-          <a:p>
-            <a:r>
-              <a:rPr lang="en-US" sz="3200" dirty="0">
-                <a:solidFill>
-                  <a:srgbClr val="004B83"/>
-                </a:solidFill>
-              </a:rPr>
-              <a:t>Roadmap</a:t>
-            </a:r>
-          </a:p>
-        </p:txBody>
-      </p:sp>
-      <p:sp>
-        <p:nvSpPr>
-          <p:cNvPr id="5" name="Text Placeholder 4">
-            <a:extLst>
-              <a:ext uri="{FF2B5EF4-FFF2-40B4-BE49-F238E27FC236}">
-                <a16:creationId xmlns:a16="http://schemas.microsoft.com/office/drawing/2014/main" id="{9DFFC402-F27F-3F34-0869-B308FBB37450}"/>
-              </a:ext>
-            </a:extLst>
-          </p:cNvPr>
-          <p:cNvSpPr>
-            <a:spLocks noGrp="1"/>
-          </p:cNvSpPr>
-          <p:nvPr>
-            <p:ph type="body" idx="1"/>
-          </p:nvPr>
-        </p:nvSpPr>
-        <p:spPr/>
-        <p:txBody>
-          <a:bodyPr>
-            <a:normAutofit fontScale="92500" lnSpcReduction="10000"/>
-          </a:bodyPr>
-          <a:lstStyle/>
-          <a:p>
-            <a:r>
-              <a:rPr lang="en-US" dirty="0">
-                <a:latin typeface="Avenir Book" panose="02000503020000020003" pitchFamily="2" charset="0"/>
-              </a:rPr>
-              <a:t>Today</a:t>
-            </a:r>
-          </a:p>
-          <a:p>
-            <a:pPr lvl="1"/>
-            <a:r>
-              <a:rPr lang="en-US" dirty="0">
-                <a:latin typeface="Avenir Book" panose="02000503020000020003" pitchFamily="2" charset="0"/>
-              </a:rPr>
-              <a:t>Running SQLite</a:t>
-            </a:r>
-          </a:p>
-          <a:p>
-            <a:pPr lvl="1"/>
-            <a:r>
-              <a:rPr lang="en-US" dirty="0">
-                <a:latin typeface="Avenir Book" panose="02000503020000020003" pitchFamily="2" charset="0"/>
-              </a:rPr>
-              <a:t>Getting help</a:t>
-            </a:r>
-          </a:p>
-          <a:p>
-            <a:pPr lvl="1"/>
-            <a:r>
-              <a:rPr lang="en-US" dirty="0">
-                <a:latin typeface="Avenir Book" panose="02000503020000020003" pitchFamily="2" charset="0"/>
-              </a:rPr>
-              <a:t>SQL syntax</a:t>
-            </a:r>
-          </a:p>
-          <a:p>
-            <a:pPr lvl="1"/>
-            <a:r>
-              <a:rPr lang="en-US" dirty="0">
-                <a:latin typeface="Avenir Book" panose="02000503020000020003" pitchFamily="2" charset="0"/>
-              </a:rPr>
-              <a:t>Queries, distinct, limits</a:t>
-            </a:r>
-          </a:p>
-          <a:p>
-            <a:pPr lvl="1"/>
-            <a:r>
-              <a:rPr lang="en-US" dirty="0">
-                <a:latin typeface="Avenir Book" panose="02000503020000020003" pitchFamily="2" charset="0"/>
-              </a:rPr>
-              <a:t>Ordering</a:t>
-            </a:r>
-          </a:p>
-          <a:p>
-            <a:pPr lvl="1"/>
-            <a:r>
-              <a:rPr lang="en-US" dirty="0">
-                <a:latin typeface="Avenir Book" panose="02000503020000020003" pitchFamily="2" charset="0"/>
-              </a:rPr>
-              <a:t>Filtering</a:t>
-            </a:r>
-          </a:p>
-          <a:p>
-            <a:pPr lvl="1"/>
-            <a:endParaRPr lang="en-US" dirty="0">
-              <a:latin typeface="Avenir Book" panose="02000503020000020003" pitchFamily="2" charset="0"/>
-            </a:endParaRPr>
-          </a:p>
-          <a:p>
-            <a:r>
-              <a:rPr lang="en-US" dirty="0">
-                <a:latin typeface="Avenir Book" panose="02000503020000020003" pitchFamily="2" charset="0"/>
-              </a:rPr>
-              <a:t>Thursday</a:t>
-            </a:r>
-          </a:p>
-          <a:p>
-            <a:pPr lvl="1"/>
-            <a:r>
-              <a:rPr lang="en-US" dirty="0">
-                <a:latin typeface="Avenir Book" panose="02000503020000020003" pitchFamily="2" charset="0"/>
-              </a:rPr>
-              <a:t>Expressions</a:t>
-            </a:r>
-          </a:p>
-          <a:p>
-            <a:pPr lvl="1"/>
-            <a:r>
-              <a:rPr lang="en-US" dirty="0">
-                <a:latin typeface="Avenir Book" panose="02000503020000020003" pitchFamily="2" charset="0"/>
-              </a:rPr>
-              <a:t>Set operations</a:t>
-            </a:r>
-          </a:p>
-          <a:p>
-            <a:pPr lvl="1"/>
-            <a:r>
-              <a:rPr lang="en-US" dirty="0">
-                <a:latin typeface="Avenir Book" panose="02000503020000020003" pitchFamily="2" charset="0"/>
-              </a:rPr>
-              <a:t>NULL processing</a:t>
-            </a:r>
-          </a:p>
-          <a:p>
-            <a:pPr lvl="1"/>
-            <a:r>
-              <a:rPr lang="en-US" dirty="0">
-                <a:latin typeface="Avenir Book" panose="02000503020000020003" pitchFamily="2" charset="0"/>
-              </a:rPr>
-              <a:t>Nesting, temporary tables</a:t>
-            </a:r>
-          </a:p>
-          <a:p>
-            <a:pPr lvl="1"/>
-            <a:r>
-              <a:rPr lang="en-US" dirty="0">
-                <a:latin typeface="Avenir Book" panose="02000503020000020003" pitchFamily="2" charset="0"/>
-              </a:rPr>
-              <a:t>Aggregate functions</a:t>
-            </a:r>
-          </a:p>
-          <a:p>
-            <a:pPr lvl="1"/>
-            <a:r>
-              <a:rPr lang="en-US" dirty="0">
-                <a:latin typeface="Avenir Book" panose="02000503020000020003" pitchFamily="2" charset="0"/>
-              </a:rPr>
-              <a:t>Grouping</a:t>
-            </a:r>
-          </a:p>
-          <a:p>
-            <a:pPr lvl="1"/>
-            <a:r>
-              <a:rPr lang="en-US" dirty="0">
-                <a:latin typeface="Avenir Book" panose="02000503020000020003" pitchFamily="2" charset="0"/>
-              </a:rPr>
-              <a:t>Joins: inner, outer, self</a:t>
-            </a:r>
-          </a:p>
-          <a:p>
-            <a:pPr lvl="1"/>
-            <a:r>
-              <a:rPr lang="en-US" dirty="0">
-                <a:latin typeface="Avenir Book" panose="02000503020000020003" pitchFamily="2" charset="0"/>
-              </a:rPr>
-              <a:t>Views</a:t>
-            </a:r>
-          </a:p>
-          <a:p>
-            <a:pPr lvl="1"/>
-            <a:endParaRPr lang="en-US" dirty="0">
-              <a:latin typeface="Avenir Book" panose="02000503020000020003" pitchFamily="2" charset="0"/>
-            </a:endParaRPr>
-          </a:p>
-        </p:txBody>
-      </p:sp>
-      <p:sp>
-        <p:nvSpPr>
-          <p:cNvPr id="6" name="Text Placeholder 5">
-            <a:extLst>
-              <a:ext uri="{FF2B5EF4-FFF2-40B4-BE49-F238E27FC236}">
-                <a16:creationId xmlns:a16="http://schemas.microsoft.com/office/drawing/2014/main" id="{ADE49C61-7758-10C7-D5A1-C33EC0C9F7BA}"/>
-              </a:ext>
-            </a:extLst>
-          </p:cNvPr>
-          <p:cNvSpPr>
-            <a:spLocks noGrp="1"/>
-          </p:cNvSpPr>
-          <p:nvPr>
-            <p:ph type="body" idx="2"/>
-          </p:nvPr>
-        </p:nvSpPr>
-        <p:spPr/>
-        <p:txBody>
-          <a:bodyPr>
-            <a:normAutofit/>
-          </a:bodyPr>
-          <a:lstStyle/>
-          <a:p>
-            <a:r>
-              <a:rPr lang="en-US" dirty="0">
-                <a:latin typeface="Avenir Book" panose="02000503020000020003" pitchFamily="2" charset="0"/>
-              </a:rPr>
-              <a:t>Week 4</a:t>
-            </a:r>
-          </a:p>
-          <a:p>
-            <a:pPr lvl="1"/>
-            <a:r>
-              <a:rPr lang="en-US" dirty="0">
-                <a:latin typeface="Avenir Book" panose="02000503020000020003" pitchFamily="2" charset="0"/>
-              </a:rPr>
-              <a:t>Data management statements</a:t>
-            </a:r>
-          </a:p>
-          <a:p>
-            <a:pPr lvl="1"/>
-            <a:r>
-              <a:rPr lang="en-US" dirty="0">
-                <a:latin typeface="Avenir Book" panose="02000503020000020003" pitchFamily="2" charset="0"/>
-              </a:rPr>
-              <a:t>Reading, writing data</a:t>
-            </a:r>
-          </a:p>
-          <a:p>
-            <a:pPr lvl="1"/>
-            <a:endParaRPr lang="en-US" dirty="0">
-              <a:latin typeface="Avenir Book" panose="02000503020000020003" pitchFamily="2" charset="0"/>
-            </a:endParaRPr>
-          </a:p>
-          <a:p>
-            <a:r>
-              <a:rPr lang="en-US" dirty="0">
-                <a:latin typeface="Avenir Book" panose="02000503020000020003" pitchFamily="2" charset="0"/>
-              </a:rPr>
-              <a:t>Week 5</a:t>
-            </a:r>
-          </a:p>
-          <a:p>
-            <a:pPr lvl="1"/>
-            <a:r>
-              <a:rPr lang="en-US" dirty="0">
-                <a:latin typeface="Avenir Book" panose="02000503020000020003" pitchFamily="2" charset="0"/>
-              </a:rPr>
-              <a:t>Triggers</a:t>
-            </a:r>
-          </a:p>
-          <a:p>
-            <a:pPr lvl="1"/>
-            <a:r>
-              <a:rPr lang="en-US" dirty="0">
-                <a:latin typeface="Avenir Book" panose="02000503020000020003" pitchFamily="2" charset="0"/>
-              </a:rPr>
-              <a:t>Concurrency, transactions</a:t>
-            </a:r>
-          </a:p>
-          <a:p>
-            <a:pPr lvl="1"/>
-            <a:r>
-              <a:rPr lang="en-US" dirty="0">
-                <a:latin typeface="Avenir Book" panose="02000503020000020003" pitchFamily="2" charset="0"/>
-              </a:rPr>
-              <a:t>Backups</a:t>
-            </a:r>
-          </a:p>
-          <a:p>
-            <a:pPr lvl="1"/>
-            <a:r>
-              <a:rPr lang="en-US" dirty="0">
-                <a:latin typeface="Avenir Book" panose="02000503020000020003" pitchFamily="2" charset="0"/>
-              </a:rPr>
-              <a:t>Indexes</a:t>
-            </a:r>
-          </a:p>
-          <a:p>
-            <a:pPr lvl="1"/>
-            <a:endParaRPr lang="en-US" dirty="0">
-              <a:latin typeface="Avenir Book" panose="02000503020000020003" pitchFamily="2" charset="0"/>
-            </a:endParaRPr>
-          </a:p>
-        </p:txBody>
-      </p:sp>
-      <p:sp>
-        <p:nvSpPr>
-          <p:cNvPr id="4" name="Slide Number Placeholder 3">
-            <a:extLst>
-              <a:ext uri="{FF2B5EF4-FFF2-40B4-BE49-F238E27FC236}">
-                <a16:creationId xmlns:a16="http://schemas.microsoft.com/office/drawing/2014/main" id="{0BAB0C3C-1CF2-22B2-6E5A-4E8041AE08F3}"/>
-              </a:ext>
-            </a:extLst>
-          </p:cNvPr>
-          <p:cNvSpPr>
-            <a:spLocks noGrp="1"/>
-          </p:cNvSpPr>
-          <p:nvPr>
-            <p:ph type="sldNum" idx="12"/>
-          </p:nvPr>
-        </p:nvSpPr>
-        <p:spPr/>
-        <p:txBody>
-          <a:bodyPr/>
-          <a:lstStyle/>
-          <a:p>
-            <a:pPr marL="0" lvl="0" indent="0" algn="r" rtl="0">
-              <a:spcBef>
-                <a:spcPts val="0"/>
-              </a:spcBef>
-              <a:spcAft>
-                <a:spcPts val="0"/>
-              </a:spcAft>
-              <a:buNone/>
-            </a:pPr>
-            <a:fld id="{00000000-1234-1234-1234-123412341234}" type="slidenum">
-              <a:rPr lang="en" smtClean="0"/>
-              <a:t>10</a:t>
-            </a:fld>
-            <a:endParaRPr lang="en" dirty="0"/>
-          </a:p>
-        </p:txBody>
-      </p:sp>
-    </p:spTree>
-    <p:extLst>
-      <p:ext uri="{BB962C8B-B14F-4D97-AF65-F5344CB8AC3E}">
-        <p14:creationId xmlns:p14="http://schemas.microsoft.com/office/powerpoint/2010/main" val="1345126142"/>
-      </p:ext>
-    </p:extLst>
-  </p:cSld>
-  <p:clrMapOvr>
-    <a:masterClrMapping/>
-  </p:clrMapOvr>
-</p:sld>
-</file>
-
-<file path=ppt/slides/slide2.xml><?xml version="1.0" encoding="utf-8"?>
-<p:sld xmlns:a="http://schemas.openxmlformats.org/drawingml/2006/main" xmlns:r="http://schemas.openxmlformats.org/officeDocument/2006/relationships" xmlns:p="http://schemas.openxmlformats.org/presentationml/2006/main">
-  <p:cSld>
-    <p:spTree>
-      <p:nvGrpSpPr>
-        <p:cNvPr id="1" name="">
-          <a:extLst>
-            <a:ext uri="{FF2B5EF4-FFF2-40B4-BE49-F238E27FC236}">
-              <a16:creationId xmlns:a16="http://schemas.microsoft.com/office/drawing/2014/main" id="{7865C796-DEEA-6AA6-8BCA-2CA021740EB2}"/>
-            </a:ext>
-          </a:extLst>
-        </p:cNvPr>
-        <p:cNvGrpSpPr/>
-        <p:nvPr/>
-      </p:nvGrpSpPr>
-      <p:grpSpPr>
-        <a:xfrm>
-          <a:off x="0" y="0"/>
-          <a:ext cx="0" cy="0"/>
-          <a:chOff x="0" y="0"/>
-          <a:chExt cx="0" cy="0"/>
-        </a:xfrm>
-      </p:grpSpPr>
-      <p:sp>
-        <p:nvSpPr>
-          <p:cNvPr id="2" name="Title 1">
-            <a:extLst>
-              <a:ext uri="{FF2B5EF4-FFF2-40B4-BE49-F238E27FC236}">
-                <a16:creationId xmlns:a16="http://schemas.microsoft.com/office/drawing/2014/main" id="{55E15880-FA24-58C4-AF9D-CF96C5612B29}"/>
-              </a:ext>
-            </a:extLst>
-          </p:cNvPr>
-          <p:cNvSpPr>
-            <a:spLocks noGrp="1"/>
-          </p:cNvSpPr>
-          <p:nvPr>
-            <p:ph type="title"/>
-          </p:nvPr>
-        </p:nvSpPr>
-        <p:spPr/>
-        <p:txBody>
-          <a:bodyPr/>
-          <a:lstStyle/>
-          <a:p>
-            <a:r>
-              <a:rPr lang="en-US" dirty="0"/>
-              <a:t>Good idea or not?</a:t>
-            </a:r>
-          </a:p>
-        </p:txBody>
-      </p:sp>
-      <p:sp>
-        <p:nvSpPr>
-          <p:cNvPr id="4" name="Slide Number Placeholder 3">
-            <a:extLst>
-              <a:ext uri="{FF2B5EF4-FFF2-40B4-BE49-F238E27FC236}">
-                <a16:creationId xmlns:a16="http://schemas.microsoft.com/office/drawing/2014/main" id="{50D84AFA-A2D5-9DF1-1CC7-4043A598639C}"/>
-              </a:ext>
-            </a:extLst>
-          </p:cNvPr>
-          <p:cNvSpPr>
-            <a:spLocks noGrp="1"/>
-          </p:cNvSpPr>
-          <p:nvPr>
-            <p:ph type="sldNum" idx="12"/>
-          </p:nvPr>
-        </p:nvSpPr>
-        <p:spPr/>
-        <p:txBody>
-          <a:bodyPr/>
-          <a:lstStyle/>
-          <a:p>
-            <a:pPr marL="0" lvl="0" indent="0" algn="r" rtl="0">
-              <a:spcBef>
-                <a:spcPts val="0"/>
-              </a:spcBef>
-              <a:spcAft>
-                <a:spcPts val="0"/>
-              </a:spcAft>
-              <a:buNone/>
-            </a:pPr>
-            <a:fld id="{00000000-1234-1234-1234-123412341234}" type="slidenum">
-              <a:rPr lang="en" smtClean="0"/>
-              <a:t>2</a:t>
-            </a:fld>
-            <a:endParaRPr lang="en" dirty="0"/>
-          </a:p>
-        </p:txBody>
-      </p:sp>
-      <p:graphicFrame>
-        <p:nvGraphicFramePr>
-          <p:cNvPr id="6" name="Table 5">
-            <a:extLst>
-              <a:ext uri="{FF2B5EF4-FFF2-40B4-BE49-F238E27FC236}">
-                <a16:creationId xmlns:a16="http://schemas.microsoft.com/office/drawing/2014/main" id="{6A46DF75-C4BD-91F6-6F64-175BF807C7AF}"/>
-              </a:ext>
-            </a:extLst>
-          </p:cNvPr>
-          <p:cNvGraphicFramePr>
-            <a:graphicFrameLocks noGrp="1"/>
-          </p:cNvGraphicFramePr>
-          <p:nvPr>
-            <p:extLst>
-              <p:ext uri="{D42A27DB-BD31-4B8C-83A1-F6EECF244321}">
-                <p14:modId xmlns:p14="http://schemas.microsoft.com/office/powerpoint/2010/main" val="3364154654"/>
-              </p:ext>
-            </p:extLst>
-          </p:nvPr>
-        </p:nvGraphicFramePr>
-        <p:xfrm>
-          <a:off x="3028427" y="1624957"/>
-          <a:ext cx="2894202" cy="2192035"/>
-        </p:xfrm>
-        <a:graphic>
-          <a:graphicData uri="http://schemas.openxmlformats.org/drawingml/2006/table">
-            <a:tbl>
-              <a:tblPr firstRow="1" bandRow="1">
-                <a:tableStyleId>{5C22544A-7EE6-4342-B048-85BDC9FD1C3A}</a:tableStyleId>
-              </a:tblPr>
-              <a:tblGrid>
-                <a:gridCol w="1447101">
-                  <a:extLst>
-                    <a:ext uri="{9D8B030D-6E8A-4147-A177-3AD203B41FA5}">
-                      <a16:colId xmlns:a16="http://schemas.microsoft.com/office/drawing/2014/main" val="3496730573"/>
-                    </a:ext>
-                  </a:extLst>
-                </a:gridCol>
-                <a:gridCol w="1447101">
-                  <a:extLst>
-                    <a:ext uri="{9D8B030D-6E8A-4147-A177-3AD203B41FA5}">
-                      <a16:colId xmlns:a16="http://schemas.microsoft.com/office/drawing/2014/main" val="3590654764"/>
-                    </a:ext>
-                  </a:extLst>
-                </a:gridCol>
-              </a:tblGrid>
-              <a:tr h="438407">
-                <a:tc gridSpan="2">
-                  <a:txBody>
-                    <a:bodyPr/>
-                    <a:lstStyle/>
-                    <a:p>
-                      <a:pPr algn="ctr"/>
-                      <a:r>
-                        <a:rPr lang="en-US" dirty="0"/>
-                        <a:t>house</a:t>
-                      </a:r>
-                    </a:p>
-                  </a:txBody>
-                  <a:tcPr/>
-                </a:tc>
-                <a:tc hMerge="1">
-                  <a:txBody>
-                    <a:bodyPr/>
-                    <a:lstStyle/>
-                    <a:p>
-                      <a:endParaRPr lang="en-US" dirty="0"/>
-                    </a:p>
-                  </a:txBody>
-                  <a:tcPr/>
-                </a:tc>
-                <a:extLst>
-                  <a:ext uri="{0D108BD9-81ED-4DB2-BD59-A6C34878D82A}">
-                    <a16:rowId xmlns:a16="http://schemas.microsoft.com/office/drawing/2014/main" val="693708830"/>
-                  </a:ext>
-                </a:extLst>
-              </a:tr>
-              <a:tr h="438407">
-                <a:tc>
-                  <a:txBody>
-                    <a:bodyPr/>
-                    <a:lstStyle/>
-                    <a:p>
-                      <a:r>
-                        <a:rPr lang="en-US" dirty="0" err="1"/>
-                        <a:t>house_id</a:t>
-                      </a:r>
-                      <a:endParaRPr lang="en-US" dirty="0"/>
-                    </a:p>
-                  </a:txBody>
-                  <a:tcPr/>
-                </a:tc>
-                <a:tc>
-                  <a:txBody>
-                    <a:bodyPr/>
-                    <a:lstStyle/>
-                    <a:p>
-                      <a:r>
-                        <a:rPr lang="en-US" dirty="0"/>
-                        <a:t>integer PK</a:t>
-                      </a:r>
-                    </a:p>
-                  </a:txBody>
-                  <a:tcPr/>
-                </a:tc>
-                <a:extLst>
-                  <a:ext uri="{0D108BD9-81ED-4DB2-BD59-A6C34878D82A}">
-                    <a16:rowId xmlns:a16="http://schemas.microsoft.com/office/drawing/2014/main" val="3985099677"/>
-                  </a:ext>
-                </a:extLst>
-              </a:tr>
-              <a:tr h="438407">
-                <a:tc>
-                  <a:txBody>
-                    <a:bodyPr/>
-                    <a:lstStyle/>
-                    <a:p>
-                      <a:r>
-                        <a:rPr lang="en-US" dirty="0"/>
-                        <a:t>name</a:t>
-                      </a:r>
-                    </a:p>
-                  </a:txBody>
-                  <a:tcPr/>
-                </a:tc>
-                <a:tc>
-                  <a:txBody>
-                    <a:bodyPr/>
-                    <a:lstStyle/>
-                    <a:p>
-                      <a:r>
-                        <a:rPr lang="en-US" dirty="0"/>
-                        <a:t>text</a:t>
-                      </a:r>
-                    </a:p>
-                  </a:txBody>
-                  <a:tcPr/>
-                </a:tc>
-                <a:extLst>
-                  <a:ext uri="{0D108BD9-81ED-4DB2-BD59-A6C34878D82A}">
-                    <a16:rowId xmlns:a16="http://schemas.microsoft.com/office/drawing/2014/main" val="1504382681"/>
-                  </a:ext>
-                </a:extLst>
-              </a:tr>
-              <a:tr h="438407">
-                <a:tc>
-                  <a:txBody>
-                    <a:bodyPr/>
-                    <a:lstStyle/>
-                    <a:p>
-                      <a:r>
-                        <a:rPr lang="en-US" dirty="0"/>
-                        <a:t>housemaster</a:t>
-                      </a:r>
-                    </a:p>
-                  </a:txBody>
-                  <a:tcPr/>
-                </a:tc>
-                <a:tc>
-                  <a:txBody>
-                    <a:bodyPr/>
-                    <a:lstStyle/>
-                    <a:p>
-                      <a:r>
-                        <a:rPr lang="en-US" dirty="0"/>
-                        <a:t>text</a:t>
-                      </a:r>
-                    </a:p>
-                  </a:txBody>
-                  <a:tcPr/>
-                </a:tc>
-                <a:extLst>
-                  <a:ext uri="{0D108BD9-81ED-4DB2-BD59-A6C34878D82A}">
-                    <a16:rowId xmlns:a16="http://schemas.microsoft.com/office/drawing/2014/main" val="2810616037"/>
-                  </a:ext>
-                </a:extLst>
-              </a:tr>
-              <a:tr h="438407">
-                <a:tc>
-                  <a:txBody>
-                    <a:bodyPr/>
-                    <a:lstStyle/>
-                    <a:p>
-                      <a:r>
-                        <a:rPr lang="en-US" dirty="0" err="1"/>
-                        <a:t>num_students</a:t>
-                      </a:r>
-                      <a:endParaRPr lang="en-US" dirty="0"/>
-                    </a:p>
-                  </a:txBody>
-                  <a:tcPr/>
-                </a:tc>
-                <a:tc>
-                  <a:txBody>
-                    <a:bodyPr/>
-                    <a:lstStyle/>
-                    <a:p>
-                      <a:r>
-                        <a:rPr lang="en-US" dirty="0"/>
-                        <a:t>integer</a:t>
-                      </a:r>
-                    </a:p>
-                  </a:txBody>
-                  <a:tcPr/>
-                </a:tc>
-                <a:extLst>
-                  <a:ext uri="{0D108BD9-81ED-4DB2-BD59-A6C34878D82A}">
-                    <a16:rowId xmlns:a16="http://schemas.microsoft.com/office/drawing/2014/main" val="2227801376"/>
-                  </a:ext>
-                </a:extLst>
-              </a:tr>
-            </a:tbl>
-          </a:graphicData>
-        </a:graphic>
-      </p:graphicFrame>
-      <p:sp>
-        <p:nvSpPr>
-          <p:cNvPr id="11" name="Right Arrow 10">
-            <a:extLst>
-              <a:ext uri="{FF2B5EF4-FFF2-40B4-BE49-F238E27FC236}">
-                <a16:creationId xmlns:a16="http://schemas.microsoft.com/office/drawing/2014/main" id="{16A2A594-B48E-2BE6-5824-5910FE93FC0A}"/>
-              </a:ext>
-            </a:extLst>
-          </p:cNvPr>
-          <p:cNvSpPr/>
-          <p:nvPr/>
-        </p:nvSpPr>
-        <p:spPr>
-          <a:xfrm>
-            <a:off x="2206304" y="3473042"/>
-            <a:ext cx="545284" cy="184558"/>
-          </a:xfrm>
-          <a:prstGeom prst="rightArrow">
-            <a:avLst/>
-          </a:prstGeom>
-          <a:solidFill>
-            <a:srgbClr val="C00000"/>
-          </a:solidFill>
-          <a:ln>
-            <a:noFill/>
-          </a:ln>
-        </p:spPr>
-        <p:style>
-          <a:lnRef idx="2">
-            <a:schemeClr val="accent1">
-              <a:shade val="15000"/>
-            </a:schemeClr>
-          </a:lnRef>
-          <a:fillRef idx="1">
-            <a:schemeClr val="accent1"/>
-          </a:fillRef>
-          <a:effectRef idx="0">
-            <a:schemeClr val="accent1"/>
-          </a:effectRef>
-          <a:fontRef idx="minor">
-            <a:schemeClr val="lt1"/>
-          </a:fontRef>
-        </p:style>
-        <p:txBody>
-          <a:bodyPr rtlCol="0" anchor="ctr"/>
-          <a:lstStyle/>
-          <a:p>
-            <a:pPr algn="ctr"/>
-            <a:endParaRPr lang="en-US"/>
-          </a:p>
-        </p:txBody>
-      </p:sp>
-    </p:spTree>
-    <p:extLst>
-      <p:ext uri="{BB962C8B-B14F-4D97-AF65-F5344CB8AC3E}">
-        <p14:creationId xmlns:p14="http://schemas.microsoft.com/office/powerpoint/2010/main" val="2365527945"/>
-      </p:ext>
-    </p:extLst>
-  </p:cSld>
-  <p:clrMapOvr>
-    <a:masterClrMapping/>
-  </p:clrMapOvr>
-</p:sld>
-</file>
-
-<file path=ppt/slides/slide3.xml><?xml version="1.0" encoding="utf-8"?>
-<p:sld xmlns:a="http://schemas.openxmlformats.org/drawingml/2006/main" xmlns:r="http://schemas.openxmlformats.org/officeDocument/2006/relationships" xmlns:p="http://schemas.openxmlformats.org/presentationml/2006/main">
-  <p:cSld>
-    <p:spTree>
-      <p:nvGrpSpPr>
         <p:cNvPr id="1" name="Shape 137"/>
         <p:cNvGrpSpPr/>
         <p:nvPr/>
@@ -17023,7 +15220,441 @@
 </p:sld>
 </file>
 
-<file path=ppt/slides/slide4.xml><?xml version="1.0" encoding="utf-8"?>
+<file path=ppt/slides/slide10.xml><?xml version="1.0" encoding="utf-8"?>
+<p:sld xmlns:a="http://schemas.openxmlformats.org/drawingml/2006/main" xmlns:r="http://schemas.openxmlformats.org/officeDocument/2006/relationships" xmlns:p="http://schemas.openxmlformats.org/presentationml/2006/main">
+  <p:cSld>
+    <p:spTree>
+      <p:nvGrpSpPr>
+        <p:cNvPr id="1" name="">
+          <a:extLst>
+            <a:ext uri="{FF2B5EF4-FFF2-40B4-BE49-F238E27FC236}">
+              <a16:creationId xmlns:a16="http://schemas.microsoft.com/office/drawing/2014/main" id="{3C056CBA-4D19-1ED3-0DBE-2C2331D1B443}"/>
+            </a:ext>
+          </a:extLst>
+        </p:cNvPr>
+        <p:cNvGrpSpPr/>
+        <p:nvPr/>
+      </p:nvGrpSpPr>
+      <p:grpSpPr>
+        <a:xfrm>
+          <a:off x="0" y="0"/>
+          <a:ext cx="0" cy="0"/>
+          <a:chOff x="0" y="0"/>
+          <a:chExt cx="0" cy="0"/>
+        </a:xfrm>
+      </p:grpSpPr>
+      <p:sp>
+        <p:nvSpPr>
+          <p:cNvPr id="2" name="Title 1">
+            <a:extLst>
+              <a:ext uri="{FF2B5EF4-FFF2-40B4-BE49-F238E27FC236}">
+                <a16:creationId xmlns:a16="http://schemas.microsoft.com/office/drawing/2014/main" id="{F2192144-7C4F-54D6-4552-4CF7AE9748EF}"/>
+              </a:ext>
+            </a:extLst>
+          </p:cNvPr>
+          <p:cNvSpPr>
+            <a:spLocks noGrp="1"/>
+          </p:cNvSpPr>
+          <p:nvPr>
+            <p:ph type="title"/>
+          </p:nvPr>
+        </p:nvSpPr>
+        <p:spPr/>
+        <p:txBody>
+          <a:bodyPr/>
+          <a:lstStyle/>
+          <a:p>
+            <a:r>
+              <a:rPr lang="en-US" dirty="0"/>
+              <a:t>SQL’s role and nature</a:t>
+            </a:r>
+          </a:p>
+        </p:txBody>
+      </p:sp>
+      <p:sp>
+        <p:nvSpPr>
+          <p:cNvPr id="3" name="Text Placeholder 2">
+            <a:extLst>
+              <a:ext uri="{FF2B5EF4-FFF2-40B4-BE49-F238E27FC236}">
+                <a16:creationId xmlns:a16="http://schemas.microsoft.com/office/drawing/2014/main" id="{2C0AB072-54E6-3833-63E9-4072D821BB15}"/>
+              </a:ext>
+            </a:extLst>
+          </p:cNvPr>
+          <p:cNvSpPr>
+            <a:spLocks noGrp="1"/>
+          </p:cNvSpPr>
+          <p:nvPr>
+            <p:ph type="body" idx="1"/>
+          </p:nvPr>
+        </p:nvSpPr>
+        <p:spPr/>
+        <p:txBody>
+          <a:bodyPr/>
+          <a:lstStyle/>
+          <a:p>
+            <a:r>
+              <a:rPr lang="en-US" dirty="0"/>
+              <a:t>Standardized language</a:t>
+            </a:r>
+          </a:p>
+          <a:p>
+            <a:pPr lvl="1"/>
+            <a:r>
+              <a:rPr lang="en-US" dirty="0">
+                <a:latin typeface="Avenir Book" panose="02000503020000020003" pitchFamily="2" charset="0"/>
+              </a:rPr>
+              <a:t>For doing </a:t>
+            </a:r>
+            <a:r>
+              <a:rPr lang="en-US" b="1" i="1" dirty="0">
+                <a:latin typeface="Avenir Book" panose="02000503020000020003" pitchFamily="2" charset="0"/>
+              </a:rPr>
+              <a:t>everything</a:t>
+            </a:r>
+            <a:r>
+              <a:rPr lang="en-US" dirty="0">
+                <a:latin typeface="Avenir Book" panose="02000503020000020003" pitchFamily="2" charset="0"/>
+              </a:rPr>
+              <a:t> (defining, accessing, managing data) in a RDBMS</a:t>
+            </a:r>
+          </a:p>
+          <a:p>
+            <a:pPr lvl="1"/>
+            <a:r>
+              <a:rPr lang="en-US" dirty="0">
+                <a:latin typeface="Avenir Book" panose="02000503020000020003" pitchFamily="2" charset="0"/>
+              </a:rPr>
+              <a:t>The </a:t>
+            </a:r>
+            <a:r>
+              <a:rPr lang="en-US" b="1" i="1" dirty="0">
+                <a:latin typeface="Avenir Book" panose="02000503020000020003" pitchFamily="2" charset="0"/>
+              </a:rPr>
+              <a:t>only</a:t>
+            </a:r>
+            <a:r>
+              <a:rPr lang="en-US" dirty="0">
+                <a:latin typeface="Avenir Book" panose="02000503020000020003" pitchFamily="2" charset="0"/>
+              </a:rPr>
+              <a:t> thing that is standardized</a:t>
+            </a:r>
+          </a:p>
+          <a:p>
+            <a:pPr lvl="2"/>
+            <a:r>
+              <a:rPr lang="en-US" dirty="0">
+                <a:latin typeface="Avenir Book" panose="02000503020000020003" pitchFamily="2" charset="0"/>
+              </a:rPr>
+              <a:t>Alas, variations in what is supported and how</a:t>
+            </a:r>
+          </a:p>
+          <a:p>
+            <a:pPr lvl="2"/>
+            <a:r>
+              <a:rPr lang="en-US" dirty="0">
+                <a:latin typeface="Avenir Book" panose="02000503020000020003" pitchFamily="2" charset="0"/>
+              </a:rPr>
+              <a:t>Lots of proprietary extensions: statements, functions, data types</a:t>
+            </a:r>
+          </a:p>
+          <a:p>
+            <a:pPr lvl="1"/>
+            <a:endParaRPr lang="en-US" dirty="0">
+              <a:latin typeface="Avenir Book" panose="02000503020000020003" pitchFamily="2" charset="0"/>
+            </a:endParaRPr>
+          </a:p>
+          <a:p>
+            <a:r>
+              <a:rPr lang="en-US" dirty="0"/>
+              <a:t>Also serves as the API</a:t>
+            </a:r>
+          </a:p>
+          <a:p>
+            <a:pPr lvl="1"/>
+            <a:r>
+              <a:rPr lang="en-US" dirty="0">
+                <a:latin typeface="Avenir Book" panose="02000503020000020003" pitchFamily="2" charset="0"/>
+              </a:rPr>
+              <a:t>Your code must create strings containing SQL statements</a:t>
+            </a:r>
+          </a:p>
+          <a:p>
+            <a:pPr lvl="1"/>
+            <a:endParaRPr lang="en-US" dirty="0">
+              <a:latin typeface="Avenir Book" panose="02000503020000020003" pitchFamily="2" charset="0"/>
+            </a:endParaRPr>
+          </a:p>
+          <a:p>
+            <a:r>
+              <a:rPr lang="en-US" dirty="0"/>
+              <a:t>Declarative language, not procedural</a:t>
+            </a:r>
+          </a:p>
+          <a:p>
+            <a:pPr lvl="1"/>
+            <a:r>
+              <a:rPr lang="en-US" dirty="0">
+                <a:latin typeface="Avenir Book" panose="02000503020000020003" pitchFamily="2" charset="0"/>
+              </a:rPr>
+              <a:t>Say what you want, not how to compute it</a:t>
+            </a:r>
+          </a:p>
+        </p:txBody>
+      </p:sp>
+      <p:sp>
+        <p:nvSpPr>
+          <p:cNvPr id="4" name="Slide Number Placeholder 3">
+            <a:extLst>
+              <a:ext uri="{FF2B5EF4-FFF2-40B4-BE49-F238E27FC236}">
+                <a16:creationId xmlns:a16="http://schemas.microsoft.com/office/drawing/2014/main" id="{5A1D226D-FFB1-5586-F6E3-D731F524B501}"/>
+              </a:ext>
+            </a:extLst>
+          </p:cNvPr>
+          <p:cNvSpPr>
+            <a:spLocks noGrp="1"/>
+          </p:cNvSpPr>
+          <p:nvPr>
+            <p:ph type="sldNum" idx="12"/>
+          </p:nvPr>
+        </p:nvSpPr>
+        <p:spPr/>
+        <p:txBody>
+          <a:bodyPr/>
+          <a:lstStyle/>
+          <a:p>
+            <a:pPr marL="0" lvl="0" indent="0" algn="r" rtl="0">
+              <a:spcBef>
+                <a:spcPts val="0"/>
+              </a:spcBef>
+              <a:spcAft>
+                <a:spcPts val="0"/>
+              </a:spcAft>
+              <a:buNone/>
+            </a:pPr>
+            <a:fld id="{00000000-1234-1234-1234-123412341234}" type="slidenum">
+              <a:rPr lang="en" smtClean="0"/>
+              <a:t>10</a:t>
+            </a:fld>
+            <a:endParaRPr lang="en" dirty="0"/>
+          </a:p>
+        </p:txBody>
+      </p:sp>
+    </p:spTree>
+    <p:extLst>
+      <p:ext uri="{BB962C8B-B14F-4D97-AF65-F5344CB8AC3E}">
+        <p14:creationId xmlns:p14="http://schemas.microsoft.com/office/powerpoint/2010/main" val="1677886639"/>
+      </p:ext>
+    </p:extLst>
+  </p:cSld>
+  <p:clrMapOvr>
+    <a:masterClrMapping/>
+  </p:clrMapOvr>
+</p:sld>
+</file>
+
+<file path=ppt/slides/slide11.xml><?xml version="1.0" encoding="utf-8"?>
+<p:sld xmlns:a="http://schemas.openxmlformats.org/drawingml/2006/main" xmlns:r="http://schemas.openxmlformats.org/officeDocument/2006/relationships" xmlns:p="http://schemas.openxmlformats.org/presentationml/2006/main">
+  <p:cSld>
+    <p:spTree>
+      <p:nvGrpSpPr>
+        <p:cNvPr id="1" name="">
+          <a:extLst>
+            <a:ext uri="{FF2B5EF4-FFF2-40B4-BE49-F238E27FC236}">
+              <a16:creationId xmlns:a16="http://schemas.microsoft.com/office/drawing/2014/main" id="{2E51BB22-84D2-7E8F-99B0-D91FC16DC0D9}"/>
+            </a:ext>
+          </a:extLst>
+        </p:cNvPr>
+        <p:cNvGrpSpPr/>
+        <p:nvPr/>
+      </p:nvGrpSpPr>
+      <p:grpSpPr>
+        <a:xfrm>
+          <a:off x="0" y="0"/>
+          <a:ext cx="0" cy="0"/>
+          <a:chOff x="0" y="0"/>
+          <a:chExt cx="0" cy="0"/>
+        </a:xfrm>
+      </p:grpSpPr>
+      <p:sp>
+        <p:nvSpPr>
+          <p:cNvPr id="2" name="Title 1">
+            <a:extLst>
+              <a:ext uri="{FF2B5EF4-FFF2-40B4-BE49-F238E27FC236}">
+                <a16:creationId xmlns:a16="http://schemas.microsoft.com/office/drawing/2014/main" id="{A48ED70B-FA84-6A31-E6DD-953F82C689FE}"/>
+              </a:ext>
+            </a:extLst>
+          </p:cNvPr>
+          <p:cNvSpPr>
+            <a:spLocks noGrp="1"/>
+          </p:cNvSpPr>
+          <p:nvPr>
+            <p:ph type="title"/>
+          </p:nvPr>
+        </p:nvSpPr>
+        <p:spPr/>
+        <p:txBody>
+          <a:bodyPr/>
+          <a:lstStyle/>
+          <a:p>
+            <a:r>
+              <a:rPr lang="en-US" dirty="0"/>
+              <a:t>Readings</a:t>
+            </a:r>
+          </a:p>
+        </p:txBody>
+      </p:sp>
+      <p:sp>
+        <p:nvSpPr>
+          <p:cNvPr id="3" name="Text Placeholder 2">
+            <a:extLst>
+              <a:ext uri="{FF2B5EF4-FFF2-40B4-BE49-F238E27FC236}">
+                <a16:creationId xmlns:a16="http://schemas.microsoft.com/office/drawing/2014/main" id="{83957764-6E2C-C5A1-4B09-647D8C7BEDA6}"/>
+              </a:ext>
+            </a:extLst>
+          </p:cNvPr>
+          <p:cNvSpPr>
+            <a:spLocks noGrp="1"/>
+          </p:cNvSpPr>
+          <p:nvPr>
+            <p:ph type="body" idx="1"/>
+          </p:nvPr>
+        </p:nvSpPr>
+        <p:spPr/>
+        <p:txBody>
+          <a:bodyPr/>
+          <a:lstStyle/>
+          <a:p>
+            <a:r>
+              <a:rPr lang="en-US" dirty="0"/>
+              <a:t>ASDN E-R diagram</a:t>
+            </a:r>
+          </a:p>
+          <a:p>
+            <a:pPr lvl="1"/>
+            <a:r>
+              <a:rPr lang="en-US" dirty="0">
+                <a:latin typeface="Avenir Book" panose="02000503020000020003" pitchFamily="2" charset="0"/>
+              </a:rPr>
+              <a:t>Tuck it under your pillow</a:t>
+            </a:r>
+          </a:p>
+          <a:p>
+            <a:pPr lvl="1"/>
+            <a:endParaRPr lang="en-US" dirty="0">
+              <a:latin typeface="Avenir Book" panose="02000503020000020003" pitchFamily="2" charset="0"/>
+            </a:endParaRPr>
+          </a:p>
+          <a:p>
+            <a:r>
+              <a:rPr lang="en-US" dirty="0"/>
+              <a:t>ASDN database schema (15min)</a:t>
+            </a:r>
+          </a:p>
+          <a:p>
+            <a:pPr lvl="1"/>
+            <a:r>
+              <a:rPr lang="en-US" dirty="0">
+                <a:latin typeface="Courier New" panose="02070309020205020404" pitchFamily="49" charset="0"/>
+                <a:cs typeface="Courier New" panose="02070309020205020404" pitchFamily="49" charset="0"/>
+              </a:rPr>
+              <a:t>bren-eds213-data/database/schema-build-</a:t>
+            </a:r>
+            <a:r>
+              <a:rPr lang="en-US" dirty="0" err="1">
+                <a:latin typeface="Courier New" panose="02070309020205020404" pitchFamily="49" charset="0"/>
+                <a:cs typeface="Courier New" panose="02070309020205020404" pitchFamily="49" charset="0"/>
+              </a:rPr>
+              <a:t>script.sql</a:t>
+            </a:r>
+            <a:endParaRPr lang="en-US" dirty="0">
+              <a:latin typeface="Courier New" panose="02070309020205020404" pitchFamily="49" charset="0"/>
+              <a:cs typeface="Courier New" panose="02070309020205020404" pitchFamily="49" charset="0"/>
+            </a:endParaRPr>
+          </a:p>
+          <a:p>
+            <a:pPr lvl="1"/>
+            <a:r>
+              <a:rPr lang="en-US" dirty="0">
+                <a:latin typeface="Avenir Book" panose="02000503020000020003" pitchFamily="2" charset="0"/>
+              </a:rPr>
+              <a:t>Look at how data is described</a:t>
+            </a:r>
+          </a:p>
+          <a:p>
+            <a:pPr lvl="1"/>
+            <a:endParaRPr lang="en-US" dirty="0">
+              <a:latin typeface="Avenir Book" panose="02000503020000020003" pitchFamily="2" charset="0"/>
+            </a:endParaRPr>
+          </a:p>
+          <a:p>
+            <a:r>
+              <a:rPr lang="en-US" dirty="0"/>
+              <a:t>Play with database (20min)</a:t>
+            </a:r>
+          </a:p>
+          <a:p>
+            <a:pPr lvl="1"/>
+            <a:r>
+              <a:rPr lang="en-US" dirty="0">
+                <a:latin typeface="Avenir Book" panose="02000503020000020003" pitchFamily="2" charset="0"/>
+              </a:rPr>
+              <a:t>Practice what we covered in class on all tables</a:t>
+            </a:r>
+          </a:p>
+        </p:txBody>
+      </p:sp>
+      <p:sp>
+        <p:nvSpPr>
+          <p:cNvPr id="4" name="Slide Number Placeholder 3">
+            <a:extLst>
+              <a:ext uri="{FF2B5EF4-FFF2-40B4-BE49-F238E27FC236}">
+                <a16:creationId xmlns:a16="http://schemas.microsoft.com/office/drawing/2014/main" id="{8C22E022-3B2A-78C0-1280-67066255CDD3}"/>
+              </a:ext>
+            </a:extLst>
+          </p:cNvPr>
+          <p:cNvSpPr>
+            <a:spLocks noGrp="1"/>
+          </p:cNvSpPr>
+          <p:nvPr>
+            <p:ph type="sldNum" idx="12"/>
+          </p:nvPr>
+        </p:nvSpPr>
+        <p:spPr/>
+        <p:txBody>
+          <a:bodyPr/>
+          <a:lstStyle/>
+          <a:p>
+            <a:pPr marL="0" lvl="0" indent="0" algn="r" rtl="0">
+              <a:spcBef>
+                <a:spcPts val="0"/>
+              </a:spcBef>
+              <a:spcAft>
+                <a:spcPts val="0"/>
+              </a:spcAft>
+              <a:buNone/>
+            </a:pPr>
+            <a:fld id="{00000000-1234-1234-1234-123412341234}" type="slidenum">
+              <a:rPr lang="en" smtClean="0"/>
+              <a:t>11</a:t>
+            </a:fld>
+            <a:endParaRPr lang="en" dirty="0"/>
+          </a:p>
+        </p:txBody>
+      </p:sp>
+    </p:spTree>
+    <p:extLst>
+      <p:ext uri="{BB962C8B-B14F-4D97-AF65-F5344CB8AC3E}">
+        <p14:creationId xmlns:p14="http://schemas.microsoft.com/office/powerpoint/2010/main" val="3851786597"/>
+      </p:ext>
+    </p:extLst>
+  </p:cSld>
+  <p:clrMapOvr>
+    <a:masterClrMapping/>
+  </p:clrMapOvr>
+</p:sld>
+</file>
+
+<file path=ppt/slides/slide2.xml><?xml version="1.0" encoding="utf-8"?>
 <p:sld xmlns:a="http://schemas.openxmlformats.org/drawingml/2006/main" xmlns:r="http://schemas.openxmlformats.org/officeDocument/2006/relationships" xmlns:p="http://schemas.openxmlformats.org/presentationml/2006/main">
   <p:cSld>
     <p:spTree>
@@ -17146,7 +15777,7 @@
             </a:pPr>
             <a:fld id="{00000000-1234-1234-1234-123412341234}" type="slidenum">
               <a:rPr lang="en" smtClean="0"/>
-              <a:t>4</a:t>
+              <a:t>2</a:t>
             </a:fld>
             <a:endParaRPr lang="en" dirty="0"/>
           </a:p>
@@ -17160,8 +15791,8 @@
 </p:sld>
 </file>
 
-<file path=ppt/slides/slide5.xml><?xml version="1.0" encoding="utf-8"?>
-<p:sld xmlns:a="http://schemas.openxmlformats.org/drawingml/2006/main" xmlns:r="http://schemas.openxmlformats.org/officeDocument/2006/relationships" xmlns:p="http://schemas.openxmlformats.org/presentationml/2006/main">
+<file path=ppt/slides/slide3.xml><?xml version="1.0" encoding="utf-8"?>
+<p:sld xmlns:a="http://schemas.openxmlformats.org/drawingml/2006/main" xmlns:r="http://schemas.openxmlformats.org/officeDocument/2006/relationships" xmlns:p="http://schemas.openxmlformats.org/presentationml/2006/main" show="0">
   <p:cSld>
     <p:spTree>
       <p:nvGrpSpPr>
@@ -17298,7 +15929,7 @@
             </a:pPr>
             <a:fld id="{00000000-1234-1234-1234-123412341234}" type="slidenum">
               <a:rPr lang="en" smtClean="0"/>
-              <a:t>5</a:t>
+              <a:t>3</a:t>
             </a:fld>
             <a:endParaRPr lang="en" dirty="0"/>
           </a:p>
@@ -17317,7 +15948,1876 @@
 </p:sld>
 </file>
 
+<file path=ppt/slides/slide4.xml><?xml version="1.0" encoding="utf-8"?>
+<p:sld xmlns:a="http://schemas.openxmlformats.org/drawingml/2006/main" xmlns:r="http://schemas.openxmlformats.org/officeDocument/2006/relationships" xmlns:p="http://schemas.openxmlformats.org/presentationml/2006/main">
+  <p:cSld>
+    <p:spTree>
+      <p:nvGrpSpPr>
+        <p:cNvPr id="1" name="Shape 145">
+          <a:extLst>
+            <a:ext uri="{FF2B5EF4-FFF2-40B4-BE49-F238E27FC236}">
+              <a16:creationId xmlns:a16="http://schemas.microsoft.com/office/drawing/2014/main" id="{DC490CA8-AA50-963A-7B44-64F33FF3904F}"/>
+            </a:ext>
+          </a:extLst>
+        </p:cNvPr>
+        <p:cNvGrpSpPr/>
+        <p:nvPr/>
+      </p:nvGrpSpPr>
+      <p:grpSpPr>
+        <a:xfrm>
+          <a:off x="0" y="0"/>
+          <a:ext cx="0" cy="0"/>
+          <a:chOff x="0" y="0"/>
+          <a:chExt cx="0" cy="0"/>
+        </a:xfrm>
+      </p:grpSpPr>
+      <p:sp>
+        <p:nvSpPr>
+          <p:cNvPr id="5" name="Title 4">
+            <a:extLst>
+              <a:ext uri="{FF2B5EF4-FFF2-40B4-BE49-F238E27FC236}">
+                <a16:creationId xmlns:a16="http://schemas.microsoft.com/office/drawing/2014/main" id="{44F76261-BECE-3891-564D-0E151C8DA303}"/>
+              </a:ext>
+            </a:extLst>
+          </p:cNvPr>
+          <p:cNvSpPr>
+            <a:spLocks noGrp="1"/>
+          </p:cNvSpPr>
+          <p:nvPr>
+            <p:ph type="title"/>
+          </p:nvPr>
+        </p:nvSpPr>
+        <p:spPr/>
+        <p:txBody>
+          <a:bodyPr/>
+          <a:lstStyle/>
+          <a:p>
+            <a:r>
+              <a:rPr lang="en-US" dirty="0"/>
+              <a:t>The relational way</a:t>
+            </a:r>
+          </a:p>
+        </p:txBody>
+      </p:sp>
+      <p:sp>
+        <p:nvSpPr>
+          <p:cNvPr id="6" name="Text Placeholder 5">
+            <a:extLst>
+              <a:ext uri="{FF2B5EF4-FFF2-40B4-BE49-F238E27FC236}">
+                <a16:creationId xmlns:a16="http://schemas.microsoft.com/office/drawing/2014/main" id="{015C6F32-5741-84F8-289F-0D28A48E2EA2}"/>
+              </a:ext>
+            </a:extLst>
+          </p:cNvPr>
+          <p:cNvSpPr>
+            <a:spLocks noGrp="1"/>
+          </p:cNvSpPr>
+          <p:nvPr>
+            <p:ph type="body" idx="1"/>
+          </p:nvPr>
+        </p:nvSpPr>
+        <p:spPr>
+          <a:xfrm>
+            <a:off x="311701" y="1152475"/>
+            <a:ext cx="3824072" cy="3416400"/>
+          </a:xfrm>
+        </p:spPr>
+        <p:txBody>
+          <a:bodyPr>
+            <a:normAutofit/>
+          </a:bodyPr>
+          <a:lstStyle/>
+          <a:p>
+            <a:r>
+              <a:rPr lang="en-US" dirty="0"/>
+              <a:t>Hierarchical:</a:t>
+            </a:r>
+          </a:p>
+          <a:p>
+            <a:pPr lvl="1"/>
+            <a:r>
+              <a:rPr lang="en-US" dirty="0">
+                <a:latin typeface="Avenir Book" panose="02000503020000020003" pitchFamily="2" charset="0"/>
+              </a:rPr>
+              <a:t>Sites</a:t>
+            </a:r>
+          </a:p>
+          <a:p>
+            <a:pPr lvl="2"/>
+            <a:r>
+              <a:rPr lang="en-US" dirty="0">
+                <a:latin typeface="Avenir Book" panose="02000503020000020003" pitchFamily="2" charset="0"/>
+              </a:rPr>
+              <a:t>Nests</a:t>
+            </a:r>
+          </a:p>
+          <a:p>
+            <a:pPr lvl="3"/>
+            <a:r>
+              <a:rPr lang="en-US" dirty="0">
+                <a:latin typeface="Avenir Book" panose="02000503020000020003" pitchFamily="2" charset="0"/>
+              </a:rPr>
+              <a:t>Eggs</a:t>
+            </a:r>
+          </a:p>
+        </p:txBody>
+      </p:sp>
+      <p:sp>
+        <p:nvSpPr>
+          <p:cNvPr id="7" name="Slide Number Placeholder 6">
+            <a:extLst>
+              <a:ext uri="{FF2B5EF4-FFF2-40B4-BE49-F238E27FC236}">
+                <a16:creationId xmlns:a16="http://schemas.microsoft.com/office/drawing/2014/main" id="{0CBDCE13-B3C6-73FF-9651-322DCD6B4F67}"/>
+              </a:ext>
+            </a:extLst>
+          </p:cNvPr>
+          <p:cNvSpPr>
+            <a:spLocks noGrp="1"/>
+          </p:cNvSpPr>
+          <p:nvPr>
+            <p:ph type="sldNum" idx="12"/>
+          </p:nvPr>
+        </p:nvSpPr>
+        <p:spPr/>
+        <p:txBody>
+          <a:bodyPr/>
+          <a:lstStyle/>
+          <a:p>
+            <a:pPr marL="0" lvl="0" indent="0" algn="r" rtl="0">
+              <a:spcBef>
+                <a:spcPts val="0"/>
+              </a:spcBef>
+              <a:spcAft>
+                <a:spcPts val="0"/>
+              </a:spcAft>
+              <a:buNone/>
+            </a:pPr>
+            <a:fld id="{00000000-1234-1234-1234-123412341234}" type="slidenum">
+              <a:rPr lang="en" smtClean="0"/>
+              <a:t>4</a:t>
+            </a:fld>
+            <a:endParaRPr lang="en" dirty="0"/>
+          </a:p>
+        </p:txBody>
+      </p:sp>
+      <p:sp>
+        <p:nvSpPr>
+          <p:cNvPr id="2" name="Text Placeholder 5">
+            <a:extLst>
+              <a:ext uri="{FF2B5EF4-FFF2-40B4-BE49-F238E27FC236}">
+                <a16:creationId xmlns:a16="http://schemas.microsoft.com/office/drawing/2014/main" id="{E3BACA38-4AA4-BD04-6627-1685C229494D}"/>
+              </a:ext>
+            </a:extLst>
+          </p:cNvPr>
+          <p:cNvSpPr txBox="1">
+            <a:spLocks/>
+          </p:cNvSpPr>
+          <p:nvPr/>
+        </p:nvSpPr>
+        <p:spPr>
+          <a:xfrm>
+            <a:off x="4421883" y="1152475"/>
+            <a:ext cx="4050575" cy="3416400"/>
+          </a:xfrm>
+          <a:prstGeom prst="rect">
+            <a:avLst/>
+          </a:prstGeom>
+          <a:noFill/>
+          <a:ln>
+            <a:noFill/>
+          </a:ln>
+        </p:spPr>
+        <p:txBody>
+          <a:bodyPr spcFirstLastPara="1" wrap="square" lIns="91425" tIns="91425" rIns="91425" bIns="91425" anchor="t" anchorCtr="0">
+            <a:normAutofit/>
+          </a:bodyPr>
+          <a:lstStyle>
+            <a:defPPr marR="0" lvl="0" algn="l" rtl="0">
+              <a:lnSpc>
+                <a:spcPct val="100000"/>
+              </a:lnSpc>
+              <a:spcBef>
+                <a:spcPts val="0"/>
+              </a:spcBef>
+              <a:spcAft>
+                <a:spcPts val="0"/>
+              </a:spcAft>
+            </a:defPPr>
+            <a:lvl1pPr marL="457200" marR="0" lvl="0" indent="-342900" algn="l" rtl="0">
+              <a:lnSpc>
+                <a:spcPct val="115000"/>
+              </a:lnSpc>
+              <a:spcBef>
+                <a:spcPts val="0"/>
+              </a:spcBef>
+              <a:spcAft>
+                <a:spcPts val="0"/>
+              </a:spcAft>
+              <a:buClr>
+                <a:schemeClr val="dk2"/>
+              </a:buClr>
+              <a:buSzPts val="1800"/>
+              <a:buFont typeface="Arial"/>
+              <a:buChar char="●"/>
+              <a:defRPr sz="1800" b="0" i="0" u="none" strike="noStrike" cap="none">
+                <a:solidFill>
+                  <a:schemeClr val="dk2"/>
+                </a:solidFill>
+                <a:latin typeface="Avenir Book" panose="02000503020000020003" pitchFamily="2" charset="0"/>
+                <a:ea typeface="Arial"/>
+                <a:cs typeface="Arial"/>
+                <a:sym typeface="Arial"/>
+              </a:defRPr>
+            </a:lvl1pPr>
+            <a:lvl2pPr marL="914400" marR="0" lvl="1" indent="-317500" algn="l" rtl="0">
+              <a:lnSpc>
+                <a:spcPct val="115000"/>
+              </a:lnSpc>
+              <a:spcBef>
+                <a:spcPts val="0"/>
+              </a:spcBef>
+              <a:spcAft>
+                <a:spcPts val="0"/>
+              </a:spcAft>
+              <a:buClr>
+                <a:schemeClr val="dk2"/>
+              </a:buClr>
+              <a:buSzPts val="1400"/>
+              <a:buFont typeface="Arial"/>
+              <a:buChar char="○"/>
+              <a:defRPr sz="1400" b="0" i="0" u="none" strike="noStrike" cap="none">
+                <a:solidFill>
+                  <a:schemeClr val="dk2"/>
+                </a:solidFill>
+                <a:latin typeface="Arial"/>
+                <a:ea typeface="Arial"/>
+                <a:cs typeface="Arial"/>
+                <a:sym typeface="Arial"/>
+              </a:defRPr>
+            </a:lvl2pPr>
+            <a:lvl3pPr marL="1371600" marR="0" lvl="2" indent="-317500" algn="l" rtl="0">
+              <a:lnSpc>
+                <a:spcPct val="115000"/>
+              </a:lnSpc>
+              <a:spcBef>
+                <a:spcPts val="0"/>
+              </a:spcBef>
+              <a:spcAft>
+                <a:spcPts val="0"/>
+              </a:spcAft>
+              <a:buClr>
+                <a:schemeClr val="dk2"/>
+              </a:buClr>
+              <a:buSzPts val="1400"/>
+              <a:buFont typeface="Arial"/>
+              <a:buChar char="■"/>
+              <a:defRPr sz="1400" b="0" i="0" u="none" strike="noStrike" cap="none">
+                <a:solidFill>
+                  <a:schemeClr val="dk2"/>
+                </a:solidFill>
+                <a:latin typeface="Arial"/>
+                <a:ea typeface="Arial"/>
+                <a:cs typeface="Arial"/>
+                <a:sym typeface="Arial"/>
+              </a:defRPr>
+            </a:lvl3pPr>
+            <a:lvl4pPr marL="1828800" marR="0" lvl="3" indent="-317500" algn="l" rtl="0">
+              <a:lnSpc>
+                <a:spcPct val="115000"/>
+              </a:lnSpc>
+              <a:spcBef>
+                <a:spcPts val="0"/>
+              </a:spcBef>
+              <a:spcAft>
+                <a:spcPts val="0"/>
+              </a:spcAft>
+              <a:buClr>
+                <a:schemeClr val="dk2"/>
+              </a:buClr>
+              <a:buSzPts val="1400"/>
+              <a:buFont typeface="Arial"/>
+              <a:buChar char="●"/>
+              <a:defRPr sz="1400" b="0" i="0" u="none" strike="noStrike" cap="none">
+                <a:solidFill>
+                  <a:schemeClr val="dk2"/>
+                </a:solidFill>
+                <a:latin typeface="Arial"/>
+                <a:ea typeface="Arial"/>
+                <a:cs typeface="Arial"/>
+                <a:sym typeface="Arial"/>
+              </a:defRPr>
+            </a:lvl4pPr>
+            <a:lvl5pPr marL="2286000" marR="0" lvl="4" indent="-317500" algn="l" rtl="0">
+              <a:lnSpc>
+                <a:spcPct val="115000"/>
+              </a:lnSpc>
+              <a:spcBef>
+                <a:spcPts val="0"/>
+              </a:spcBef>
+              <a:spcAft>
+                <a:spcPts val="0"/>
+              </a:spcAft>
+              <a:buClr>
+                <a:schemeClr val="dk2"/>
+              </a:buClr>
+              <a:buSzPts val="1400"/>
+              <a:buFont typeface="Arial"/>
+              <a:buChar char="○"/>
+              <a:defRPr sz="1400" b="0" i="0" u="none" strike="noStrike" cap="none">
+                <a:solidFill>
+                  <a:schemeClr val="dk2"/>
+                </a:solidFill>
+                <a:latin typeface="Arial"/>
+                <a:ea typeface="Arial"/>
+                <a:cs typeface="Arial"/>
+                <a:sym typeface="Arial"/>
+              </a:defRPr>
+            </a:lvl5pPr>
+            <a:lvl6pPr marL="2743200" marR="0" lvl="5" indent="-317500" algn="l" rtl="0">
+              <a:lnSpc>
+                <a:spcPct val="115000"/>
+              </a:lnSpc>
+              <a:spcBef>
+                <a:spcPts val="0"/>
+              </a:spcBef>
+              <a:spcAft>
+                <a:spcPts val="0"/>
+              </a:spcAft>
+              <a:buClr>
+                <a:schemeClr val="dk2"/>
+              </a:buClr>
+              <a:buSzPts val="1400"/>
+              <a:buFont typeface="Arial"/>
+              <a:buChar char="■"/>
+              <a:defRPr sz="1400" b="0" i="0" u="none" strike="noStrike" cap="none">
+                <a:solidFill>
+                  <a:schemeClr val="dk2"/>
+                </a:solidFill>
+                <a:latin typeface="Arial"/>
+                <a:ea typeface="Arial"/>
+                <a:cs typeface="Arial"/>
+                <a:sym typeface="Arial"/>
+              </a:defRPr>
+            </a:lvl6pPr>
+            <a:lvl7pPr marL="3200400" marR="0" lvl="6" indent="-317500" algn="l" rtl="0">
+              <a:lnSpc>
+                <a:spcPct val="115000"/>
+              </a:lnSpc>
+              <a:spcBef>
+                <a:spcPts val="0"/>
+              </a:spcBef>
+              <a:spcAft>
+                <a:spcPts val="0"/>
+              </a:spcAft>
+              <a:buClr>
+                <a:schemeClr val="dk2"/>
+              </a:buClr>
+              <a:buSzPts val="1400"/>
+              <a:buFont typeface="Arial"/>
+              <a:buChar char="●"/>
+              <a:defRPr sz="1400" b="0" i="0" u="none" strike="noStrike" cap="none">
+                <a:solidFill>
+                  <a:schemeClr val="dk2"/>
+                </a:solidFill>
+                <a:latin typeface="Arial"/>
+                <a:ea typeface="Arial"/>
+                <a:cs typeface="Arial"/>
+                <a:sym typeface="Arial"/>
+              </a:defRPr>
+            </a:lvl7pPr>
+            <a:lvl8pPr marL="3657600" marR="0" lvl="7" indent="-317500" algn="l" rtl="0">
+              <a:lnSpc>
+                <a:spcPct val="115000"/>
+              </a:lnSpc>
+              <a:spcBef>
+                <a:spcPts val="0"/>
+              </a:spcBef>
+              <a:spcAft>
+                <a:spcPts val="0"/>
+              </a:spcAft>
+              <a:buClr>
+                <a:schemeClr val="dk2"/>
+              </a:buClr>
+              <a:buSzPts val="1400"/>
+              <a:buFont typeface="Arial"/>
+              <a:buChar char="○"/>
+              <a:defRPr sz="1400" b="0" i="0" u="none" strike="noStrike" cap="none">
+                <a:solidFill>
+                  <a:schemeClr val="dk2"/>
+                </a:solidFill>
+                <a:latin typeface="Arial"/>
+                <a:ea typeface="Arial"/>
+                <a:cs typeface="Arial"/>
+                <a:sym typeface="Arial"/>
+              </a:defRPr>
+            </a:lvl8pPr>
+            <a:lvl9pPr marL="4114800" marR="0" lvl="8" indent="-317500" algn="l" rtl="0">
+              <a:lnSpc>
+                <a:spcPct val="115000"/>
+              </a:lnSpc>
+              <a:spcBef>
+                <a:spcPts val="0"/>
+              </a:spcBef>
+              <a:spcAft>
+                <a:spcPts val="0"/>
+              </a:spcAft>
+              <a:buClr>
+                <a:schemeClr val="dk2"/>
+              </a:buClr>
+              <a:buSzPts val="1400"/>
+              <a:buFont typeface="Arial"/>
+              <a:buChar char="■"/>
+              <a:defRPr sz="1400" b="0" i="0" u="none" strike="noStrike" cap="none">
+                <a:solidFill>
+                  <a:schemeClr val="dk2"/>
+                </a:solidFill>
+                <a:latin typeface="Arial"/>
+                <a:ea typeface="Arial"/>
+                <a:cs typeface="Arial"/>
+                <a:sym typeface="Arial"/>
+              </a:defRPr>
+            </a:lvl9pPr>
+          </a:lstStyle>
+          <a:p>
+            <a:r>
+              <a:rPr lang="en-US" dirty="0"/>
+              <a:t>Relational:</a:t>
+            </a:r>
+          </a:p>
+        </p:txBody>
+      </p:sp>
+      <p:sp>
+        <p:nvSpPr>
+          <p:cNvPr id="3" name="Rectangle 2">
+            <a:extLst>
+              <a:ext uri="{FF2B5EF4-FFF2-40B4-BE49-F238E27FC236}">
+                <a16:creationId xmlns:a16="http://schemas.microsoft.com/office/drawing/2014/main" id="{D410A42C-8B5E-F606-AD87-28032379301B}"/>
+              </a:ext>
+            </a:extLst>
+          </p:cNvPr>
+          <p:cNvSpPr/>
+          <p:nvPr/>
+        </p:nvSpPr>
+        <p:spPr>
+          <a:xfrm>
+            <a:off x="4133136" y="1949042"/>
+            <a:ext cx="829625" cy="572700"/>
+          </a:xfrm>
+          <a:prstGeom prst="rect">
+            <a:avLst/>
+          </a:prstGeom>
+          <a:ln>
+            <a:solidFill>
+              <a:schemeClr val="tx1"/>
+            </a:solidFill>
+          </a:ln>
+        </p:spPr>
+        <p:style>
+          <a:lnRef idx="2">
+            <a:schemeClr val="accent1">
+              <a:shade val="15000"/>
+            </a:schemeClr>
+          </a:lnRef>
+          <a:fillRef idx="1">
+            <a:schemeClr val="accent1"/>
+          </a:fillRef>
+          <a:effectRef idx="0">
+            <a:schemeClr val="accent1"/>
+          </a:effectRef>
+          <a:fontRef idx="minor">
+            <a:schemeClr val="lt1"/>
+          </a:fontRef>
+        </p:style>
+        <p:txBody>
+          <a:bodyPr rtlCol="0" anchor="ctr"/>
+          <a:lstStyle/>
+          <a:p>
+            <a:pPr algn="ctr"/>
+            <a:r>
+              <a:rPr lang="en-US" dirty="0"/>
+              <a:t>Sites</a:t>
+            </a:r>
+          </a:p>
+        </p:txBody>
+      </p:sp>
+      <p:sp>
+        <p:nvSpPr>
+          <p:cNvPr id="8" name="Rectangle 7">
+            <a:extLst>
+              <a:ext uri="{FF2B5EF4-FFF2-40B4-BE49-F238E27FC236}">
+                <a16:creationId xmlns:a16="http://schemas.microsoft.com/office/drawing/2014/main" id="{22BEA2EE-D330-FD43-1475-927C50204EAB}"/>
+              </a:ext>
+            </a:extLst>
+          </p:cNvPr>
+          <p:cNvSpPr/>
+          <p:nvPr/>
+        </p:nvSpPr>
+        <p:spPr>
+          <a:xfrm>
+            <a:off x="5887983" y="1950440"/>
+            <a:ext cx="829625" cy="572700"/>
+          </a:xfrm>
+          <a:prstGeom prst="rect">
+            <a:avLst/>
+          </a:prstGeom>
+          <a:ln>
+            <a:solidFill>
+              <a:schemeClr val="tx1"/>
+            </a:solidFill>
+          </a:ln>
+        </p:spPr>
+        <p:style>
+          <a:lnRef idx="2">
+            <a:schemeClr val="accent1">
+              <a:shade val="15000"/>
+            </a:schemeClr>
+          </a:lnRef>
+          <a:fillRef idx="1">
+            <a:schemeClr val="accent1"/>
+          </a:fillRef>
+          <a:effectRef idx="0">
+            <a:schemeClr val="accent1"/>
+          </a:effectRef>
+          <a:fontRef idx="minor">
+            <a:schemeClr val="lt1"/>
+          </a:fontRef>
+        </p:style>
+        <p:txBody>
+          <a:bodyPr rtlCol="0" anchor="ctr"/>
+          <a:lstStyle/>
+          <a:p>
+            <a:pPr algn="ctr"/>
+            <a:r>
+              <a:rPr lang="en-US" dirty="0"/>
+              <a:t>Nests</a:t>
+            </a:r>
+          </a:p>
+        </p:txBody>
+      </p:sp>
+      <p:sp>
+        <p:nvSpPr>
+          <p:cNvPr id="9" name="Rectangle 8">
+            <a:extLst>
+              <a:ext uri="{FF2B5EF4-FFF2-40B4-BE49-F238E27FC236}">
+                <a16:creationId xmlns:a16="http://schemas.microsoft.com/office/drawing/2014/main" id="{56AD87C9-F365-EC92-889F-D5B09FFA1C56}"/>
+              </a:ext>
+            </a:extLst>
+          </p:cNvPr>
+          <p:cNvSpPr/>
+          <p:nvPr/>
+        </p:nvSpPr>
+        <p:spPr>
+          <a:xfrm>
+            <a:off x="7642831" y="1949042"/>
+            <a:ext cx="829625" cy="572700"/>
+          </a:xfrm>
+          <a:prstGeom prst="rect">
+            <a:avLst/>
+          </a:prstGeom>
+          <a:ln>
+            <a:solidFill>
+              <a:schemeClr val="tx1"/>
+            </a:solidFill>
+          </a:ln>
+        </p:spPr>
+        <p:style>
+          <a:lnRef idx="2">
+            <a:schemeClr val="accent1">
+              <a:shade val="15000"/>
+            </a:schemeClr>
+          </a:lnRef>
+          <a:fillRef idx="1">
+            <a:schemeClr val="accent1"/>
+          </a:fillRef>
+          <a:effectRef idx="0">
+            <a:schemeClr val="accent1"/>
+          </a:effectRef>
+          <a:fontRef idx="minor">
+            <a:schemeClr val="lt1"/>
+          </a:fontRef>
+        </p:style>
+        <p:txBody>
+          <a:bodyPr rtlCol="0" anchor="ctr"/>
+          <a:lstStyle/>
+          <a:p>
+            <a:pPr algn="ctr"/>
+            <a:r>
+              <a:rPr lang="en-US" dirty="0"/>
+              <a:t>Eggs</a:t>
+            </a:r>
+          </a:p>
+        </p:txBody>
+      </p:sp>
+      <p:grpSp>
+        <p:nvGrpSpPr>
+          <p:cNvPr id="35" name="Group 34">
+            <a:extLst>
+              <a:ext uri="{FF2B5EF4-FFF2-40B4-BE49-F238E27FC236}">
+                <a16:creationId xmlns:a16="http://schemas.microsoft.com/office/drawing/2014/main" id="{88B1CE9D-0D48-674E-902F-E768BFAC1F0E}"/>
+              </a:ext>
+            </a:extLst>
+          </p:cNvPr>
+          <p:cNvGrpSpPr/>
+          <p:nvPr/>
+        </p:nvGrpSpPr>
+        <p:grpSpPr>
+          <a:xfrm>
+            <a:off x="4962761" y="2235392"/>
+            <a:ext cx="2680070" cy="1398"/>
+            <a:chOff x="4962761" y="2235392"/>
+            <a:chExt cx="2680070" cy="1398"/>
+          </a:xfrm>
+        </p:grpSpPr>
+        <p:cxnSp>
+          <p:nvCxnSpPr>
+            <p:cNvPr id="12" name="Straight Arrow Connector 11">
+              <a:extLst>
+                <a:ext uri="{FF2B5EF4-FFF2-40B4-BE49-F238E27FC236}">
+                  <a16:creationId xmlns:a16="http://schemas.microsoft.com/office/drawing/2014/main" id="{A3C15CE0-4C05-36D4-5D73-892A6ACB5E9C}"/>
+                </a:ext>
+              </a:extLst>
+            </p:cNvPr>
+            <p:cNvCxnSpPr>
+              <a:cxnSpLocks/>
+              <a:stCxn id="9" idx="1"/>
+              <a:endCxn id="8" idx="3"/>
+            </p:cNvCxnSpPr>
+            <p:nvPr/>
+          </p:nvCxnSpPr>
+          <p:spPr>
+            <a:xfrm flipH="1">
+              <a:off x="6717608" y="2235392"/>
+              <a:ext cx="925223" cy="1398"/>
+            </a:xfrm>
+            <a:prstGeom prst="straightConnector1">
+              <a:avLst/>
+            </a:prstGeom>
+            <a:ln w="38100">
+              <a:solidFill>
+                <a:srgbClr val="C00000"/>
+              </a:solidFill>
+              <a:tailEnd type="triangle"/>
+            </a:ln>
+          </p:spPr>
+          <p:style>
+            <a:lnRef idx="1">
+              <a:schemeClr val="accent1"/>
+            </a:lnRef>
+            <a:fillRef idx="0">
+              <a:schemeClr val="accent1"/>
+            </a:fillRef>
+            <a:effectRef idx="0">
+              <a:schemeClr val="accent1"/>
+            </a:effectRef>
+            <a:fontRef idx="minor">
+              <a:schemeClr val="tx1"/>
+            </a:fontRef>
+          </p:style>
+        </p:cxnSp>
+        <p:cxnSp>
+          <p:nvCxnSpPr>
+            <p:cNvPr id="15" name="Straight Arrow Connector 14">
+              <a:extLst>
+                <a:ext uri="{FF2B5EF4-FFF2-40B4-BE49-F238E27FC236}">
+                  <a16:creationId xmlns:a16="http://schemas.microsoft.com/office/drawing/2014/main" id="{445F2A09-E8A0-936F-62D0-3A590708B23A}"/>
+                </a:ext>
+              </a:extLst>
+            </p:cNvPr>
+            <p:cNvCxnSpPr>
+              <a:cxnSpLocks/>
+              <a:stCxn id="8" idx="1"/>
+              <a:endCxn id="3" idx="3"/>
+            </p:cNvCxnSpPr>
+            <p:nvPr/>
+          </p:nvCxnSpPr>
+          <p:spPr>
+            <a:xfrm flipH="1" flipV="1">
+              <a:off x="4962761" y="2235392"/>
+              <a:ext cx="925222" cy="1398"/>
+            </a:xfrm>
+            <a:prstGeom prst="straightConnector1">
+              <a:avLst/>
+            </a:prstGeom>
+            <a:ln w="38100">
+              <a:solidFill>
+                <a:srgbClr val="C00000"/>
+              </a:solidFill>
+              <a:tailEnd type="triangle"/>
+            </a:ln>
+          </p:spPr>
+          <p:style>
+            <a:lnRef idx="1">
+              <a:schemeClr val="accent1"/>
+            </a:lnRef>
+            <a:fillRef idx="0">
+              <a:schemeClr val="accent1"/>
+            </a:fillRef>
+            <a:effectRef idx="0">
+              <a:schemeClr val="accent1"/>
+            </a:effectRef>
+            <a:fontRef idx="minor">
+              <a:schemeClr val="tx1"/>
+            </a:fontRef>
+          </p:style>
+        </p:cxnSp>
+      </p:grpSp>
+      <p:grpSp>
+        <p:nvGrpSpPr>
+          <p:cNvPr id="36" name="Group 35">
+            <a:extLst>
+              <a:ext uri="{FF2B5EF4-FFF2-40B4-BE49-F238E27FC236}">
+                <a16:creationId xmlns:a16="http://schemas.microsoft.com/office/drawing/2014/main" id="{5FBD3B4E-5E6B-FEC6-6153-0AAB895DF896}"/>
+              </a:ext>
+            </a:extLst>
+          </p:cNvPr>
+          <p:cNvGrpSpPr/>
+          <p:nvPr/>
+        </p:nvGrpSpPr>
+        <p:grpSpPr>
+          <a:xfrm>
+            <a:off x="4547949" y="2521742"/>
+            <a:ext cx="3609834" cy="2203812"/>
+            <a:chOff x="4547949" y="2521742"/>
+            <a:chExt cx="3609834" cy="2203812"/>
+          </a:xfrm>
+        </p:grpSpPr>
+        <p:sp>
+          <p:nvSpPr>
+            <p:cNvPr id="10" name="Rectangle 9">
+              <a:extLst>
+                <a:ext uri="{FF2B5EF4-FFF2-40B4-BE49-F238E27FC236}">
+                  <a16:creationId xmlns:a16="http://schemas.microsoft.com/office/drawing/2014/main" id="{EC8104DD-1A93-335F-3D84-E558052A4088}"/>
+                </a:ext>
+              </a:extLst>
+            </p:cNvPr>
+            <p:cNvSpPr/>
+            <p:nvPr/>
+          </p:nvSpPr>
+          <p:spPr>
+            <a:xfrm>
+              <a:off x="6447170" y="3007229"/>
+              <a:ext cx="829625" cy="572700"/>
+            </a:xfrm>
+            <a:prstGeom prst="rect">
+              <a:avLst/>
+            </a:prstGeom>
+            <a:ln>
+              <a:solidFill>
+                <a:schemeClr val="tx1"/>
+              </a:solidFill>
+            </a:ln>
+          </p:spPr>
+          <p:style>
+            <a:lnRef idx="2">
+              <a:schemeClr val="accent1">
+                <a:shade val="15000"/>
+              </a:schemeClr>
+            </a:lnRef>
+            <a:fillRef idx="1">
+              <a:schemeClr val="accent1"/>
+            </a:fillRef>
+            <a:effectRef idx="0">
+              <a:schemeClr val="accent1"/>
+            </a:effectRef>
+            <a:fontRef idx="minor">
+              <a:schemeClr val="lt1"/>
+            </a:fontRef>
+          </p:style>
+          <p:txBody>
+            <a:bodyPr rtlCol="0" anchor="ctr"/>
+            <a:lstStyle/>
+            <a:p>
+              <a:pPr algn="ctr"/>
+              <a:r>
+                <a:rPr lang="en-US" dirty="0"/>
+                <a:t>Species</a:t>
+              </a:r>
+            </a:p>
+          </p:txBody>
+        </p:sp>
+        <p:sp>
+          <p:nvSpPr>
+            <p:cNvPr id="11" name="Rectangle 10">
+              <a:extLst>
+                <a:ext uri="{FF2B5EF4-FFF2-40B4-BE49-F238E27FC236}">
+                  <a16:creationId xmlns:a16="http://schemas.microsoft.com/office/drawing/2014/main" id="{325B057C-2DA3-9C98-F966-65E87179F7C9}"/>
+                </a:ext>
+              </a:extLst>
+            </p:cNvPr>
+            <p:cNvSpPr/>
+            <p:nvPr/>
+          </p:nvSpPr>
+          <p:spPr>
+            <a:xfrm>
+              <a:off x="4955327" y="2958483"/>
+              <a:ext cx="1040961" cy="572700"/>
+            </a:xfrm>
+            <a:prstGeom prst="rect">
+              <a:avLst/>
+            </a:prstGeom>
+            <a:ln>
+              <a:solidFill>
+                <a:schemeClr val="tx1"/>
+              </a:solidFill>
+            </a:ln>
+          </p:spPr>
+          <p:style>
+            <a:lnRef idx="2">
+              <a:schemeClr val="accent1">
+                <a:shade val="15000"/>
+              </a:schemeClr>
+            </a:lnRef>
+            <a:fillRef idx="1">
+              <a:schemeClr val="accent1"/>
+            </a:fillRef>
+            <a:effectRef idx="0">
+              <a:schemeClr val="accent1"/>
+            </a:effectRef>
+            <a:fontRef idx="minor">
+              <a:schemeClr val="lt1"/>
+            </a:fontRef>
+          </p:style>
+          <p:txBody>
+            <a:bodyPr rtlCol="0" anchor="ctr"/>
+            <a:lstStyle/>
+            <a:p>
+              <a:pPr algn="ctr"/>
+              <a:r>
+                <a:rPr lang="en-US" dirty="0"/>
+                <a:t>Observers</a:t>
+              </a:r>
+            </a:p>
+          </p:txBody>
+        </p:sp>
+        <p:sp>
+          <p:nvSpPr>
+            <p:cNvPr id="18" name="Rectangle 17">
+              <a:extLst>
+                <a:ext uri="{FF2B5EF4-FFF2-40B4-BE49-F238E27FC236}">
+                  <a16:creationId xmlns:a16="http://schemas.microsoft.com/office/drawing/2014/main" id="{DF80DB79-61D2-3FFF-6FF0-06F24F4A9820}"/>
+                </a:ext>
+              </a:extLst>
+            </p:cNvPr>
+            <p:cNvSpPr/>
+            <p:nvPr/>
+          </p:nvSpPr>
+          <p:spPr>
+            <a:xfrm>
+              <a:off x="5228278" y="3681558"/>
+              <a:ext cx="1040961" cy="572700"/>
+            </a:xfrm>
+            <a:prstGeom prst="rect">
+              <a:avLst/>
+            </a:prstGeom>
+            <a:ln>
+              <a:solidFill>
+                <a:schemeClr val="tx1"/>
+              </a:solidFill>
+            </a:ln>
+          </p:spPr>
+          <p:style>
+            <a:lnRef idx="2">
+              <a:schemeClr val="accent1">
+                <a:shade val="15000"/>
+              </a:schemeClr>
+            </a:lnRef>
+            <a:fillRef idx="1">
+              <a:schemeClr val="accent1"/>
+            </a:fillRef>
+            <a:effectRef idx="0">
+              <a:schemeClr val="accent1"/>
+            </a:effectRef>
+            <a:fontRef idx="minor">
+              <a:schemeClr val="lt1"/>
+            </a:fontRef>
+          </p:style>
+          <p:txBody>
+            <a:bodyPr rtlCol="0" anchor="ctr"/>
+            <a:lstStyle/>
+            <a:p>
+              <a:pPr algn="ctr"/>
+              <a:r>
+                <a:rPr lang="en-US" dirty="0"/>
+                <a:t>Predators</a:t>
+              </a:r>
+            </a:p>
+          </p:txBody>
+        </p:sp>
+        <p:sp>
+          <p:nvSpPr>
+            <p:cNvPr id="19" name="Rectangle 18">
+              <a:extLst>
+                <a:ext uri="{FF2B5EF4-FFF2-40B4-BE49-F238E27FC236}">
+                  <a16:creationId xmlns:a16="http://schemas.microsoft.com/office/drawing/2014/main" id="{FB7BE1DC-776F-509A-FB1C-69A3B9E02861}"/>
+                </a:ext>
+              </a:extLst>
+            </p:cNvPr>
+            <p:cNvSpPr/>
+            <p:nvPr/>
+          </p:nvSpPr>
+          <p:spPr>
+            <a:xfrm>
+              <a:off x="6197127" y="3915524"/>
+              <a:ext cx="1040961" cy="572700"/>
+            </a:xfrm>
+            <a:prstGeom prst="rect">
+              <a:avLst/>
+            </a:prstGeom>
+            <a:ln>
+              <a:solidFill>
+                <a:schemeClr val="tx1"/>
+              </a:solidFill>
+            </a:ln>
+          </p:spPr>
+          <p:style>
+            <a:lnRef idx="2">
+              <a:schemeClr val="accent1">
+                <a:shade val="15000"/>
+              </a:schemeClr>
+            </a:lnRef>
+            <a:fillRef idx="1">
+              <a:schemeClr val="accent1"/>
+            </a:fillRef>
+            <a:effectRef idx="0">
+              <a:schemeClr val="accent1"/>
+            </a:effectRef>
+            <a:fontRef idx="minor">
+              <a:schemeClr val="lt1"/>
+            </a:fontRef>
+          </p:style>
+          <p:txBody>
+            <a:bodyPr rtlCol="0" anchor="ctr"/>
+            <a:lstStyle/>
+            <a:p>
+              <a:pPr algn="ctr"/>
+              <a:r>
+                <a:rPr lang="en-US" dirty="0"/>
+                <a:t>Weather</a:t>
+              </a:r>
+            </a:p>
+          </p:txBody>
+        </p:sp>
+        <p:sp>
+          <p:nvSpPr>
+            <p:cNvPr id="20" name="Rectangle 19">
+              <a:extLst>
+                <a:ext uri="{FF2B5EF4-FFF2-40B4-BE49-F238E27FC236}">
+                  <a16:creationId xmlns:a16="http://schemas.microsoft.com/office/drawing/2014/main" id="{448F6951-DC44-BDE2-A049-562BD9412D46}"/>
+                </a:ext>
+              </a:extLst>
+            </p:cNvPr>
+            <p:cNvSpPr/>
+            <p:nvPr/>
+          </p:nvSpPr>
+          <p:spPr>
+            <a:xfrm>
+              <a:off x="7116822" y="4152854"/>
+              <a:ext cx="1040961" cy="572700"/>
+            </a:xfrm>
+            <a:prstGeom prst="rect">
+              <a:avLst/>
+            </a:prstGeom>
+            <a:ln>
+              <a:solidFill>
+                <a:schemeClr val="tx1"/>
+              </a:solidFill>
+            </a:ln>
+          </p:spPr>
+          <p:style>
+            <a:lnRef idx="2">
+              <a:schemeClr val="accent1">
+                <a:shade val="15000"/>
+              </a:schemeClr>
+            </a:lnRef>
+            <a:fillRef idx="1">
+              <a:schemeClr val="accent1"/>
+            </a:fillRef>
+            <a:effectRef idx="0">
+              <a:schemeClr val="accent1"/>
+            </a:effectRef>
+            <a:fontRef idx="minor">
+              <a:schemeClr val="lt1"/>
+            </a:fontRef>
+          </p:style>
+          <p:txBody>
+            <a:bodyPr rtlCol="0" anchor="ctr"/>
+            <a:lstStyle/>
+            <a:p>
+              <a:pPr algn="ctr"/>
+              <a:r>
+                <a:rPr lang="en-US" dirty="0"/>
+                <a:t>…</a:t>
+              </a:r>
+            </a:p>
+          </p:txBody>
+        </p:sp>
+        <p:cxnSp>
+          <p:nvCxnSpPr>
+            <p:cNvPr id="21" name="Straight Arrow Connector 20">
+              <a:extLst>
+                <a:ext uri="{FF2B5EF4-FFF2-40B4-BE49-F238E27FC236}">
+                  <a16:creationId xmlns:a16="http://schemas.microsoft.com/office/drawing/2014/main" id="{3BBFDB2C-1439-2B5F-DA56-23E763CF621F}"/>
+                </a:ext>
+              </a:extLst>
+            </p:cNvPr>
+            <p:cNvCxnSpPr>
+              <a:cxnSpLocks/>
+              <a:stCxn id="8" idx="2"/>
+              <a:endCxn id="10" idx="0"/>
+            </p:cNvCxnSpPr>
+            <p:nvPr/>
+          </p:nvCxnSpPr>
+          <p:spPr>
+            <a:xfrm>
+              <a:off x="6302796" y="2523140"/>
+              <a:ext cx="559187" cy="484089"/>
+            </a:xfrm>
+            <a:prstGeom prst="straightConnector1">
+              <a:avLst/>
+            </a:prstGeom>
+            <a:ln w="38100">
+              <a:solidFill>
+                <a:srgbClr val="C00000"/>
+              </a:solidFill>
+              <a:tailEnd type="triangle"/>
+            </a:ln>
+          </p:spPr>
+          <p:style>
+            <a:lnRef idx="1">
+              <a:schemeClr val="accent1"/>
+            </a:lnRef>
+            <a:fillRef idx="0">
+              <a:schemeClr val="accent1"/>
+            </a:fillRef>
+            <a:effectRef idx="0">
+              <a:schemeClr val="accent1"/>
+            </a:effectRef>
+            <a:fontRef idx="minor">
+              <a:schemeClr val="tx1"/>
+            </a:fontRef>
+          </p:style>
+        </p:cxnSp>
+        <p:cxnSp>
+          <p:nvCxnSpPr>
+            <p:cNvPr id="25" name="Straight Arrow Connector 24">
+              <a:extLst>
+                <a:ext uri="{FF2B5EF4-FFF2-40B4-BE49-F238E27FC236}">
+                  <a16:creationId xmlns:a16="http://schemas.microsoft.com/office/drawing/2014/main" id="{4955AD1C-EABE-1562-B830-6CC3A63D02C0}"/>
+                </a:ext>
+              </a:extLst>
+            </p:cNvPr>
+            <p:cNvCxnSpPr>
+              <a:cxnSpLocks/>
+              <a:stCxn id="8" idx="2"/>
+              <a:endCxn id="11" idx="0"/>
+            </p:cNvCxnSpPr>
+            <p:nvPr/>
+          </p:nvCxnSpPr>
+          <p:spPr>
+            <a:xfrm flipH="1">
+              <a:off x="5475808" y="2523140"/>
+              <a:ext cx="826988" cy="435343"/>
+            </a:xfrm>
+            <a:prstGeom prst="straightConnector1">
+              <a:avLst/>
+            </a:prstGeom>
+            <a:ln w="38100">
+              <a:solidFill>
+                <a:srgbClr val="C00000"/>
+              </a:solidFill>
+              <a:tailEnd type="triangle"/>
+            </a:ln>
+          </p:spPr>
+          <p:style>
+            <a:lnRef idx="1">
+              <a:schemeClr val="accent1"/>
+            </a:lnRef>
+            <a:fillRef idx="0">
+              <a:schemeClr val="accent1"/>
+            </a:fillRef>
+            <a:effectRef idx="0">
+              <a:schemeClr val="accent1"/>
+            </a:effectRef>
+            <a:fontRef idx="minor">
+              <a:schemeClr val="tx1"/>
+            </a:fontRef>
+          </p:style>
+        </p:cxnSp>
+        <p:cxnSp>
+          <p:nvCxnSpPr>
+            <p:cNvPr id="28" name="Straight Arrow Connector 27">
+              <a:extLst>
+                <a:ext uri="{FF2B5EF4-FFF2-40B4-BE49-F238E27FC236}">
+                  <a16:creationId xmlns:a16="http://schemas.microsoft.com/office/drawing/2014/main" id="{58225C99-9855-4D42-F45E-BCE796BB5108}"/>
+                </a:ext>
+              </a:extLst>
+            </p:cNvPr>
+            <p:cNvCxnSpPr>
+              <a:cxnSpLocks/>
+              <a:stCxn id="11" idx="0"/>
+              <a:endCxn id="3" idx="2"/>
+            </p:cNvCxnSpPr>
+            <p:nvPr/>
+          </p:nvCxnSpPr>
+          <p:spPr>
+            <a:xfrm flipH="1" flipV="1">
+              <a:off x="4547949" y="2521742"/>
+              <a:ext cx="927859" cy="436741"/>
+            </a:xfrm>
+            <a:prstGeom prst="straightConnector1">
+              <a:avLst/>
+            </a:prstGeom>
+            <a:ln w="38100">
+              <a:solidFill>
+                <a:srgbClr val="C00000"/>
+              </a:solidFill>
+              <a:tailEnd type="triangle"/>
+            </a:ln>
+          </p:spPr>
+          <p:style>
+            <a:lnRef idx="1">
+              <a:schemeClr val="accent1"/>
+            </a:lnRef>
+            <a:fillRef idx="0">
+              <a:schemeClr val="accent1"/>
+            </a:fillRef>
+            <a:effectRef idx="0">
+              <a:schemeClr val="accent1"/>
+            </a:effectRef>
+            <a:fontRef idx="minor">
+              <a:schemeClr val="tx1"/>
+            </a:fontRef>
+          </p:style>
+        </p:cxnSp>
+      </p:grpSp>
+    </p:spTree>
+    <p:extLst>
+      <p:ext uri="{BB962C8B-B14F-4D97-AF65-F5344CB8AC3E}">
+        <p14:creationId xmlns:p14="http://schemas.microsoft.com/office/powerpoint/2010/main" val="2619485459"/>
+      </p:ext>
+    </p:extLst>
+  </p:cSld>
+  <p:clrMapOvr>
+    <a:masterClrMapping/>
+  </p:clrMapOvr>
+  <p:timing>
+    <p:tnLst>
+      <p:par>
+        <p:cTn id="1" dur="indefinite" restart="never" nodeType="tmRoot">
+          <p:childTnLst>
+            <p:seq concurrent="1" nextAc="seek">
+              <p:cTn id="2" dur="indefinite" nodeType="mainSeq">
+                <p:childTnLst>
+                  <p:par>
+                    <p:cTn id="3" fill="hold">
+                      <p:stCondLst>
+                        <p:cond delay="indefinite"/>
+                      </p:stCondLst>
+                      <p:childTnLst>
+                        <p:par>
+                          <p:cTn id="4" fill="hold">
+                            <p:stCondLst>
+                              <p:cond delay="0"/>
+                            </p:stCondLst>
+                            <p:childTnLst>
+                              <p:par>
+                                <p:cTn id="5" presetID="1" presetClass="entr" presetSubtype="0" fill="hold" nodeType="clickEffect">
+                                  <p:stCondLst>
+                                    <p:cond delay="0"/>
+                                  </p:stCondLst>
+                                  <p:childTnLst>
+                                    <p:set>
+                                      <p:cBhvr>
+                                        <p:cTn id="6" dur="1" fill="hold">
+                                          <p:stCondLst>
+                                            <p:cond delay="0"/>
+                                          </p:stCondLst>
+                                        </p:cTn>
+                                        <p:tgtEl>
+                                          <p:spTgt spid="35"/>
+                                        </p:tgtEl>
+                                        <p:attrNameLst>
+                                          <p:attrName>style.visibility</p:attrName>
+                                        </p:attrNameLst>
+                                      </p:cBhvr>
+                                      <p:to>
+                                        <p:strVal val="visible"/>
+                                      </p:to>
+                                    </p:set>
+                                  </p:childTnLst>
+                                </p:cTn>
+                              </p:par>
+                            </p:childTnLst>
+                          </p:cTn>
+                        </p:par>
+                      </p:childTnLst>
+                    </p:cTn>
+                  </p:par>
+                  <p:par>
+                    <p:cTn id="7" fill="hold">
+                      <p:stCondLst>
+                        <p:cond delay="indefinite"/>
+                      </p:stCondLst>
+                      <p:childTnLst>
+                        <p:par>
+                          <p:cTn id="8" fill="hold">
+                            <p:stCondLst>
+                              <p:cond delay="0"/>
+                            </p:stCondLst>
+                            <p:childTnLst>
+                              <p:par>
+                                <p:cTn id="9" presetID="1" presetClass="entr" presetSubtype="0" fill="hold" nodeType="clickEffect">
+                                  <p:stCondLst>
+                                    <p:cond delay="0"/>
+                                  </p:stCondLst>
+                                  <p:childTnLst>
+                                    <p:set>
+                                      <p:cBhvr>
+                                        <p:cTn id="10" dur="1" fill="hold">
+                                          <p:stCondLst>
+                                            <p:cond delay="0"/>
+                                          </p:stCondLst>
+                                        </p:cTn>
+                                        <p:tgtEl>
+                                          <p:spTgt spid="36"/>
+                                        </p:tgtEl>
+                                        <p:attrNameLst>
+                                          <p:attrName>style.visibility</p:attrName>
+                                        </p:attrNameLst>
+                                      </p:cBhvr>
+                                      <p:to>
+                                        <p:strVal val="visible"/>
+                                      </p:to>
+                                    </p:set>
+                                  </p:childTnLst>
+                                </p:cTn>
+                              </p:par>
+                            </p:childTnLst>
+                          </p:cTn>
+                        </p:par>
+                      </p:childTnLst>
+                    </p:cTn>
+                  </p:par>
+                </p:childTnLst>
+              </p:cTn>
+              <p:prevCondLst>
+                <p:cond evt="onPrev" delay="0">
+                  <p:tgtEl>
+                    <p:sldTgt/>
+                  </p:tgtEl>
+                </p:cond>
+              </p:prevCondLst>
+              <p:nextCondLst>
+                <p:cond evt="onNext" delay="0">
+                  <p:tgtEl>
+                    <p:sldTgt/>
+                  </p:tgtEl>
+                </p:cond>
+              </p:nextCondLst>
+            </p:seq>
+          </p:childTnLst>
+        </p:cTn>
+      </p:par>
+    </p:tnLst>
+  </p:timing>
+</p:sld>
+</file>
+
+<file path=ppt/slides/slide5.xml><?xml version="1.0" encoding="utf-8"?>
+<p:sld xmlns:a="http://schemas.openxmlformats.org/drawingml/2006/main" xmlns:r="http://schemas.openxmlformats.org/officeDocument/2006/relationships" xmlns:p="http://schemas.openxmlformats.org/presentationml/2006/main">
+  <p:cSld>
+    <p:spTree>
+      <p:nvGrpSpPr>
+        <p:cNvPr id="1" name="Shape 145">
+          <a:extLst>
+            <a:ext uri="{FF2B5EF4-FFF2-40B4-BE49-F238E27FC236}">
+              <a16:creationId xmlns:a16="http://schemas.microsoft.com/office/drawing/2014/main" id="{76F517FE-09F1-1A31-73E9-EF3BE4ED3559}"/>
+            </a:ext>
+          </a:extLst>
+        </p:cNvPr>
+        <p:cNvGrpSpPr/>
+        <p:nvPr/>
+      </p:nvGrpSpPr>
+      <p:grpSpPr>
+        <a:xfrm>
+          <a:off x="0" y="0"/>
+          <a:ext cx="0" cy="0"/>
+          <a:chOff x="0" y="0"/>
+          <a:chExt cx="0" cy="0"/>
+        </a:xfrm>
+      </p:grpSpPr>
+      <p:sp>
+        <p:nvSpPr>
+          <p:cNvPr id="5" name="Title 4">
+            <a:extLst>
+              <a:ext uri="{FF2B5EF4-FFF2-40B4-BE49-F238E27FC236}">
+                <a16:creationId xmlns:a16="http://schemas.microsoft.com/office/drawing/2014/main" id="{FFB3C96F-E2A7-1327-94FA-6A237BFF4232}"/>
+              </a:ext>
+            </a:extLst>
+          </p:cNvPr>
+          <p:cNvSpPr>
+            <a:spLocks noGrp="1"/>
+          </p:cNvSpPr>
+          <p:nvPr>
+            <p:ph type="title"/>
+          </p:nvPr>
+        </p:nvSpPr>
+        <p:spPr/>
+        <p:txBody>
+          <a:bodyPr/>
+          <a:lstStyle/>
+          <a:p>
+            <a:r>
+              <a:rPr lang="en-US" dirty="0"/>
+              <a:t>Data modeling parting thoughts</a:t>
+            </a:r>
+          </a:p>
+        </p:txBody>
+      </p:sp>
+      <p:sp>
+        <p:nvSpPr>
+          <p:cNvPr id="6" name="Text Placeholder 5">
+            <a:extLst>
+              <a:ext uri="{FF2B5EF4-FFF2-40B4-BE49-F238E27FC236}">
+                <a16:creationId xmlns:a16="http://schemas.microsoft.com/office/drawing/2014/main" id="{09A529D9-082F-9E12-85C2-378CB2A73E3F}"/>
+              </a:ext>
+            </a:extLst>
+          </p:cNvPr>
+          <p:cNvSpPr>
+            <a:spLocks noGrp="1"/>
+          </p:cNvSpPr>
+          <p:nvPr>
+            <p:ph type="body" idx="1"/>
+          </p:nvPr>
+        </p:nvSpPr>
+        <p:spPr/>
+        <p:txBody>
+          <a:bodyPr/>
+          <a:lstStyle/>
+          <a:p>
+            <a:r>
+              <a:rPr lang="en-US" dirty="0"/>
+              <a:t>Effective modeling depends on functional needs</a:t>
+            </a:r>
+          </a:p>
+          <a:p>
+            <a:pPr lvl="1"/>
+            <a:endParaRPr lang="en-US" dirty="0">
+              <a:latin typeface="Avenir Book" panose="02000503020000020003" pitchFamily="2" charset="0"/>
+            </a:endParaRPr>
+          </a:p>
+          <a:p>
+            <a:r>
+              <a:rPr lang="en-US" dirty="0"/>
+              <a:t>Data entry</a:t>
+            </a:r>
+          </a:p>
+          <a:p>
+            <a:pPr lvl="1"/>
+            <a:r>
+              <a:rPr lang="en-US" dirty="0">
+                <a:latin typeface="Avenir Book" panose="02000503020000020003" pitchFamily="2" charset="0"/>
+              </a:rPr>
+              <a:t>Recall table with species counts listed in wide format</a:t>
+            </a:r>
+          </a:p>
+          <a:p>
+            <a:r>
+              <a:rPr lang="en-US" dirty="0"/>
+              <a:t>Transactional</a:t>
+            </a:r>
+          </a:p>
+          <a:p>
+            <a:pPr lvl="1"/>
+            <a:r>
+              <a:rPr lang="en-US" dirty="0">
+                <a:latin typeface="Avenir Book" panose="02000503020000020003" pitchFamily="2" charset="0"/>
+              </a:rPr>
+              <a:t>Might split one entity into different tables</a:t>
+            </a:r>
+          </a:p>
+          <a:p>
+            <a:r>
+              <a:rPr lang="en-US" dirty="0"/>
+              <a:t>Analytical</a:t>
+            </a:r>
+          </a:p>
+          <a:p>
+            <a:pPr lvl="1"/>
+            <a:r>
+              <a:rPr lang="en-US" dirty="0">
+                <a:latin typeface="Avenir Book" panose="02000503020000020003" pitchFamily="2" charset="0"/>
+              </a:rPr>
+              <a:t>Might </a:t>
+            </a:r>
+            <a:r>
+              <a:rPr lang="en-US" dirty="0" err="1">
+                <a:latin typeface="Avenir Book" panose="02000503020000020003" pitchFamily="2" charset="0"/>
+              </a:rPr>
+              <a:t>denormalize</a:t>
+            </a:r>
+            <a:r>
+              <a:rPr lang="en-US" dirty="0">
+                <a:latin typeface="Avenir Book" panose="02000503020000020003" pitchFamily="2" charset="0"/>
+              </a:rPr>
+              <a:t>, even down to one table, for simplicity/sanity</a:t>
+            </a:r>
+          </a:p>
+        </p:txBody>
+      </p:sp>
+      <p:sp>
+        <p:nvSpPr>
+          <p:cNvPr id="7" name="Slide Number Placeholder 6">
+            <a:extLst>
+              <a:ext uri="{FF2B5EF4-FFF2-40B4-BE49-F238E27FC236}">
+                <a16:creationId xmlns:a16="http://schemas.microsoft.com/office/drawing/2014/main" id="{6518E294-B705-30FA-40D4-EB5E084F59A8}"/>
+              </a:ext>
+            </a:extLst>
+          </p:cNvPr>
+          <p:cNvSpPr>
+            <a:spLocks noGrp="1"/>
+          </p:cNvSpPr>
+          <p:nvPr>
+            <p:ph type="sldNum" idx="12"/>
+          </p:nvPr>
+        </p:nvSpPr>
+        <p:spPr/>
+        <p:txBody>
+          <a:bodyPr/>
+          <a:lstStyle/>
+          <a:p>
+            <a:pPr marL="0" lvl="0" indent="0" algn="r" rtl="0">
+              <a:spcBef>
+                <a:spcPts val="0"/>
+              </a:spcBef>
+              <a:spcAft>
+                <a:spcPts val="0"/>
+              </a:spcAft>
+              <a:buNone/>
+            </a:pPr>
+            <a:fld id="{00000000-1234-1234-1234-123412341234}" type="slidenum">
+              <a:rPr lang="en" smtClean="0"/>
+              <a:t>5</a:t>
+            </a:fld>
+            <a:endParaRPr lang="en" dirty="0"/>
+          </a:p>
+        </p:txBody>
+      </p:sp>
+    </p:spTree>
+    <p:extLst>
+      <p:ext uri="{BB962C8B-B14F-4D97-AF65-F5344CB8AC3E}">
+        <p14:creationId xmlns:p14="http://schemas.microsoft.com/office/powerpoint/2010/main" val="1326784781"/>
+      </p:ext>
+    </p:extLst>
+  </p:cSld>
+  <p:clrMapOvr>
+    <a:masterClrMapping/>
+  </p:clrMapOvr>
+</p:sld>
+</file>
+
 <file path=ppt/slides/slide6.xml><?xml version="1.0" encoding="utf-8"?>
+<p:sld xmlns:a="http://schemas.openxmlformats.org/drawingml/2006/main" xmlns:r="http://schemas.openxmlformats.org/officeDocument/2006/relationships" xmlns:p="http://schemas.openxmlformats.org/presentationml/2006/main">
+  <p:cSld>
+    <p:spTree>
+      <p:nvGrpSpPr>
+        <p:cNvPr id="1" name="">
+          <a:extLst>
+            <a:ext uri="{FF2B5EF4-FFF2-40B4-BE49-F238E27FC236}">
+              <a16:creationId xmlns:a16="http://schemas.microsoft.com/office/drawing/2014/main" id="{7865C796-DEEA-6AA6-8BCA-2CA021740EB2}"/>
+            </a:ext>
+          </a:extLst>
+        </p:cNvPr>
+        <p:cNvGrpSpPr/>
+        <p:nvPr/>
+      </p:nvGrpSpPr>
+      <p:grpSpPr>
+        <a:xfrm>
+          <a:off x="0" y="0"/>
+          <a:ext cx="0" cy="0"/>
+          <a:chOff x="0" y="0"/>
+          <a:chExt cx="0" cy="0"/>
+        </a:xfrm>
+      </p:grpSpPr>
+      <p:sp>
+        <p:nvSpPr>
+          <p:cNvPr id="2" name="Title 1">
+            <a:extLst>
+              <a:ext uri="{FF2B5EF4-FFF2-40B4-BE49-F238E27FC236}">
+                <a16:creationId xmlns:a16="http://schemas.microsoft.com/office/drawing/2014/main" id="{55E15880-FA24-58C4-AF9D-CF96C5612B29}"/>
+              </a:ext>
+            </a:extLst>
+          </p:cNvPr>
+          <p:cNvSpPr>
+            <a:spLocks noGrp="1"/>
+          </p:cNvSpPr>
+          <p:nvPr>
+            <p:ph type="title"/>
+          </p:nvPr>
+        </p:nvSpPr>
+        <p:spPr/>
+        <p:txBody>
+          <a:bodyPr/>
+          <a:lstStyle/>
+          <a:p>
+            <a:r>
+              <a:rPr lang="en-US" dirty="0"/>
+              <a:t>Good idea or not?</a:t>
+            </a:r>
+          </a:p>
+        </p:txBody>
+      </p:sp>
+      <p:sp>
+        <p:nvSpPr>
+          <p:cNvPr id="4" name="Slide Number Placeholder 3">
+            <a:extLst>
+              <a:ext uri="{FF2B5EF4-FFF2-40B4-BE49-F238E27FC236}">
+                <a16:creationId xmlns:a16="http://schemas.microsoft.com/office/drawing/2014/main" id="{50D84AFA-A2D5-9DF1-1CC7-4043A598639C}"/>
+              </a:ext>
+            </a:extLst>
+          </p:cNvPr>
+          <p:cNvSpPr>
+            <a:spLocks noGrp="1"/>
+          </p:cNvSpPr>
+          <p:nvPr>
+            <p:ph type="sldNum" idx="12"/>
+          </p:nvPr>
+        </p:nvSpPr>
+        <p:spPr/>
+        <p:txBody>
+          <a:bodyPr/>
+          <a:lstStyle/>
+          <a:p>
+            <a:pPr marL="0" lvl="0" indent="0" algn="r" rtl="0">
+              <a:spcBef>
+                <a:spcPts val="0"/>
+              </a:spcBef>
+              <a:spcAft>
+                <a:spcPts val="0"/>
+              </a:spcAft>
+              <a:buNone/>
+            </a:pPr>
+            <a:fld id="{00000000-1234-1234-1234-123412341234}" type="slidenum">
+              <a:rPr lang="en" smtClean="0"/>
+              <a:t>6</a:t>
+            </a:fld>
+            <a:endParaRPr lang="en" dirty="0"/>
+          </a:p>
+        </p:txBody>
+      </p:sp>
+      <p:graphicFrame>
+        <p:nvGraphicFramePr>
+          <p:cNvPr id="6" name="Table 5">
+            <a:extLst>
+              <a:ext uri="{FF2B5EF4-FFF2-40B4-BE49-F238E27FC236}">
+                <a16:creationId xmlns:a16="http://schemas.microsoft.com/office/drawing/2014/main" id="{6A46DF75-C4BD-91F6-6F64-175BF807C7AF}"/>
+              </a:ext>
+            </a:extLst>
+          </p:cNvPr>
+          <p:cNvGraphicFramePr>
+            <a:graphicFrameLocks noGrp="1"/>
+          </p:cNvGraphicFramePr>
+          <p:nvPr>
+            <p:extLst>
+              <p:ext uri="{D42A27DB-BD31-4B8C-83A1-F6EECF244321}">
+                <p14:modId xmlns:p14="http://schemas.microsoft.com/office/powerpoint/2010/main" val="1796233810"/>
+              </p:ext>
+            </p:extLst>
+          </p:nvPr>
+        </p:nvGraphicFramePr>
+        <p:xfrm>
+          <a:off x="3028427" y="1624957"/>
+          <a:ext cx="2792031" cy="2630442"/>
+        </p:xfrm>
+        <a:graphic>
+          <a:graphicData uri="http://schemas.openxmlformats.org/drawingml/2006/table">
+            <a:tbl>
+              <a:tblPr firstRow="1" bandRow="1">
+                <a:tableStyleId>{5C22544A-7EE6-4342-B048-85BDC9FD1C3A}</a:tableStyleId>
+              </a:tblPr>
+              <a:tblGrid>
+                <a:gridCol w="1344930">
+                  <a:extLst>
+                    <a:ext uri="{9D8B030D-6E8A-4147-A177-3AD203B41FA5}">
+                      <a16:colId xmlns:a16="http://schemas.microsoft.com/office/drawing/2014/main" val="3496730573"/>
+                    </a:ext>
+                  </a:extLst>
+                </a:gridCol>
+                <a:gridCol w="1447101">
+                  <a:extLst>
+                    <a:ext uri="{9D8B030D-6E8A-4147-A177-3AD203B41FA5}">
+                      <a16:colId xmlns:a16="http://schemas.microsoft.com/office/drawing/2014/main" val="3590654764"/>
+                    </a:ext>
+                  </a:extLst>
+                </a:gridCol>
+              </a:tblGrid>
+              <a:tr h="438407">
+                <a:tc gridSpan="2">
+                  <a:txBody>
+                    <a:bodyPr/>
+                    <a:lstStyle/>
+                    <a:p>
+                      <a:pPr algn="ctr"/>
+                      <a:r>
+                        <a:rPr lang="en-US" dirty="0"/>
+                        <a:t>House</a:t>
+                      </a:r>
+                    </a:p>
+                  </a:txBody>
+                  <a:tcPr/>
+                </a:tc>
+                <a:tc hMerge="1">
+                  <a:txBody>
+                    <a:bodyPr/>
+                    <a:lstStyle/>
+                    <a:p>
+                      <a:endParaRPr lang="en-US" dirty="0"/>
+                    </a:p>
+                  </a:txBody>
+                  <a:tcPr/>
+                </a:tc>
+                <a:extLst>
+                  <a:ext uri="{0D108BD9-81ED-4DB2-BD59-A6C34878D82A}">
+                    <a16:rowId xmlns:a16="http://schemas.microsoft.com/office/drawing/2014/main" val="693708830"/>
+                  </a:ext>
+                </a:extLst>
+              </a:tr>
+              <a:tr h="438407">
+                <a:tc>
+                  <a:txBody>
+                    <a:bodyPr/>
+                    <a:lstStyle/>
+                    <a:p>
+                      <a:r>
+                        <a:rPr lang="en-US" dirty="0" err="1"/>
+                        <a:t>House_ID</a:t>
+                      </a:r>
+                      <a:endParaRPr lang="en-US" dirty="0"/>
+                    </a:p>
+                  </a:txBody>
+                  <a:tcPr/>
+                </a:tc>
+                <a:tc>
+                  <a:txBody>
+                    <a:bodyPr/>
+                    <a:lstStyle/>
+                    <a:p>
+                      <a:r>
+                        <a:rPr lang="en-US" dirty="0"/>
+                        <a:t>integer (PK)</a:t>
+                      </a:r>
+                    </a:p>
+                  </a:txBody>
+                  <a:tcPr/>
+                </a:tc>
+                <a:extLst>
+                  <a:ext uri="{0D108BD9-81ED-4DB2-BD59-A6C34878D82A}">
+                    <a16:rowId xmlns:a16="http://schemas.microsoft.com/office/drawing/2014/main" val="3985099677"/>
+                  </a:ext>
+                </a:extLst>
+              </a:tr>
+              <a:tr h="438407">
+                <a:tc>
+                  <a:txBody>
+                    <a:bodyPr/>
+                    <a:lstStyle/>
+                    <a:p>
+                      <a:r>
+                        <a:rPr lang="en-US" dirty="0"/>
+                        <a:t>Name</a:t>
+                      </a:r>
+                    </a:p>
+                  </a:txBody>
+                  <a:tcPr/>
+                </a:tc>
+                <a:tc>
+                  <a:txBody>
+                    <a:bodyPr/>
+                    <a:lstStyle/>
+                    <a:p>
+                      <a:r>
+                        <a:rPr lang="en-US" dirty="0"/>
+                        <a:t>text</a:t>
+                      </a:r>
+                    </a:p>
+                  </a:txBody>
+                  <a:tcPr/>
+                </a:tc>
+                <a:extLst>
+                  <a:ext uri="{0D108BD9-81ED-4DB2-BD59-A6C34878D82A}">
+                    <a16:rowId xmlns:a16="http://schemas.microsoft.com/office/drawing/2014/main" val="1504382681"/>
+                  </a:ext>
+                </a:extLst>
+              </a:tr>
+              <a:tr h="438407">
+                <a:tc>
+                  <a:txBody>
+                    <a:bodyPr/>
+                    <a:lstStyle/>
+                    <a:p>
+                      <a:r>
+                        <a:rPr lang="en-US" dirty="0"/>
+                        <a:t>Housemaster</a:t>
+                      </a:r>
+                    </a:p>
+                  </a:txBody>
+                  <a:tcPr/>
+                </a:tc>
+                <a:tc>
+                  <a:txBody>
+                    <a:bodyPr/>
+                    <a:lstStyle/>
+                    <a:p>
+                      <a:r>
+                        <a:rPr lang="en-US" dirty="0"/>
+                        <a:t>text</a:t>
+                      </a:r>
+                    </a:p>
+                  </a:txBody>
+                  <a:tcPr/>
+                </a:tc>
+                <a:extLst>
+                  <a:ext uri="{0D108BD9-81ED-4DB2-BD59-A6C34878D82A}">
+                    <a16:rowId xmlns:a16="http://schemas.microsoft.com/office/drawing/2014/main" val="2810616037"/>
+                  </a:ext>
+                </a:extLst>
+              </a:tr>
+              <a:tr h="438407">
+                <a:tc>
+                  <a:txBody>
+                    <a:bodyPr/>
+                    <a:lstStyle/>
+                    <a:p>
+                      <a:r>
+                        <a:rPr lang="en-US" dirty="0"/>
+                        <a:t>Animal</a:t>
+                      </a:r>
+                    </a:p>
+                  </a:txBody>
+                  <a:tcPr/>
+                </a:tc>
+                <a:tc>
+                  <a:txBody>
+                    <a:bodyPr/>
+                    <a:lstStyle/>
+                    <a:p>
+                      <a:r>
+                        <a:rPr lang="en-US" dirty="0"/>
+                        <a:t>text</a:t>
+                      </a:r>
+                    </a:p>
+                  </a:txBody>
+                  <a:tcPr/>
+                </a:tc>
+                <a:extLst>
+                  <a:ext uri="{0D108BD9-81ED-4DB2-BD59-A6C34878D82A}">
+                    <a16:rowId xmlns:a16="http://schemas.microsoft.com/office/drawing/2014/main" val="923745993"/>
+                  </a:ext>
+                </a:extLst>
+              </a:tr>
+              <a:tr h="438407">
+                <a:tc>
+                  <a:txBody>
+                    <a:bodyPr/>
+                    <a:lstStyle/>
+                    <a:p>
+                      <a:r>
+                        <a:rPr lang="en-US" dirty="0" err="1"/>
+                        <a:t>Num_students</a:t>
+                      </a:r>
+                      <a:endParaRPr lang="en-US" dirty="0"/>
+                    </a:p>
+                  </a:txBody>
+                  <a:tcPr/>
+                </a:tc>
+                <a:tc>
+                  <a:txBody>
+                    <a:bodyPr/>
+                    <a:lstStyle/>
+                    <a:p>
+                      <a:r>
+                        <a:rPr lang="en-US" dirty="0"/>
+                        <a:t>integer</a:t>
+                      </a:r>
+                    </a:p>
+                  </a:txBody>
+                  <a:tcPr/>
+                </a:tc>
+                <a:extLst>
+                  <a:ext uri="{0D108BD9-81ED-4DB2-BD59-A6C34878D82A}">
+                    <a16:rowId xmlns:a16="http://schemas.microsoft.com/office/drawing/2014/main" val="2227801376"/>
+                  </a:ext>
+                </a:extLst>
+              </a:tr>
+            </a:tbl>
+          </a:graphicData>
+        </a:graphic>
+      </p:graphicFrame>
+      <p:sp>
+        <p:nvSpPr>
+          <p:cNvPr id="11" name="Right Arrow 10">
+            <a:extLst>
+              <a:ext uri="{FF2B5EF4-FFF2-40B4-BE49-F238E27FC236}">
+                <a16:creationId xmlns:a16="http://schemas.microsoft.com/office/drawing/2014/main" id="{16A2A594-B48E-2BE6-5824-5910FE93FC0A}"/>
+              </a:ext>
+            </a:extLst>
+          </p:cNvPr>
+          <p:cNvSpPr/>
+          <p:nvPr/>
+        </p:nvSpPr>
+        <p:spPr>
+          <a:xfrm>
+            <a:off x="2290194" y="3934437"/>
+            <a:ext cx="545284" cy="184558"/>
+          </a:xfrm>
+          <a:prstGeom prst="rightArrow">
+            <a:avLst/>
+          </a:prstGeom>
+          <a:solidFill>
+            <a:srgbClr val="C00000"/>
+          </a:solidFill>
+          <a:ln>
+            <a:noFill/>
+          </a:ln>
+        </p:spPr>
+        <p:style>
+          <a:lnRef idx="2">
+            <a:schemeClr val="accent1">
+              <a:shade val="15000"/>
+            </a:schemeClr>
+          </a:lnRef>
+          <a:fillRef idx="1">
+            <a:schemeClr val="accent1"/>
+          </a:fillRef>
+          <a:effectRef idx="0">
+            <a:schemeClr val="accent1"/>
+          </a:effectRef>
+          <a:fontRef idx="minor">
+            <a:schemeClr val="lt1"/>
+          </a:fontRef>
+        </p:style>
+        <p:txBody>
+          <a:bodyPr rtlCol="0" anchor="ctr"/>
+          <a:lstStyle/>
+          <a:p>
+            <a:pPr algn="ctr"/>
+            <a:endParaRPr lang="en-US"/>
+          </a:p>
+        </p:txBody>
+      </p:sp>
+    </p:spTree>
+    <p:extLst>
+      <p:ext uri="{BB962C8B-B14F-4D97-AF65-F5344CB8AC3E}">
+        <p14:creationId xmlns:p14="http://schemas.microsoft.com/office/powerpoint/2010/main" val="2365527945"/>
+      </p:ext>
+    </p:extLst>
+  </p:cSld>
+  <p:clrMapOvr>
+    <a:masterClrMapping/>
+  </p:clrMapOvr>
+</p:sld>
+</file>
+
+<file path=ppt/slides/slide7.xml><?xml version="1.0" encoding="utf-8"?>
 <p:sld xmlns:a="http://schemas.openxmlformats.org/drawingml/2006/main" xmlns:r="http://schemas.openxmlformats.org/officeDocument/2006/relationships" xmlns:p="http://schemas.openxmlformats.org/presentationml/2006/main">
   <p:cSld>
     <p:spTree>
@@ -17357,7 +17857,7 @@
           <a:p>
             <a:r>
               <a:rPr lang="en-US" dirty="0"/>
-              <a:t>SQL’s role and nature</a:t>
+              <a:t>Relational database – why?</a:t>
             </a:r>
           </a:p>
         </p:txBody>
@@ -17384,56 +17884,10 @@
           <a:lstStyle/>
           <a:p>
             <a:r>
-              <a:rPr lang="en-US" dirty="0"/>
-              <a:t>Standardized language</a:t>
-            </a:r>
-          </a:p>
-          <a:p>
-            <a:pPr lvl="1"/>
-            <a:r>
               <a:rPr lang="en-US" dirty="0">
                 <a:latin typeface="Avenir Book" panose="02000503020000020003" pitchFamily="2" charset="0"/>
               </a:rPr>
-              <a:t>For defining, accessing, managing data in RDBMS</a:t>
-            </a:r>
-          </a:p>
-          <a:p>
-            <a:pPr lvl="1"/>
-            <a:r>
-              <a:rPr lang="en-US" dirty="0">
-                <a:latin typeface="Avenir Book" panose="02000503020000020003" pitchFamily="2" charset="0"/>
-              </a:rPr>
-              <a:t>The </a:t>
-            </a:r>
-            <a:r>
-              <a:rPr lang="en-US" b="1" i="1" dirty="0">
-                <a:latin typeface="Avenir Book" panose="02000503020000020003" pitchFamily="2" charset="0"/>
-              </a:rPr>
-              <a:t>only</a:t>
-            </a:r>
-            <a:r>
-              <a:rPr lang="en-US" dirty="0">
-                <a:latin typeface="Avenir Book" panose="02000503020000020003" pitchFamily="2" charset="0"/>
-              </a:rPr>
-              <a:t> thing that is standardized</a:t>
-            </a:r>
-          </a:p>
-          <a:p>
-            <a:pPr lvl="2"/>
-            <a:r>
-              <a:rPr lang="en-US" dirty="0">
-                <a:latin typeface="Avenir Book" panose="02000503020000020003" pitchFamily="2" charset="0"/>
-              </a:rPr>
-              <a:t>Variations in what is supported and how</a:t>
-            </a:r>
-          </a:p>
-          <a:p>
-            <a:pPr lvl="2"/>
-            <a:r>
-              <a:rPr lang="en-US" dirty="0">
-                <a:latin typeface="Avenir Book" panose="02000503020000020003" pitchFamily="2" charset="0"/>
-              </a:rPr>
-              <a:t>Extensions: statements, functions, data types</a:t>
+              <a:t>Want a single, unified view of data</a:t>
             </a:r>
           </a:p>
           <a:p>
@@ -17445,19 +17899,7 @@
           <a:p>
             <a:r>
               <a:rPr lang="en-US" dirty="0"/>
-              <a:t>Also serves as the API</a:t>
-            </a:r>
-          </a:p>
-          <a:p>
-            <a:pPr lvl="1"/>
-            <a:endParaRPr lang="en-US" dirty="0">
-              <a:latin typeface="Avenir Book" panose="02000503020000020003" pitchFamily="2" charset="0"/>
-            </a:endParaRPr>
-          </a:p>
-          <a:p>
-            <a:r>
-              <a:rPr lang="en-US" dirty="0"/>
-              <a:t>Declarative language, not procedural</a:t>
+              <a:t>Work with data too large to fit in memory</a:t>
             </a:r>
           </a:p>
           <a:p>
@@ -17466,7 +17908,49 @@
               <a:rPr lang="en-US" dirty="0">
                 <a:latin typeface="Avenir Book" panose="02000503020000020003" pitchFamily="2" charset="0"/>
               </a:rPr>
-              <a:t>Say what you want, not how to compute it</a:t>
+              <a:t>R/Python </a:t>
+            </a:r>
+            <a:r>
+              <a:rPr lang="en-US" dirty="0" err="1">
+                <a:latin typeface="Avenir Book" panose="02000503020000020003" pitchFamily="2" charset="0"/>
+              </a:rPr>
+              <a:t>dataframes</a:t>
+            </a:r>
+            <a:r>
+              <a:rPr lang="en-US" dirty="0">
+                <a:latin typeface="Avenir Book" panose="02000503020000020003" pitchFamily="2" charset="0"/>
+              </a:rPr>
+              <a:t>: limited to RAM (typically, a few GB)</a:t>
+            </a:r>
+          </a:p>
+          <a:p>
+            <a:pPr lvl="1"/>
+            <a:r>
+              <a:rPr lang="en-US" dirty="0">
+                <a:latin typeface="Avenir Book" panose="02000503020000020003" pitchFamily="2" charset="0"/>
+              </a:rPr>
+              <a:t>Local database (</a:t>
+            </a:r>
+            <a:r>
+              <a:rPr lang="en-US" dirty="0" err="1">
+                <a:latin typeface="Avenir Book" panose="02000503020000020003" pitchFamily="2" charset="0"/>
+              </a:rPr>
+              <a:t>DuckDB</a:t>
+            </a:r>
+            <a:r>
+              <a:rPr lang="en-US" dirty="0">
+                <a:latin typeface="Avenir Book" panose="02000503020000020003" pitchFamily="2" charset="0"/>
+              </a:rPr>
+              <a:t>, SQLite): many GBs, millions of rows</a:t>
+            </a:r>
+          </a:p>
+          <a:p>
+            <a:pPr lvl="1"/>
+            <a:r>
+              <a:rPr lang="en-US" dirty="0">
+                <a:latin typeface="Avenir Book" panose="02000503020000020003" pitchFamily="2" charset="0"/>
+              </a:rPr>
+              <a:t>Client/server database (PostgreSQL, MySQL): many TBs, billions of rows</a:t>
             </a:r>
           </a:p>
         </p:txBody>
@@ -17503,7 +17987,7 @@
             </a:pPr>
             <a:fld id="{00000000-1234-1234-1234-123412341234}" type="slidenum">
               <a:rPr lang="en" smtClean="0"/>
-              <a:t>6</a:t>
+              <a:t>7</a:t>
             </a:fld>
             <a:endParaRPr lang="en" dirty="0"/>
           </a:p>
@@ -17522,12 +18006,18 @@
 </p:sld>
 </file>
 
-<file path=ppt/slides/slide7.xml><?xml version="1.0" encoding="utf-8"?>
+<file path=ppt/slides/slide8.xml><?xml version="1.0" encoding="utf-8"?>
 <p:sld xmlns:a="http://schemas.openxmlformats.org/drawingml/2006/main" xmlns:r="http://schemas.openxmlformats.org/officeDocument/2006/relationships" xmlns:p="http://schemas.openxmlformats.org/presentationml/2006/main">
   <p:cSld>
     <p:spTree>
       <p:nvGrpSpPr>
-        <p:cNvPr id="1" name=""/>
+        <p:cNvPr id="1" name="">
+          <a:extLst>
+            <a:ext uri="{FF2B5EF4-FFF2-40B4-BE49-F238E27FC236}">
+              <a16:creationId xmlns:a16="http://schemas.microsoft.com/office/drawing/2014/main" id="{9FF4AD24-4610-FB70-E60C-D243529A50EE}"/>
+            </a:ext>
+          </a:extLst>
+        </p:cNvPr>
         <p:cNvGrpSpPr/>
         <p:nvPr/>
       </p:nvGrpSpPr>
@@ -17541,57 +18031,10 @@
       </p:grpSpPr>
       <p:sp>
         <p:nvSpPr>
-          <p:cNvPr id="39" name="Rectangle 38">
-            <a:extLst>
-              <a:ext uri="{FF2B5EF4-FFF2-40B4-BE49-F238E27FC236}">
-                <a16:creationId xmlns:a16="http://schemas.microsoft.com/office/drawing/2014/main" id="{803A93A7-1D54-2726-F751-ADD9C09F962C}"/>
-              </a:ext>
-            </a:extLst>
-          </p:cNvPr>
-          <p:cNvSpPr/>
-          <p:nvPr/>
-        </p:nvSpPr>
-        <p:spPr>
-          <a:xfrm>
-            <a:off x="2378990" y="1325103"/>
-            <a:ext cx="6453310" cy="3713142"/>
-          </a:xfrm>
-          <a:prstGeom prst="rect">
-            <a:avLst/>
-          </a:prstGeom>
-          <a:noFill/>
-        </p:spPr>
-        <p:style>
-          <a:lnRef idx="2">
-            <a:schemeClr val="accent1">
-              <a:shade val="50000"/>
-            </a:schemeClr>
-          </a:lnRef>
-          <a:fillRef idx="1">
-            <a:schemeClr val="accent1"/>
-          </a:fillRef>
-          <a:effectRef idx="0">
-            <a:schemeClr val="accent1"/>
-          </a:effectRef>
-          <a:fontRef idx="minor">
-            <a:schemeClr val="lt1"/>
-          </a:fontRef>
-        </p:style>
-        <p:txBody>
-          <a:bodyPr rtlCol="0" anchor="ctr"/>
-          <a:lstStyle/>
-          <a:p>
-            <a:pPr algn="ctr"/>
-            <a:endParaRPr lang="en-US"/>
-          </a:p>
-        </p:txBody>
-      </p:sp>
-      <p:sp>
-        <p:nvSpPr>
           <p:cNvPr id="2" name="Title 1">
             <a:extLst>
               <a:ext uri="{FF2B5EF4-FFF2-40B4-BE49-F238E27FC236}">
-                <a16:creationId xmlns:a16="http://schemas.microsoft.com/office/drawing/2014/main" id="{B42369EB-8BFE-7354-0188-66881DABCC1A}"/>
+                <a16:creationId xmlns:a16="http://schemas.microsoft.com/office/drawing/2014/main" id="{F906A274-4896-B334-19E6-E38A6C45B1A9}"/>
               </a:ext>
             </a:extLst>
           </p:cNvPr>
@@ -17609,1161 +18052,497 @@
           <a:p>
             <a:r>
               <a:rPr lang="en-US" dirty="0"/>
-              <a:t>Typical database architecture</a:t>
+              <a:t>Comparison</a:t>
             </a:r>
           </a:p>
         </p:txBody>
       </p:sp>
-      <p:sp>
-        <p:nvSpPr>
-          <p:cNvPr id="4" name="Slide Number Placeholder 3">
+      <p:graphicFrame>
+        <p:nvGraphicFramePr>
+          <p:cNvPr id="13" name="Table 12">
             <a:extLst>
               <a:ext uri="{FF2B5EF4-FFF2-40B4-BE49-F238E27FC236}">
-                <a16:creationId xmlns:a16="http://schemas.microsoft.com/office/drawing/2014/main" id="{F36109F0-5CBF-1DC4-1A10-AAFC7F37A41F}"/>
+                <a16:creationId xmlns:a16="http://schemas.microsoft.com/office/drawing/2014/main" id="{A411C623-20C8-286C-C770-2A5FAD5CCC33}"/>
               </a:ext>
             </a:extLst>
           </p:cNvPr>
-          <p:cNvSpPr>
-            <a:spLocks noGrp="1"/>
-          </p:cNvSpPr>
+          <p:cNvGraphicFramePr>
+            <a:graphicFrameLocks noGrp="1"/>
+          </p:cNvGraphicFramePr>
           <p:nvPr>
-            <p:ph type="sldNum" idx="12"/>
+            <p:extLst>
+              <p:ext uri="{D42A27DB-BD31-4B8C-83A1-F6EECF244321}">
+                <p14:modId xmlns:p14="http://schemas.microsoft.com/office/powerpoint/2010/main" val="3679352385"/>
+              </p:ext>
+            </p:extLst>
           </p:nvPr>
-        </p:nvSpPr>
-        <p:spPr/>
-        <p:txBody>
-          <a:bodyPr/>
-          <a:lstStyle/>
-          <a:p>
-            <a:pPr marL="0" lvl="0" indent="0" algn="r" rtl="0">
-              <a:spcBef>
-                <a:spcPts val="0"/>
-              </a:spcBef>
-              <a:spcAft>
-                <a:spcPts val="0"/>
-              </a:spcAft>
-              <a:buNone/>
-            </a:pPr>
-            <a:fld id="{00000000-1234-1234-1234-123412341234}" type="slidenum">
-              <a:rPr lang="en" smtClean="0"/>
-              <a:t>7</a:t>
-            </a:fld>
-            <a:endParaRPr lang="en" dirty="0"/>
-          </a:p>
-        </p:txBody>
-      </p:sp>
-      <p:sp>
-        <p:nvSpPr>
-          <p:cNvPr id="5" name="Rounded Rectangle 4">
-            <a:extLst>
-              <a:ext uri="{FF2B5EF4-FFF2-40B4-BE49-F238E27FC236}">
-                <a16:creationId xmlns:a16="http://schemas.microsoft.com/office/drawing/2014/main" id="{878CFA0C-D320-6081-F65C-74073F19DDA4}"/>
-              </a:ext>
-            </a:extLst>
-          </p:cNvPr>
-          <p:cNvSpPr/>
-          <p:nvPr/>
-        </p:nvSpPr>
-        <p:spPr>
-          <a:xfrm>
-            <a:off x="4850967" y="1823246"/>
-            <a:ext cx="1635071" cy="433953"/>
-          </a:xfrm>
-          <a:prstGeom prst="roundRect">
-            <a:avLst/>
-          </a:prstGeom>
-        </p:spPr>
-        <p:style>
-          <a:lnRef idx="2">
-            <a:schemeClr val="accent1">
-              <a:shade val="50000"/>
-            </a:schemeClr>
-          </a:lnRef>
-          <a:fillRef idx="1">
-            <a:schemeClr val="accent1"/>
-          </a:fillRef>
-          <a:effectRef idx="0">
-            <a:schemeClr val="accent1"/>
-          </a:effectRef>
-          <a:fontRef idx="minor">
-            <a:schemeClr val="lt1"/>
-          </a:fontRef>
-        </p:style>
-        <p:txBody>
-          <a:bodyPr rtlCol="0" anchor="ctr"/>
-          <a:lstStyle/>
-          <a:p>
-            <a:pPr algn="ctr"/>
-            <a:r>
-              <a:rPr lang="en-US" dirty="0"/>
-              <a:t>Query engine</a:t>
-            </a:r>
-          </a:p>
-        </p:txBody>
-      </p:sp>
-      <p:sp>
-        <p:nvSpPr>
-          <p:cNvPr id="6" name="Rounded Rectangle 5">
-            <a:extLst>
-              <a:ext uri="{FF2B5EF4-FFF2-40B4-BE49-F238E27FC236}">
-                <a16:creationId xmlns:a16="http://schemas.microsoft.com/office/drawing/2014/main" id="{E398B58A-83AD-BE50-D275-B36F49B730BA}"/>
-              </a:ext>
-            </a:extLst>
-          </p:cNvPr>
-          <p:cNvSpPr/>
-          <p:nvPr/>
-        </p:nvSpPr>
-        <p:spPr>
-          <a:xfrm>
-            <a:off x="3781584" y="3153896"/>
-            <a:ext cx="1635071" cy="433953"/>
-          </a:xfrm>
-          <a:prstGeom prst="roundRect">
-            <a:avLst/>
-          </a:prstGeom>
-        </p:spPr>
-        <p:style>
-          <a:lnRef idx="2">
-            <a:schemeClr val="accent1">
-              <a:shade val="50000"/>
-            </a:schemeClr>
-          </a:lnRef>
-          <a:fillRef idx="1">
-            <a:schemeClr val="accent1"/>
-          </a:fillRef>
-          <a:effectRef idx="0">
-            <a:schemeClr val="accent1"/>
-          </a:effectRef>
-          <a:fontRef idx="minor">
-            <a:schemeClr val="lt1"/>
-          </a:fontRef>
-        </p:style>
-        <p:txBody>
-          <a:bodyPr rtlCol="0" anchor="ctr"/>
-          <a:lstStyle/>
-          <a:p>
-            <a:pPr algn="ctr"/>
-            <a:r>
-              <a:rPr lang="en-US" dirty="0"/>
-              <a:t>I/O subsystem</a:t>
-            </a:r>
-          </a:p>
-        </p:txBody>
-      </p:sp>
-      <p:sp>
-        <p:nvSpPr>
-          <p:cNvPr id="7" name="Rounded Rectangle 6">
-            <a:extLst>
-              <a:ext uri="{FF2B5EF4-FFF2-40B4-BE49-F238E27FC236}">
-                <a16:creationId xmlns:a16="http://schemas.microsoft.com/office/drawing/2014/main" id="{001BCC63-7C62-A7AA-EA0D-9FDBDA92E8E8}"/>
-              </a:ext>
-            </a:extLst>
-          </p:cNvPr>
-          <p:cNvSpPr/>
-          <p:nvPr/>
-        </p:nvSpPr>
-        <p:spPr>
-          <a:xfrm>
-            <a:off x="5986217" y="3145048"/>
-            <a:ext cx="1635071" cy="433953"/>
-          </a:xfrm>
-          <a:prstGeom prst="roundRect">
-            <a:avLst/>
-          </a:prstGeom>
-        </p:spPr>
-        <p:style>
-          <a:lnRef idx="2">
-            <a:schemeClr val="accent1">
-              <a:shade val="50000"/>
-            </a:schemeClr>
-          </a:lnRef>
-          <a:fillRef idx="1">
-            <a:schemeClr val="accent1"/>
-          </a:fillRef>
-          <a:effectRef idx="0">
-            <a:schemeClr val="accent1"/>
-          </a:effectRef>
-          <a:fontRef idx="minor">
-            <a:schemeClr val="lt1"/>
-          </a:fontRef>
-        </p:style>
-        <p:txBody>
-          <a:bodyPr rtlCol="0" anchor="ctr"/>
-          <a:lstStyle/>
-          <a:p>
-            <a:pPr algn="ctr"/>
-            <a:r>
-              <a:rPr lang="en-US" dirty="0"/>
-              <a:t>Log manager</a:t>
-            </a:r>
-          </a:p>
-        </p:txBody>
-      </p:sp>
-      <p:sp>
-        <p:nvSpPr>
-          <p:cNvPr id="8" name="Rounded Rectangle 7">
-            <a:extLst>
-              <a:ext uri="{FF2B5EF4-FFF2-40B4-BE49-F238E27FC236}">
-                <a16:creationId xmlns:a16="http://schemas.microsoft.com/office/drawing/2014/main" id="{06336EAE-4364-0DCA-52E8-95429E857012}"/>
-              </a:ext>
-            </a:extLst>
-          </p:cNvPr>
-          <p:cNvSpPr/>
-          <p:nvPr/>
-        </p:nvSpPr>
-        <p:spPr>
-          <a:xfrm>
-            <a:off x="4850967" y="4475698"/>
-            <a:ext cx="1635071" cy="433953"/>
-          </a:xfrm>
-          <a:prstGeom prst="roundRect">
-            <a:avLst/>
-          </a:prstGeom>
-        </p:spPr>
-        <p:style>
-          <a:lnRef idx="2">
-            <a:schemeClr val="accent1">
-              <a:shade val="50000"/>
-            </a:schemeClr>
-          </a:lnRef>
-          <a:fillRef idx="1">
-            <a:schemeClr val="accent1"/>
-          </a:fillRef>
-          <a:effectRef idx="0">
-            <a:schemeClr val="accent1"/>
-          </a:effectRef>
-          <a:fontRef idx="minor">
-            <a:schemeClr val="lt1"/>
-          </a:fontRef>
-        </p:style>
-        <p:txBody>
-          <a:bodyPr rtlCol="0" anchor="ctr"/>
-          <a:lstStyle/>
-          <a:p>
-            <a:pPr algn="ctr"/>
-            <a:r>
-              <a:rPr lang="en-US" dirty="0"/>
-              <a:t>Storage</a:t>
-            </a:r>
-          </a:p>
-        </p:txBody>
-      </p:sp>
-      <p:sp>
-        <p:nvSpPr>
-          <p:cNvPr id="9" name="TextBox 8">
-            <a:extLst>
-              <a:ext uri="{FF2B5EF4-FFF2-40B4-BE49-F238E27FC236}">
-                <a16:creationId xmlns:a16="http://schemas.microsoft.com/office/drawing/2014/main" id="{8A9E462F-40EE-4CF6-147D-61761B7C32DA}"/>
-              </a:ext>
-            </a:extLst>
-          </p:cNvPr>
-          <p:cNvSpPr txBox="1"/>
-          <p:nvPr/>
-        </p:nvSpPr>
-        <p:spPr>
-          <a:xfrm>
-            <a:off x="6486038" y="1458253"/>
-            <a:ext cx="2307515" cy="1107996"/>
-          </a:xfrm>
-          <a:prstGeom prst="rect">
-            <a:avLst/>
-          </a:prstGeom>
-          <a:noFill/>
-        </p:spPr>
-        <p:txBody>
-          <a:bodyPr wrap="square" rtlCol="0">
-            <a:spAutoFit/>
-          </a:bodyPr>
-          <a:lstStyle/>
-          <a:p>
-            <a:r>
-              <a:rPr lang="en-US" sz="1100" dirty="0"/>
-              <a:t>Scheduler</a:t>
-            </a:r>
-          </a:p>
-          <a:p>
-            <a:r>
-              <a:rPr lang="en-US" sz="1100" dirty="0"/>
-              <a:t>Concurrency management</a:t>
-            </a:r>
-          </a:p>
-          <a:p>
-            <a:r>
-              <a:rPr lang="en-US" sz="1100" dirty="0"/>
-              <a:t>Query planning:</a:t>
-            </a:r>
-          </a:p>
-          <a:p>
-            <a:r>
-              <a:rPr lang="en-US" sz="1100" dirty="0"/>
-              <a:t>- Algorithms</a:t>
-            </a:r>
-          </a:p>
-          <a:p>
-            <a:r>
-              <a:rPr lang="en-US" sz="1100" dirty="0"/>
-              <a:t>- Caching, indexes</a:t>
-            </a:r>
-          </a:p>
-          <a:p>
-            <a:r>
-              <a:rPr lang="en-US" sz="1100" dirty="0"/>
-              <a:t>- Statistical distribution of data</a:t>
-            </a:r>
-          </a:p>
-        </p:txBody>
-      </p:sp>
-      <p:sp>
-        <p:nvSpPr>
-          <p:cNvPr id="10" name="TextBox 9">
-            <a:extLst>
-              <a:ext uri="{FF2B5EF4-FFF2-40B4-BE49-F238E27FC236}">
-                <a16:creationId xmlns:a16="http://schemas.microsoft.com/office/drawing/2014/main" id="{058EEC9D-DB64-0CEE-9E24-13B19E11C676}"/>
-              </a:ext>
-            </a:extLst>
-          </p:cNvPr>
-          <p:cNvSpPr txBox="1"/>
-          <p:nvPr/>
-        </p:nvSpPr>
-        <p:spPr>
-          <a:xfrm>
-            <a:off x="2464225" y="2946525"/>
-            <a:ext cx="1384958" cy="830997"/>
-          </a:xfrm>
-          <a:prstGeom prst="rect">
-            <a:avLst/>
-          </a:prstGeom>
-          <a:noFill/>
-        </p:spPr>
-        <p:txBody>
-          <a:bodyPr wrap="square" rtlCol="0">
-            <a:spAutoFit/>
-          </a:bodyPr>
-          <a:lstStyle/>
-          <a:p>
-            <a:r>
-              <a:rPr lang="en-US" sz="1200" dirty="0"/>
-              <a:t>Memory caching</a:t>
-            </a:r>
-          </a:p>
-          <a:p>
-            <a:r>
-              <a:rPr lang="en-US" sz="1200" dirty="0"/>
-              <a:t>Predictive reads</a:t>
-            </a:r>
-          </a:p>
-          <a:p>
-            <a:r>
-              <a:rPr lang="en-US" sz="1200" dirty="0"/>
-              <a:t>Deferred writes</a:t>
-            </a:r>
-          </a:p>
-          <a:p>
-            <a:r>
-              <a:rPr lang="en-US" sz="1200" dirty="0"/>
-              <a:t>I/O optimization</a:t>
-            </a:r>
-          </a:p>
-        </p:txBody>
-      </p:sp>
-      <p:sp>
-        <p:nvSpPr>
-          <p:cNvPr id="11" name="TextBox 10">
-            <a:extLst>
-              <a:ext uri="{FF2B5EF4-FFF2-40B4-BE49-F238E27FC236}">
-                <a16:creationId xmlns:a16="http://schemas.microsoft.com/office/drawing/2014/main" id="{8CB60A99-9AB6-B012-7680-83C2C62C186E}"/>
-              </a:ext>
-            </a:extLst>
-          </p:cNvPr>
-          <p:cNvSpPr txBox="1"/>
-          <p:nvPr/>
-        </p:nvSpPr>
-        <p:spPr>
-          <a:xfrm>
-            <a:off x="7621288" y="3232372"/>
-            <a:ext cx="1153758" cy="276999"/>
-          </a:xfrm>
-          <a:prstGeom prst="rect">
-            <a:avLst/>
-          </a:prstGeom>
-          <a:noFill/>
-        </p:spPr>
-        <p:txBody>
-          <a:bodyPr wrap="square" rtlCol="0">
-            <a:spAutoFit/>
-          </a:bodyPr>
-          <a:lstStyle/>
-          <a:p>
-            <a:r>
-              <a:rPr lang="en-US" sz="1200" dirty="0"/>
-              <a:t>Fault recovery</a:t>
-            </a:r>
-          </a:p>
-        </p:txBody>
-      </p:sp>
-      <p:cxnSp>
-        <p:nvCxnSpPr>
-          <p:cNvPr id="17" name="Elbow Connector 16">
-            <a:extLst>
-              <a:ext uri="{FF2B5EF4-FFF2-40B4-BE49-F238E27FC236}">
-                <a16:creationId xmlns:a16="http://schemas.microsoft.com/office/drawing/2014/main" id="{574861F2-D17B-1995-CBC9-4D89BD18B264}"/>
-              </a:ext>
-            </a:extLst>
-          </p:cNvPr>
-          <p:cNvCxnSpPr>
-            <a:stCxn id="5" idx="2"/>
-            <a:endCxn id="6" idx="0"/>
-          </p:cNvCxnSpPr>
-          <p:nvPr/>
-        </p:nvCxnSpPr>
-        <p:spPr>
-          <a:xfrm rot="5400000">
-            <a:off x="4685464" y="2170856"/>
-            <a:ext cx="896697" cy="1069383"/>
-          </a:xfrm>
-          <a:prstGeom prst="bentConnector3">
-            <a:avLst/>
-          </a:prstGeom>
-          <a:ln w="28575">
-            <a:tailEnd type="triangle"/>
-          </a:ln>
-        </p:spPr>
-        <p:style>
-          <a:lnRef idx="1">
-            <a:schemeClr val="accent1"/>
-          </a:lnRef>
-          <a:fillRef idx="0">
-            <a:schemeClr val="accent1"/>
-          </a:fillRef>
-          <a:effectRef idx="0">
-            <a:schemeClr val="accent1"/>
-          </a:effectRef>
-          <a:fontRef idx="minor">
-            <a:schemeClr val="tx1"/>
-          </a:fontRef>
-        </p:style>
-      </p:cxnSp>
-      <p:cxnSp>
-        <p:nvCxnSpPr>
-          <p:cNvPr id="18" name="Elbow Connector 17">
-            <a:extLst>
-              <a:ext uri="{FF2B5EF4-FFF2-40B4-BE49-F238E27FC236}">
-                <a16:creationId xmlns:a16="http://schemas.microsoft.com/office/drawing/2014/main" id="{05F245CB-743C-0DEE-2C3E-D6DD6EE30224}"/>
-              </a:ext>
-            </a:extLst>
-          </p:cNvPr>
-          <p:cNvCxnSpPr>
-            <a:cxnSpLocks/>
-            <a:stCxn id="5" idx="2"/>
-            <a:endCxn id="7" idx="0"/>
-          </p:cNvCxnSpPr>
-          <p:nvPr/>
-        </p:nvCxnSpPr>
-        <p:spPr>
-          <a:xfrm rot="16200000" flipH="1">
-            <a:off x="5792204" y="2133498"/>
-            <a:ext cx="887849" cy="1135250"/>
-          </a:xfrm>
-          <a:prstGeom prst="bentConnector3">
-            <a:avLst>
-              <a:gd name="adj1" fmla="val 50000"/>
-            </a:avLst>
-          </a:prstGeom>
-          <a:ln w="28575">
-            <a:tailEnd type="triangle"/>
-          </a:ln>
-        </p:spPr>
-        <p:style>
-          <a:lnRef idx="1">
-            <a:schemeClr val="accent1"/>
-          </a:lnRef>
-          <a:fillRef idx="0">
-            <a:schemeClr val="accent1"/>
-          </a:fillRef>
-          <a:effectRef idx="0">
-            <a:schemeClr val="accent1"/>
-          </a:effectRef>
-          <a:fontRef idx="minor">
-            <a:schemeClr val="tx1"/>
-          </a:fontRef>
-        </p:style>
-      </p:cxnSp>
-      <p:cxnSp>
-        <p:nvCxnSpPr>
-          <p:cNvPr id="21" name="Elbow Connector 20">
-            <a:extLst>
-              <a:ext uri="{FF2B5EF4-FFF2-40B4-BE49-F238E27FC236}">
-                <a16:creationId xmlns:a16="http://schemas.microsoft.com/office/drawing/2014/main" id="{349AD1FC-48BC-7866-738F-E790C48BB1B3}"/>
-              </a:ext>
-            </a:extLst>
-          </p:cNvPr>
-          <p:cNvCxnSpPr>
-            <a:cxnSpLocks/>
-            <a:stCxn id="6" idx="2"/>
-            <a:endCxn id="8" idx="0"/>
-          </p:cNvCxnSpPr>
-          <p:nvPr/>
-        </p:nvCxnSpPr>
-        <p:spPr>
-          <a:xfrm rot="16200000" flipH="1">
-            <a:off x="4689887" y="3497081"/>
-            <a:ext cx="887849" cy="1069383"/>
-          </a:xfrm>
-          <a:prstGeom prst="bentConnector3">
-            <a:avLst>
-              <a:gd name="adj1" fmla="val 50000"/>
-            </a:avLst>
-          </a:prstGeom>
-          <a:ln w="28575">
-            <a:tailEnd type="triangle"/>
-          </a:ln>
-        </p:spPr>
-        <p:style>
-          <a:lnRef idx="1">
-            <a:schemeClr val="accent1"/>
-          </a:lnRef>
-          <a:fillRef idx="0">
-            <a:schemeClr val="accent1"/>
-          </a:fillRef>
-          <a:effectRef idx="0">
-            <a:schemeClr val="accent1"/>
-          </a:effectRef>
-          <a:fontRef idx="minor">
-            <a:schemeClr val="tx1"/>
-          </a:fontRef>
-        </p:style>
-      </p:cxnSp>
-      <p:cxnSp>
-        <p:nvCxnSpPr>
-          <p:cNvPr id="24" name="Elbow Connector 23">
-            <a:extLst>
-              <a:ext uri="{FF2B5EF4-FFF2-40B4-BE49-F238E27FC236}">
-                <a16:creationId xmlns:a16="http://schemas.microsoft.com/office/drawing/2014/main" id="{8BF9B278-DE53-1ACB-F77A-F4F7DE9691A2}"/>
-              </a:ext>
-            </a:extLst>
-          </p:cNvPr>
-          <p:cNvCxnSpPr>
-            <a:cxnSpLocks/>
-            <a:stCxn id="7" idx="2"/>
-            <a:endCxn id="8" idx="0"/>
-          </p:cNvCxnSpPr>
-          <p:nvPr/>
-        </p:nvCxnSpPr>
-        <p:spPr>
-          <a:xfrm rot="5400000">
-            <a:off x="5787780" y="3459724"/>
-            <a:ext cx="896697" cy="1135250"/>
-          </a:xfrm>
-          <a:prstGeom prst="bentConnector3">
-            <a:avLst>
-              <a:gd name="adj1" fmla="val 50000"/>
-            </a:avLst>
-          </a:prstGeom>
-          <a:ln w="28575">
-            <a:tailEnd type="triangle"/>
-          </a:ln>
-        </p:spPr>
-        <p:style>
-          <a:lnRef idx="1">
-            <a:schemeClr val="accent1"/>
-          </a:lnRef>
-          <a:fillRef idx="0">
-            <a:schemeClr val="accent1"/>
-          </a:fillRef>
-          <a:effectRef idx="0">
-            <a:schemeClr val="accent1"/>
-          </a:effectRef>
-          <a:fontRef idx="minor">
-            <a:schemeClr val="tx1"/>
-          </a:fontRef>
-        </p:style>
-      </p:cxnSp>
-      <p:sp>
-        <p:nvSpPr>
-          <p:cNvPr id="40" name="TextBox 39">
-            <a:extLst>
-              <a:ext uri="{FF2B5EF4-FFF2-40B4-BE49-F238E27FC236}">
-                <a16:creationId xmlns:a16="http://schemas.microsoft.com/office/drawing/2014/main" id="{30D66A92-C862-DCEF-30B8-81C2F4554B39}"/>
-              </a:ext>
-            </a:extLst>
-          </p:cNvPr>
-          <p:cNvSpPr txBox="1"/>
-          <p:nvPr/>
-        </p:nvSpPr>
-        <p:spPr>
-          <a:xfrm>
-            <a:off x="2378990" y="1017526"/>
-            <a:ext cx="925253" cy="307777"/>
-          </a:xfrm>
-          <a:prstGeom prst="rect">
-            <a:avLst/>
-          </a:prstGeom>
-          <a:noFill/>
-        </p:spPr>
-        <p:txBody>
-          <a:bodyPr wrap="none" rtlCol="0">
-            <a:spAutoFit/>
-          </a:bodyPr>
-          <a:lstStyle/>
-          <a:p>
-            <a:r>
-              <a:rPr lang="en-US" b="1" dirty="0"/>
-              <a:t>SERVER</a:t>
-            </a:r>
-          </a:p>
-        </p:txBody>
-      </p:sp>
-      <p:sp>
-        <p:nvSpPr>
-          <p:cNvPr id="42" name="TextBox 41">
-            <a:extLst>
-              <a:ext uri="{FF2B5EF4-FFF2-40B4-BE49-F238E27FC236}">
-                <a16:creationId xmlns:a16="http://schemas.microsoft.com/office/drawing/2014/main" id="{5C0DFF0C-58F5-2F3B-D5A2-157BC08FE78A}"/>
-              </a:ext>
-            </a:extLst>
-          </p:cNvPr>
-          <p:cNvSpPr txBox="1"/>
-          <p:nvPr/>
-        </p:nvSpPr>
-        <p:spPr>
-          <a:xfrm>
-            <a:off x="311700" y="2792636"/>
-            <a:ext cx="1317990" cy="307777"/>
-          </a:xfrm>
-          <a:prstGeom prst="rect">
-            <a:avLst/>
-          </a:prstGeom>
-          <a:noFill/>
-        </p:spPr>
-        <p:txBody>
-          <a:bodyPr wrap="none" rtlCol="0">
-            <a:spAutoFit/>
-          </a:bodyPr>
-          <a:lstStyle/>
-          <a:p>
-            <a:r>
-              <a:rPr lang="en-US" b="1" dirty="0"/>
-              <a:t>CLIENT (you)</a:t>
-            </a:r>
-          </a:p>
-        </p:txBody>
-      </p:sp>
-      <p:sp>
-        <p:nvSpPr>
-          <p:cNvPr id="44" name="Left-Right Arrow 43">
-            <a:extLst>
-              <a:ext uri="{FF2B5EF4-FFF2-40B4-BE49-F238E27FC236}">
-                <a16:creationId xmlns:a16="http://schemas.microsoft.com/office/drawing/2014/main" id="{20BA1686-7D0D-5805-7604-CF0F11C871FC}"/>
-              </a:ext>
-            </a:extLst>
-          </p:cNvPr>
-          <p:cNvSpPr/>
-          <p:nvPr/>
-        </p:nvSpPr>
-        <p:spPr>
-          <a:xfrm>
-            <a:off x="1625173" y="2760047"/>
-            <a:ext cx="624872" cy="372954"/>
-          </a:xfrm>
-          <a:prstGeom prst="leftRightArrow">
-            <a:avLst/>
-          </a:prstGeom>
-        </p:spPr>
-        <p:style>
-          <a:lnRef idx="2">
-            <a:schemeClr val="accent1">
-              <a:shade val="50000"/>
-            </a:schemeClr>
-          </a:lnRef>
-          <a:fillRef idx="1">
-            <a:schemeClr val="accent1"/>
-          </a:fillRef>
-          <a:effectRef idx="0">
-            <a:schemeClr val="accent1"/>
-          </a:effectRef>
-          <a:fontRef idx="minor">
-            <a:schemeClr val="lt1"/>
-          </a:fontRef>
-        </p:style>
-        <p:txBody>
-          <a:bodyPr rtlCol="0" anchor="ctr"/>
-          <a:lstStyle/>
-          <a:p>
-            <a:pPr algn="ctr"/>
-            <a:endParaRPr lang="en-US"/>
-          </a:p>
-        </p:txBody>
-      </p:sp>
-      <p:sp>
-        <p:nvSpPr>
-          <p:cNvPr id="46" name="TextBox 45">
-            <a:extLst>
-              <a:ext uri="{FF2B5EF4-FFF2-40B4-BE49-F238E27FC236}">
-                <a16:creationId xmlns:a16="http://schemas.microsoft.com/office/drawing/2014/main" id="{E2803656-89AA-5055-F3E1-01AD046FE953}"/>
-              </a:ext>
-            </a:extLst>
-          </p:cNvPr>
-          <p:cNvSpPr txBox="1"/>
-          <p:nvPr/>
-        </p:nvSpPr>
-        <p:spPr>
-          <a:xfrm>
-            <a:off x="1586435" y="3181674"/>
-            <a:ext cx="749938" cy="276999"/>
-          </a:xfrm>
-          <a:prstGeom prst="rect">
-            <a:avLst/>
-          </a:prstGeom>
-          <a:noFill/>
-        </p:spPr>
-        <p:txBody>
-          <a:bodyPr wrap="square" rtlCol="0">
-            <a:spAutoFit/>
-          </a:bodyPr>
-          <a:lstStyle/>
-          <a:p>
-            <a:r>
-              <a:rPr lang="en-US" sz="1200" dirty="0"/>
-              <a:t>network</a:t>
-            </a:r>
-          </a:p>
-        </p:txBody>
-      </p:sp>
-      <p:sp>
-        <p:nvSpPr>
-          <p:cNvPr id="47" name="TextBox 46">
-            <a:extLst>
-              <a:ext uri="{FF2B5EF4-FFF2-40B4-BE49-F238E27FC236}">
-                <a16:creationId xmlns:a16="http://schemas.microsoft.com/office/drawing/2014/main" id="{35FFD1FE-4180-3ACE-81F8-8D50DFBCEDE9}"/>
-              </a:ext>
-            </a:extLst>
-          </p:cNvPr>
-          <p:cNvSpPr txBox="1"/>
-          <p:nvPr/>
-        </p:nvSpPr>
-        <p:spPr>
-          <a:xfrm>
-            <a:off x="311700" y="3181673"/>
-            <a:ext cx="913532" cy="830997"/>
-          </a:xfrm>
-          <a:prstGeom prst="rect">
-            <a:avLst/>
-          </a:prstGeom>
-          <a:noFill/>
-        </p:spPr>
-        <p:txBody>
-          <a:bodyPr wrap="square" rtlCol="0">
-            <a:spAutoFit/>
-          </a:bodyPr>
-          <a:lstStyle/>
-          <a:p>
-            <a:r>
-              <a:rPr lang="en-US" sz="1200" dirty="0"/>
-              <a:t>Command line or</a:t>
-            </a:r>
-          </a:p>
-          <a:p>
-            <a:r>
-              <a:rPr lang="en-US" sz="1200" dirty="0"/>
-              <a:t>from program</a:t>
-            </a:r>
-          </a:p>
-        </p:txBody>
-      </p:sp>
+        </p:nvGraphicFramePr>
+        <p:xfrm>
+          <a:off x="311700" y="1147160"/>
+          <a:ext cx="8379296" cy="3521120"/>
+        </p:xfrm>
+        <a:graphic>
+          <a:graphicData uri="http://schemas.openxmlformats.org/drawingml/2006/table">
+            <a:tbl>
+              <a:tblPr firstRow="1" bandRow="1">
+                <a:tableStyleId>{5C22544A-7EE6-4342-B048-85BDC9FD1C3A}</a:tableStyleId>
+              </a:tblPr>
+              <a:tblGrid>
+                <a:gridCol w="2094824">
+                  <a:extLst>
+                    <a:ext uri="{9D8B030D-6E8A-4147-A177-3AD203B41FA5}">
+                      <a16:colId xmlns:a16="http://schemas.microsoft.com/office/drawing/2014/main" val="3399167800"/>
+                    </a:ext>
+                  </a:extLst>
+                </a:gridCol>
+                <a:gridCol w="2094824">
+                  <a:extLst>
+                    <a:ext uri="{9D8B030D-6E8A-4147-A177-3AD203B41FA5}">
+                      <a16:colId xmlns:a16="http://schemas.microsoft.com/office/drawing/2014/main" val="1671075224"/>
+                    </a:ext>
+                  </a:extLst>
+                </a:gridCol>
+                <a:gridCol w="2094824">
+                  <a:extLst>
+                    <a:ext uri="{9D8B030D-6E8A-4147-A177-3AD203B41FA5}">
+                      <a16:colId xmlns:a16="http://schemas.microsoft.com/office/drawing/2014/main" val="766167809"/>
+                    </a:ext>
+                  </a:extLst>
+                </a:gridCol>
+                <a:gridCol w="2094824">
+                  <a:extLst>
+                    <a:ext uri="{9D8B030D-6E8A-4147-A177-3AD203B41FA5}">
+                      <a16:colId xmlns:a16="http://schemas.microsoft.com/office/drawing/2014/main" val="728976314"/>
+                    </a:ext>
+                  </a:extLst>
+                </a:gridCol>
+              </a:tblGrid>
+              <a:tr h="491660">
+                <a:tc>
+                  <a:txBody>
+                    <a:bodyPr/>
+                    <a:lstStyle/>
+                    <a:p>
+                      <a:endParaRPr lang="en-US" dirty="0"/>
+                    </a:p>
+                  </a:txBody>
+                  <a:tcPr/>
+                </a:tc>
+                <a:tc>
+                  <a:txBody>
+                    <a:bodyPr/>
+                    <a:lstStyle/>
+                    <a:p>
+                      <a:r>
+                        <a:rPr lang="en-US" dirty="0"/>
+                        <a:t>CSV files</a:t>
+                      </a:r>
+                    </a:p>
+                  </a:txBody>
+                  <a:tcPr/>
+                </a:tc>
+                <a:tc>
+                  <a:txBody>
+                    <a:bodyPr/>
+                    <a:lstStyle/>
+                    <a:p>
+                      <a:r>
+                        <a:rPr lang="en-US" dirty="0"/>
+                        <a:t>Local RDBMS (</a:t>
+                      </a:r>
+                      <a:r>
+                        <a:rPr lang="en-US" dirty="0" err="1"/>
+                        <a:t>DuckDB</a:t>
+                      </a:r>
+                      <a:r>
+                        <a:rPr lang="en-US" dirty="0"/>
+                        <a:t>)</a:t>
+                      </a:r>
+                    </a:p>
+                  </a:txBody>
+                  <a:tcPr/>
+                </a:tc>
+                <a:tc>
+                  <a:txBody>
+                    <a:bodyPr/>
+                    <a:lstStyle/>
+                    <a:p>
+                      <a:r>
+                        <a:rPr lang="en-US" dirty="0"/>
+                        <a:t>Client/server RDBMS (PostgreSQL)</a:t>
+                      </a:r>
+                    </a:p>
+                  </a:txBody>
+                  <a:tcPr/>
+                </a:tc>
+                <a:extLst>
+                  <a:ext uri="{0D108BD9-81ED-4DB2-BD59-A6C34878D82A}">
+                    <a16:rowId xmlns:a16="http://schemas.microsoft.com/office/drawing/2014/main" val="3450897975"/>
+                  </a:ext>
+                </a:extLst>
+              </a:tr>
+              <a:tr h="491660">
+                <a:tc>
+                  <a:txBody>
+                    <a:bodyPr/>
+                    <a:lstStyle/>
+                    <a:p>
+                      <a:r>
+                        <a:rPr lang="en-US" b="1" dirty="0"/>
+                        <a:t>Storage location</a:t>
+                      </a:r>
+                    </a:p>
+                  </a:txBody>
+                  <a:tcPr/>
+                </a:tc>
+                <a:tc>
+                  <a:txBody>
+                    <a:bodyPr/>
+                    <a:lstStyle/>
+                    <a:p>
+                      <a:r>
+                        <a:rPr lang="en-US" dirty="0"/>
+                        <a:t>Local filesystem</a:t>
+                      </a:r>
+                    </a:p>
+                  </a:txBody>
+                  <a:tcPr/>
+                </a:tc>
+                <a:tc>
+                  <a:txBody>
+                    <a:bodyPr/>
+                    <a:lstStyle/>
+                    <a:p>
+                      <a:r>
+                        <a:rPr lang="en-US" dirty="0"/>
+                        <a:t>Local filesystem</a:t>
+                      </a:r>
+                    </a:p>
+                  </a:txBody>
+                  <a:tcPr/>
+                </a:tc>
+                <a:tc>
+                  <a:txBody>
+                    <a:bodyPr/>
+                    <a:lstStyle/>
+                    <a:p>
+                      <a:r>
+                        <a:rPr lang="en-US" dirty="0"/>
+                        <a:t>On server</a:t>
+                      </a:r>
+                    </a:p>
+                  </a:txBody>
+                  <a:tcPr/>
+                </a:tc>
+                <a:extLst>
+                  <a:ext uri="{0D108BD9-81ED-4DB2-BD59-A6C34878D82A}">
+                    <a16:rowId xmlns:a16="http://schemas.microsoft.com/office/drawing/2014/main" val="2225548929"/>
+                  </a:ext>
+                </a:extLst>
+              </a:tr>
+              <a:tr h="491660">
+                <a:tc>
+                  <a:txBody>
+                    <a:bodyPr/>
+                    <a:lstStyle/>
+                    <a:p>
+                      <a:r>
+                        <a:rPr lang="en-US" b="1" dirty="0"/>
+                        <a:t>Max data size</a:t>
+                      </a:r>
+                    </a:p>
+                  </a:txBody>
+                  <a:tcPr/>
+                </a:tc>
+                <a:tc>
+                  <a:txBody>
+                    <a:bodyPr/>
+                    <a:lstStyle/>
+                    <a:p>
+                      <a:r>
+                        <a:rPr lang="en-US" dirty="0"/>
+                        <a:t>Fit in RAM (few GB)</a:t>
+                      </a:r>
+                    </a:p>
+                  </a:txBody>
+                  <a:tcPr/>
+                </a:tc>
+                <a:tc>
+                  <a:txBody>
+                    <a:bodyPr/>
+                    <a:lstStyle/>
+                    <a:p>
+                      <a:r>
+                        <a:rPr lang="en-US" dirty="0"/>
+                        <a:t>Big (many  GBs)</a:t>
+                      </a:r>
+                    </a:p>
+                  </a:txBody>
+                  <a:tcPr/>
+                </a:tc>
+                <a:tc>
+                  <a:txBody>
+                    <a:bodyPr/>
+                    <a:lstStyle/>
+                    <a:p>
+                      <a:r>
+                        <a:rPr lang="en-US" dirty="0"/>
+                        <a:t>Gargantuan (many TBs)</a:t>
+                      </a:r>
+                    </a:p>
+                  </a:txBody>
+                  <a:tcPr/>
+                </a:tc>
+                <a:extLst>
+                  <a:ext uri="{0D108BD9-81ED-4DB2-BD59-A6C34878D82A}">
+                    <a16:rowId xmlns:a16="http://schemas.microsoft.com/office/drawing/2014/main" val="1016866448"/>
+                  </a:ext>
+                </a:extLst>
+              </a:tr>
+              <a:tr h="491660">
+                <a:tc>
+                  <a:txBody>
+                    <a:bodyPr/>
+                    <a:lstStyle/>
+                    <a:p>
+                      <a:r>
+                        <a:rPr lang="en-US" b="1" dirty="0"/>
+                        <a:t>Access</a:t>
+                      </a:r>
+                    </a:p>
+                  </a:txBody>
+                  <a:tcPr/>
+                </a:tc>
+                <a:tc>
+                  <a:txBody>
+                    <a:bodyPr/>
+                    <a:lstStyle/>
+                    <a:p>
+                      <a:r>
+                        <a:rPr lang="en-US" dirty="0"/>
+                        <a:t>R, Python, Excel, …</a:t>
+                      </a:r>
+                    </a:p>
+                  </a:txBody>
+                  <a:tcPr/>
+                </a:tc>
+                <a:tc>
+                  <a:txBody>
+                    <a:bodyPr/>
+                    <a:lstStyle/>
+                    <a:p>
+                      <a:r>
+                        <a:rPr lang="en-US" dirty="0"/>
+                        <a:t>App</a:t>
+                      </a:r>
+                    </a:p>
+                  </a:txBody>
+                  <a:tcPr/>
+                </a:tc>
+                <a:tc>
+                  <a:txBody>
+                    <a:bodyPr/>
+                    <a:lstStyle/>
+                    <a:p>
+                      <a:r>
+                        <a:rPr lang="en-US" dirty="0"/>
+                        <a:t>Client tool, API</a:t>
+                      </a:r>
+                    </a:p>
+                  </a:txBody>
+                  <a:tcPr/>
+                </a:tc>
+                <a:extLst>
+                  <a:ext uri="{0D108BD9-81ED-4DB2-BD59-A6C34878D82A}">
+                    <a16:rowId xmlns:a16="http://schemas.microsoft.com/office/drawing/2014/main" val="872724970"/>
+                  </a:ext>
+                </a:extLst>
+              </a:tr>
+              <a:tr h="491660">
+                <a:tc>
+                  <a:txBody>
+                    <a:bodyPr/>
+                    <a:lstStyle/>
+                    <a:p>
+                      <a:r>
+                        <a:rPr lang="en-US" b="1" dirty="0"/>
+                        <a:t>Support for SQL</a:t>
+                      </a:r>
+                    </a:p>
+                  </a:txBody>
+                  <a:tcPr/>
+                </a:tc>
+                <a:tc>
+                  <a:txBody>
+                    <a:bodyPr/>
+                    <a:lstStyle/>
+                    <a:p>
+                      <a:r>
+                        <a:rPr lang="en-US" dirty="0"/>
+                        <a:t>N/A</a:t>
+                      </a:r>
+                    </a:p>
+                  </a:txBody>
+                  <a:tcPr/>
+                </a:tc>
+                <a:tc>
+                  <a:txBody>
+                    <a:bodyPr/>
+                    <a:lstStyle/>
+                    <a:p>
+                      <a:r>
+                        <a:rPr lang="en-US" dirty="0"/>
+                        <a:t>Hit and miss</a:t>
+                      </a:r>
+                    </a:p>
+                  </a:txBody>
+                  <a:tcPr/>
+                </a:tc>
+                <a:tc>
+                  <a:txBody>
+                    <a:bodyPr/>
+                    <a:lstStyle/>
+                    <a:p>
+                      <a:r>
+                        <a:rPr lang="en-US" dirty="0"/>
+                        <a:t>Very good</a:t>
+                      </a:r>
+                    </a:p>
+                  </a:txBody>
+                  <a:tcPr/>
+                </a:tc>
+                <a:extLst>
+                  <a:ext uri="{0D108BD9-81ED-4DB2-BD59-A6C34878D82A}">
+                    <a16:rowId xmlns:a16="http://schemas.microsoft.com/office/drawing/2014/main" val="1606058834"/>
+                  </a:ext>
+                </a:extLst>
+              </a:tr>
+              <a:tr h="491660">
+                <a:tc>
+                  <a:txBody>
+                    <a:bodyPr/>
+                    <a:lstStyle/>
+                    <a:p>
+                      <a:r>
+                        <a:rPr lang="en-US" b="1" dirty="0"/>
+                        <a:t>Administration</a:t>
+                      </a:r>
+                    </a:p>
+                  </a:txBody>
+                  <a:tcPr/>
+                </a:tc>
+                <a:tc>
+                  <a:txBody>
+                    <a:bodyPr/>
+                    <a:lstStyle/>
+                    <a:p>
+                      <a:r>
+                        <a:rPr lang="en-US" dirty="0"/>
+                        <a:t>N/A</a:t>
+                      </a:r>
+                    </a:p>
+                  </a:txBody>
+                  <a:tcPr/>
+                </a:tc>
+                <a:tc>
+                  <a:txBody>
+                    <a:bodyPr/>
+                    <a:lstStyle/>
+                    <a:p>
+                      <a:r>
+                        <a:rPr lang="en-US" dirty="0"/>
+                        <a:t>None</a:t>
+                      </a:r>
+                    </a:p>
+                  </a:txBody>
+                  <a:tcPr/>
+                </a:tc>
+                <a:tc>
+                  <a:txBody>
+                    <a:bodyPr/>
+                    <a:lstStyle/>
+                    <a:p>
+                      <a:r>
+                        <a:rPr lang="en-US" dirty="0"/>
+                        <a:t>User accounts, passwords, permissions</a:t>
+                      </a:r>
+                    </a:p>
+                  </a:txBody>
+                  <a:tcPr/>
+                </a:tc>
+                <a:extLst>
+                  <a:ext uri="{0D108BD9-81ED-4DB2-BD59-A6C34878D82A}">
+                    <a16:rowId xmlns:a16="http://schemas.microsoft.com/office/drawing/2014/main" val="2124363894"/>
+                  </a:ext>
+                </a:extLst>
+              </a:tr>
+              <a:tr h="491660">
+                <a:tc>
+                  <a:txBody>
+                    <a:bodyPr/>
+                    <a:lstStyle/>
+                    <a:p>
+                      <a:r>
+                        <a:rPr lang="en-US" b="1" dirty="0"/>
+                        <a:t>Data portability</a:t>
+                      </a:r>
+                    </a:p>
+                  </a:txBody>
+                  <a:tcPr/>
+                </a:tc>
+                <a:tc>
+                  <a:txBody>
+                    <a:bodyPr/>
+                    <a:lstStyle/>
+                    <a:p>
+                      <a:r>
+                        <a:rPr lang="en-US" dirty="0"/>
+                        <a:t>Universal format; file sharing</a:t>
+                      </a:r>
+                    </a:p>
+                  </a:txBody>
+                  <a:tcPr/>
+                </a:tc>
+                <a:tc>
+                  <a:txBody>
+                    <a:bodyPr/>
+                    <a:lstStyle/>
+                    <a:p>
+                      <a:r>
+                        <a:rPr lang="en-US" dirty="0"/>
+                        <a:t>App-specific format; file sharing</a:t>
+                      </a:r>
+                    </a:p>
+                  </a:txBody>
+                  <a:tcPr/>
+                </a:tc>
+                <a:tc>
+                  <a:txBody>
+                    <a:bodyPr/>
+                    <a:lstStyle/>
+                    <a:p>
+                      <a:r>
+                        <a:rPr lang="en-US" dirty="0"/>
+                        <a:t>Export/import</a:t>
+                      </a:r>
+                    </a:p>
+                  </a:txBody>
+                  <a:tcPr/>
+                </a:tc>
+                <a:extLst>
+                  <a:ext uri="{0D108BD9-81ED-4DB2-BD59-A6C34878D82A}">
+                    <a16:rowId xmlns:a16="http://schemas.microsoft.com/office/drawing/2014/main" val="1350887745"/>
+                  </a:ext>
+                </a:extLst>
+              </a:tr>
+            </a:tbl>
+          </a:graphicData>
+        </a:graphic>
+      </p:graphicFrame>
     </p:spTree>
     <p:extLst>
       <p:ext uri="{BB962C8B-B14F-4D97-AF65-F5344CB8AC3E}">
-        <p14:creationId xmlns:p14="http://schemas.microsoft.com/office/powerpoint/2010/main" val="273315678"/>
-      </p:ext>
-    </p:extLst>
-  </p:cSld>
-  <p:clrMapOvr>
-    <a:masterClrMapping/>
-  </p:clrMapOvr>
-</p:sld>
-</file>
-
-<file path=ppt/slides/slide8.xml><?xml version="1.0" encoding="utf-8"?>
-<p:sld xmlns:a="http://schemas.openxmlformats.org/drawingml/2006/main" xmlns:r="http://schemas.openxmlformats.org/officeDocument/2006/relationships" xmlns:p="http://schemas.openxmlformats.org/presentationml/2006/main">
-  <p:cSld>
-    <p:spTree>
-      <p:nvGrpSpPr>
-        <p:cNvPr id="1" name=""/>
-        <p:cNvGrpSpPr/>
-        <p:nvPr/>
-      </p:nvGrpSpPr>
-      <p:grpSpPr>
-        <a:xfrm>
-          <a:off x="0" y="0"/>
-          <a:ext cx="0" cy="0"/>
-          <a:chOff x="0" y="0"/>
-          <a:chExt cx="0" cy="0"/>
-        </a:xfrm>
-      </p:grpSpPr>
-      <p:sp>
-        <p:nvSpPr>
-          <p:cNvPr id="2" name="Title 1">
-            <a:extLst>
-              <a:ext uri="{FF2B5EF4-FFF2-40B4-BE49-F238E27FC236}">
-                <a16:creationId xmlns:a16="http://schemas.microsoft.com/office/drawing/2014/main" id="{3983CC3A-88D2-560B-B5EE-EC61D5A52242}"/>
-              </a:ext>
-            </a:extLst>
-          </p:cNvPr>
-          <p:cNvSpPr>
-            <a:spLocks noGrp="1"/>
-          </p:cNvSpPr>
-          <p:nvPr>
-            <p:ph type="title"/>
-          </p:nvPr>
-        </p:nvSpPr>
-        <p:spPr/>
-        <p:txBody>
-          <a:bodyPr>
-            <a:noAutofit/>
-          </a:bodyPr>
-          <a:lstStyle/>
-          <a:p>
-            <a:r>
-              <a:rPr lang="en-US" sz="3200" dirty="0">
-                <a:solidFill>
-                  <a:srgbClr val="004B83"/>
-                </a:solidFill>
-              </a:rPr>
-              <a:t>Local vs client/server databases</a:t>
-            </a:r>
-          </a:p>
-        </p:txBody>
-      </p:sp>
-      <p:sp>
-        <p:nvSpPr>
-          <p:cNvPr id="3" name="Text Placeholder 2">
-            <a:extLst>
-              <a:ext uri="{FF2B5EF4-FFF2-40B4-BE49-F238E27FC236}">
-                <a16:creationId xmlns:a16="http://schemas.microsoft.com/office/drawing/2014/main" id="{F193F1C7-E077-68D2-7E2A-8BAB71A382D9}"/>
-              </a:ext>
-            </a:extLst>
-          </p:cNvPr>
-          <p:cNvSpPr>
-            <a:spLocks noGrp="1"/>
-          </p:cNvSpPr>
-          <p:nvPr>
-            <p:ph type="body" idx="1"/>
-          </p:nvPr>
-        </p:nvSpPr>
-        <p:spPr>
-          <a:xfrm>
-            <a:off x="311700" y="1160224"/>
-            <a:ext cx="3999900" cy="3416400"/>
-          </a:xfrm>
-        </p:spPr>
-        <p:txBody>
-          <a:bodyPr>
-            <a:normAutofit/>
-          </a:bodyPr>
-          <a:lstStyle/>
-          <a:p>
-            <a:pPr marL="139700" indent="0">
-              <a:buNone/>
-            </a:pPr>
-            <a:r>
-              <a:rPr lang="en-US" b="1" u="sng" dirty="0">
-                <a:latin typeface="Avenir Book" panose="02000503020000020003" pitchFamily="2" charset="0"/>
-              </a:rPr>
-              <a:t>Local (</a:t>
-            </a:r>
-            <a:r>
-              <a:rPr lang="en-US" b="1" u="sng" dirty="0" err="1">
-                <a:latin typeface="Avenir Book" panose="02000503020000020003" pitchFamily="2" charset="0"/>
-              </a:rPr>
-              <a:t>DuckDB</a:t>
-            </a:r>
-            <a:r>
-              <a:rPr lang="en-US" b="1" u="sng" dirty="0">
-                <a:latin typeface="Avenir Book" panose="02000503020000020003" pitchFamily="2" charset="0"/>
-              </a:rPr>
-              <a:t>, SQLite)</a:t>
-            </a:r>
-            <a:br>
-              <a:rPr lang="en-US" b="1" u="sng" dirty="0">
-                <a:latin typeface="Avenir Book" panose="02000503020000020003" pitchFamily="2" charset="0"/>
-              </a:rPr>
-            </a:br>
-            <a:endParaRPr lang="en-US" b="1" u="sng" dirty="0">
-              <a:latin typeface="Avenir Book" panose="02000503020000020003" pitchFamily="2" charset="0"/>
-            </a:endParaRPr>
-          </a:p>
-          <a:p>
-            <a:r>
-              <a:rPr lang="en-US" dirty="0">
-                <a:latin typeface="Avenir Book" panose="02000503020000020003" pitchFamily="2" charset="0"/>
-              </a:rPr>
-              <a:t>Storage</a:t>
-            </a:r>
-          </a:p>
-          <a:p>
-            <a:pPr lvl="1"/>
-            <a:r>
-              <a:rPr lang="en-US" dirty="0">
-                <a:latin typeface="Avenir Book" panose="02000503020000020003" pitchFamily="2" charset="0"/>
-              </a:rPr>
-              <a:t>(Single) local file</a:t>
-            </a:r>
-          </a:p>
-          <a:p>
-            <a:r>
-              <a:rPr lang="en-US" dirty="0">
-                <a:latin typeface="Avenir Book" panose="02000503020000020003" pitchFamily="2" charset="0"/>
-              </a:rPr>
-              <a:t>Access</a:t>
-            </a:r>
-          </a:p>
-          <a:p>
-            <a:pPr lvl="1"/>
-            <a:r>
-              <a:rPr lang="en-US" dirty="0">
-                <a:latin typeface="Avenir Book" panose="02000503020000020003" pitchFamily="2" charset="0"/>
-              </a:rPr>
-              <a:t>Command line tool or library open that file</a:t>
-            </a:r>
-          </a:p>
-          <a:p>
-            <a:pPr lvl="1"/>
-            <a:r>
-              <a:rPr lang="en-US" dirty="0">
-                <a:latin typeface="Avenir Book" panose="02000503020000020003" pitchFamily="2" charset="0"/>
-              </a:rPr>
-              <a:t>No authentication, etc.</a:t>
-            </a:r>
-          </a:p>
-          <a:p>
-            <a:r>
-              <a:rPr lang="en-US" dirty="0">
-                <a:latin typeface="Avenir Book" panose="02000503020000020003" pitchFamily="2" charset="0"/>
-              </a:rPr>
-              <a:t>Support for SQL standard</a:t>
-            </a:r>
-          </a:p>
-          <a:p>
-            <a:pPr lvl="1"/>
-            <a:r>
-              <a:rPr lang="en-US" dirty="0">
-                <a:latin typeface="Avenir Book" panose="02000503020000020003" pitchFamily="2" charset="0"/>
-              </a:rPr>
-              <a:t>Essentials there, but many pieces missing</a:t>
-            </a:r>
-          </a:p>
-          <a:p>
-            <a:r>
-              <a:rPr lang="en-US" dirty="0">
-                <a:latin typeface="Avenir Book" panose="02000503020000020003" pitchFamily="2" charset="0"/>
-              </a:rPr>
-              <a:t>Installation; management</a:t>
-            </a:r>
-          </a:p>
-          <a:p>
-            <a:pPr lvl="1"/>
-            <a:r>
-              <a:rPr lang="en-US" dirty="0">
-                <a:latin typeface="Avenir Book" panose="02000503020000020003" pitchFamily="2" charset="0"/>
-              </a:rPr>
-              <a:t>Super easy; nil</a:t>
-            </a:r>
-          </a:p>
-          <a:p>
-            <a:r>
-              <a:rPr lang="en-US" dirty="0">
-                <a:latin typeface="Avenir Book" panose="02000503020000020003" pitchFamily="2" charset="0"/>
-              </a:rPr>
-              <a:t>Data portability</a:t>
-            </a:r>
-          </a:p>
-          <a:p>
-            <a:pPr lvl="1"/>
-            <a:r>
-              <a:rPr lang="en-US" dirty="0">
-                <a:latin typeface="Avenir Book" panose="02000503020000020003" pitchFamily="2" charset="0"/>
-              </a:rPr>
-              <a:t>Great</a:t>
-            </a:r>
-          </a:p>
-          <a:p>
-            <a:endParaRPr lang="en-US" dirty="0">
-              <a:latin typeface="Avenir Book" panose="02000503020000020003" pitchFamily="2" charset="0"/>
-            </a:endParaRPr>
-          </a:p>
-        </p:txBody>
-      </p:sp>
-      <p:sp>
-        <p:nvSpPr>
-          <p:cNvPr id="5" name="Text Placeholder 4">
-            <a:extLst>
-              <a:ext uri="{FF2B5EF4-FFF2-40B4-BE49-F238E27FC236}">
-                <a16:creationId xmlns:a16="http://schemas.microsoft.com/office/drawing/2014/main" id="{2C0BF0BB-D4A5-F8CB-F94E-192EFE9AF1EC}"/>
-              </a:ext>
-            </a:extLst>
-          </p:cNvPr>
-          <p:cNvSpPr>
-            <a:spLocks noGrp="1"/>
-          </p:cNvSpPr>
-          <p:nvPr>
-            <p:ph type="body" idx="2"/>
-          </p:nvPr>
-        </p:nvSpPr>
-        <p:spPr/>
-        <p:txBody>
-          <a:bodyPr>
-            <a:normAutofit/>
-          </a:bodyPr>
-          <a:lstStyle/>
-          <a:p>
-            <a:pPr marL="139700" indent="0">
-              <a:buNone/>
-            </a:pPr>
-            <a:r>
-              <a:rPr lang="en-US" b="1" u="sng" dirty="0">
-                <a:latin typeface="Avenir Book" panose="02000503020000020003" pitchFamily="2" charset="0"/>
-              </a:rPr>
-              <a:t>Client/server RDBMS (Oracle, SQL Server, PostgreSQL, MySQL, …)</a:t>
-            </a:r>
-          </a:p>
-          <a:p>
-            <a:r>
-              <a:rPr lang="en-US" dirty="0">
-                <a:latin typeface="Avenir Book" panose="02000503020000020003" pitchFamily="2" charset="0"/>
-              </a:rPr>
-              <a:t>Storage</a:t>
-            </a:r>
-          </a:p>
-          <a:p>
-            <a:pPr lvl="1"/>
-            <a:r>
-              <a:rPr lang="en-US" dirty="0">
-                <a:latin typeface="Avenir Book" panose="02000503020000020003" pitchFamily="2" charset="0"/>
-              </a:rPr>
-              <a:t>A mystery</a:t>
-            </a:r>
-          </a:p>
-          <a:p>
-            <a:r>
-              <a:rPr lang="en-US" dirty="0">
-                <a:latin typeface="Avenir Book" panose="02000503020000020003" pitchFamily="2" charset="0"/>
-              </a:rPr>
-              <a:t>Access</a:t>
-            </a:r>
-          </a:p>
-          <a:p>
-            <a:pPr lvl="1"/>
-            <a:r>
-              <a:rPr lang="en-US" dirty="0">
-                <a:latin typeface="Avenir Book" panose="02000503020000020003" pitchFamily="2" charset="0"/>
-              </a:rPr>
-              <a:t>Command line tool or library talk over network (even on same machine)</a:t>
-            </a:r>
-          </a:p>
-          <a:p>
-            <a:pPr lvl="1"/>
-            <a:r>
-              <a:rPr lang="en-US" dirty="0">
-                <a:latin typeface="Avenir Book" panose="02000503020000020003" pitchFamily="2" charset="0"/>
-              </a:rPr>
-              <a:t>User accounts, authentication, permissions</a:t>
-            </a:r>
-          </a:p>
-          <a:p>
-            <a:r>
-              <a:rPr lang="en-US" dirty="0">
-                <a:latin typeface="Avenir Book" panose="02000503020000020003" pitchFamily="2" charset="0"/>
-              </a:rPr>
-              <a:t>Support for SQL standard</a:t>
-            </a:r>
-          </a:p>
-          <a:p>
-            <a:pPr lvl="1"/>
-            <a:r>
-              <a:rPr lang="en-US" dirty="0">
-                <a:latin typeface="Avenir Book" panose="02000503020000020003" pitchFamily="2" charset="0"/>
-              </a:rPr>
-              <a:t>Very good</a:t>
-            </a:r>
-          </a:p>
-          <a:p>
-            <a:r>
-              <a:rPr lang="en-US" dirty="0">
-                <a:latin typeface="Avenir Book" panose="02000503020000020003" pitchFamily="2" charset="0"/>
-              </a:rPr>
-              <a:t>Installation; management</a:t>
-            </a:r>
-          </a:p>
-          <a:p>
-            <a:pPr lvl="1"/>
-            <a:r>
-              <a:rPr lang="en-US" dirty="0">
-                <a:latin typeface="Avenir Book" panose="02000503020000020003" pitchFamily="2" charset="0"/>
-              </a:rPr>
-              <a:t>Easy; obscure</a:t>
-            </a:r>
-          </a:p>
-          <a:p>
-            <a:r>
-              <a:rPr lang="en-US" dirty="0">
-                <a:latin typeface="Avenir Book" panose="02000503020000020003" pitchFamily="2" charset="0"/>
-              </a:rPr>
-              <a:t>Data portability</a:t>
-            </a:r>
-          </a:p>
-          <a:p>
-            <a:pPr lvl="1"/>
-            <a:r>
-              <a:rPr lang="en-US" dirty="0">
-                <a:latin typeface="Avenir Book" panose="02000503020000020003" pitchFamily="2" charset="0"/>
-              </a:rPr>
-              <a:t>Weak to nil</a:t>
-            </a:r>
-          </a:p>
-        </p:txBody>
-      </p:sp>
-      <p:sp>
-        <p:nvSpPr>
-          <p:cNvPr id="4" name="Slide Number Placeholder 3">
-            <a:extLst>
-              <a:ext uri="{FF2B5EF4-FFF2-40B4-BE49-F238E27FC236}">
-                <a16:creationId xmlns:a16="http://schemas.microsoft.com/office/drawing/2014/main" id="{F75D26E5-4B9C-AE7C-4F67-C282F63E900E}"/>
-              </a:ext>
-            </a:extLst>
-          </p:cNvPr>
-          <p:cNvSpPr>
-            <a:spLocks noGrp="1"/>
-          </p:cNvSpPr>
-          <p:nvPr>
-            <p:ph type="sldNum" idx="12"/>
-          </p:nvPr>
-        </p:nvSpPr>
-        <p:spPr/>
-        <p:txBody>
-          <a:bodyPr/>
-          <a:lstStyle/>
-          <a:p>
-            <a:pPr marL="0" lvl="0" indent="0" algn="r" rtl="0">
-              <a:spcBef>
-                <a:spcPts val="0"/>
-              </a:spcBef>
-              <a:spcAft>
-                <a:spcPts val="0"/>
-              </a:spcAft>
-              <a:buNone/>
-            </a:pPr>
-            <a:fld id="{00000000-1234-1234-1234-123412341234}" type="slidenum">
-              <a:rPr lang="en" smtClean="0"/>
-              <a:t>8</a:t>
-            </a:fld>
-            <a:endParaRPr lang="en" dirty="0"/>
-          </a:p>
-        </p:txBody>
-      </p:sp>
-    </p:spTree>
-    <p:extLst>
-      <p:ext uri="{BB962C8B-B14F-4D97-AF65-F5344CB8AC3E}">
-        <p14:creationId xmlns:p14="http://schemas.microsoft.com/office/powerpoint/2010/main" val="425826323"/>
+        <p14:creationId xmlns:p14="http://schemas.microsoft.com/office/powerpoint/2010/main" val="3524858352"/>
       </p:ext>
     </p:extLst>
   </p:cSld>
@@ -18932,7 +18711,7 @@
           <p:nvPr/>
         </p:nvPicPr>
         <p:blipFill>
-          <a:blip r:embed="rId2"/>
+          <a:blip r:embed="rId3"/>
           <a:stretch>
             <a:fillRect/>
           </a:stretch>
